--- a/files/prezentace.pptx
+++ b/files/prezentace.pptx
@@ -7,22 +7,23 @@
   <p:sldIdLst>
     <p:sldId id="256" r:id="rId2"/>
     <p:sldId id="258" r:id="rId3"/>
-    <p:sldId id="260" r:id="rId4"/>
-    <p:sldId id="262" r:id="rId5"/>
-    <p:sldId id="265" r:id="rId6"/>
-    <p:sldId id="267" r:id="rId7"/>
-    <p:sldId id="268" r:id="rId8"/>
-    <p:sldId id="269" r:id="rId9"/>
-    <p:sldId id="264" r:id="rId10"/>
-    <p:sldId id="263" r:id="rId11"/>
-    <p:sldId id="276" r:id="rId12"/>
-    <p:sldId id="266" r:id="rId13"/>
-    <p:sldId id="270" r:id="rId14"/>
-    <p:sldId id="271" r:id="rId15"/>
-    <p:sldId id="272" r:id="rId16"/>
-    <p:sldId id="273" r:id="rId17"/>
-    <p:sldId id="274" r:id="rId18"/>
-    <p:sldId id="275" r:id="rId19"/>
+    <p:sldId id="277" r:id="rId4"/>
+    <p:sldId id="260" r:id="rId5"/>
+    <p:sldId id="262" r:id="rId6"/>
+    <p:sldId id="265" r:id="rId7"/>
+    <p:sldId id="267" r:id="rId8"/>
+    <p:sldId id="268" r:id="rId9"/>
+    <p:sldId id="269" r:id="rId10"/>
+    <p:sldId id="264" r:id="rId11"/>
+    <p:sldId id="263" r:id="rId12"/>
+    <p:sldId id="276" r:id="rId13"/>
+    <p:sldId id="266" r:id="rId14"/>
+    <p:sldId id="270" r:id="rId15"/>
+    <p:sldId id="271" r:id="rId16"/>
+    <p:sldId id="272" r:id="rId17"/>
+    <p:sldId id="273" r:id="rId18"/>
+    <p:sldId id="274" r:id="rId19"/>
+    <p:sldId id="275" r:id="rId20"/>
   </p:sldIdLst>
   <p:sldSz cx="12192000" cy="6858000"/>
   <p:notesSz cx="6858000" cy="9144000"/>
@@ -1059,6 +1060,46 @@
     </pc:docChg>
   </pc:docChgLst>
   <pc:docChgLst>
+    <pc:chgData name="Petr Vrána" userId="S::xvrana2@mendelu.cz::82fa521c-3097-48f4-ba30-999f8c7ff696" providerId="AD" clId="Web-{BC9E9ED8-3FB2-AACB-BE37-FA487D48EDA3}"/>
+    <pc:docChg chg="modSld">
+      <pc:chgData name="Petr Vrána" userId="S::xvrana2@mendelu.cz::82fa521c-3097-48f4-ba30-999f8c7ff696" providerId="AD" clId="Web-{BC9E9ED8-3FB2-AACB-BE37-FA487D48EDA3}" dt="2026-04-28T07:02:25.012" v="2" actId="20577"/>
+      <pc:docMkLst>
+        <pc:docMk/>
+      </pc:docMkLst>
+      <pc:sldChg chg="modSp">
+        <pc:chgData name="Petr Vrána" userId="S::xvrana2@mendelu.cz::82fa521c-3097-48f4-ba30-999f8c7ff696" providerId="AD" clId="Web-{BC9E9ED8-3FB2-AACB-BE37-FA487D48EDA3}" dt="2026-04-28T07:02:25.012" v="2" actId="20577"/>
+        <pc:sldMkLst>
+          <pc:docMk/>
+          <pc:sldMk cId="1460814851" sldId="274"/>
+        </pc:sldMkLst>
+        <pc:spChg chg="mod">
+          <ac:chgData name="Petr Vrána" userId="S::xvrana2@mendelu.cz::82fa521c-3097-48f4-ba30-999f8c7ff696" providerId="AD" clId="Web-{BC9E9ED8-3FB2-AACB-BE37-FA487D48EDA3}" dt="2026-04-28T07:02:25.012" v="2" actId="20577"/>
+          <ac:spMkLst>
+            <pc:docMk/>
+            <pc:sldMk cId="1460814851" sldId="274"/>
+            <ac:spMk id="2" creationId="{23218BDF-5026-714D-6CF6-19FD63BD6BBA}"/>
+          </ac:spMkLst>
+        </pc:spChg>
+      </pc:sldChg>
+    </pc:docChg>
+  </pc:docChgLst>
+  <pc:docChgLst>
+    <pc:chgData name="Martina Mazurová" userId="S::xmazurov@mendelu.cz::67de52c5-fdf8-4364-96cd-b4a9a3dc7c53" providerId="AD" clId="Web-{AF6E80EA-17E8-7A49-3B47-CB58185BF69A}"/>
+    <pc:docChg chg="addSld">
+      <pc:chgData name="Martina Mazurová" userId="S::xmazurov@mendelu.cz::67de52c5-fdf8-4364-96cd-b4a9a3dc7c53" providerId="AD" clId="Web-{AF6E80EA-17E8-7A49-3B47-CB58185BF69A}" dt="2026-04-26T16:16:09.122" v="0"/>
+      <pc:docMkLst>
+        <pc:docMk/>
+      </pc:docMkLst>
+      <pc:sldChg chg="new">
+        <pc:chgData name="Martina Mazurová" userId="S::xmazurov@mendelu.cz::67de52c5-fdf8-4364-96cd-b4a9a3dc7c53" providerId="AD" clId="Web-{AF6E80EA-17E8-7A49-3B47-CB58185BF69A}" dt="2026-04-26T16:16:09.122" v="0"/>
+        <pc:sldMkLst>
+          <pc:docMk/>
+          <pc:sldMk cId="329674865" sldId="264"/>
+        </pc:sldMkLst>
+      </pc:sldChg>
+    </pc:docChg>
+  </pc:docChgLst>
+  <pc:docChgLst>
     <pc:chgData name="Martina Mazurová" userId="S::xmazurov@mendelu.cz::67de52c5-fdf8-4364-96cd-b4a9a3dc7c53" providerId="AD" clId="Web-{0CC88C09-4F55-9E2A-B9A7-C7A97F1CBB70}"/>
     <pc:docChg chg="modSld">
       <pc:chgData name="Martina Mazurová" userId="S::xmazurov@mendelu.cz::67de52c5-fdf8-4364-96cd-b4a9a3dc7c53" providerId="AD" clId="Web-{0CC88C09-4F55-9E2A-B9A7-C7A97F1CBB70}" dt="2026-04-27T09:07:47.100" v="124" actId="20577"/>
@@ -1122,53 +1163,13 @@
       </pc:sldChg>
     </pc:docChg>
   </pc:docChgLst>
-  <pc:docChgLst>
-    <pc:chgData name="Martina Mazurová" userId="S::xmazurov@mendelu.cz::67de52c5-fdf8-4364-96cd-b4a9a3dc7c53" providerId="AD" clId="Web-{AF6E80EA-17E8-7A49-3B47-CB58185BF69A}"/>
-    <pc:docChg chg="addSld">
-      <pc:chgData name="Martina Mazurová" userId="S::xmazurov@mendelu.cz::67de52c5-fdf8-4364-96cd-b4a9a3dc7c53" providerId="AD" clId="Web-{AF6E80EA-17E8-7A49-3B47-CB58185BF69A}" dt="2026-04-26T16:16:09.122" v="0"/>
-      <pc:docMkLst>
-        <pc:docMk/>
-      </pc:docMkLst>
-      <pc:sldChg chg="new">
-        <pc:chgData name="Martina Mazurová" userId="S::xmazurov@mendelu.cz::67de52c5-fdf8-4364-96cd-b4a9a3dc7c53" providerId="AD" clId="Web-{AF6E80EA-17E8-7A49-3B47-CB58185BF69A}" dt="2026-04-26T16:16:09.122" v="0"/>
-        <pc:sldMkLst>
-          <pc:docMk/>
-          <pc:sldMk cId="329674865" sldId="264"/>
-        </pc:sldMkLst>
-      </pc:sldChg>
-    </pc:docChg>
-  </pc:docChgLst>
-  <pc:docChgLst>
-    <pc:chgData name="Petr Vrána" userId="S::xvrana2@mendelu.cz::82fa521c-3097-48f4-ba30-999f8c7ff696" providerId="AD" clId="Web-{BC9E9ED8-3FB2-AACB-BE37-FA487D48EDA3}"/>
-    <pc:docChg chg="modSld">
-      <pc:chgData name="Petr Vrána" userId="S::xvrana2@mendelu.cz::82fa521c-3097-48f4-ba30-999f8c7ff696" providerId="AD" clId="Web-{BC9E9ED8-3FB2-AACB-BE37-FA487D48EDA3}" dt="2026-04-28T07:02:25.012" v="2" actId="20577"/>
-      <pc:docMkLst>
-        <pc:docMk/>
-      </pc:docMkLst>
-      <pc:sldChg chg="modSp">
-        <pc:chgData name="Petr Vrána" userId="S::xvrana2@mendelu.cz::82fa521c-3097-48f4-ba30-999f8c7ff696" providerId="AD" clId="Web-{BC9E9ED8-3FB2-AACB-BE37-FA487D48EDA3}" dt="2026-04-28T07:02:25.012" v="2" actId="20577"/>
-        <pc:sldMkLst>
-          <pc:docMk/>
-          <pc:sldMk cId="1460814851" sldId="274"/>
-        </pc:sldMkLst>
-        <pc:spChg chg="mod">
-          <ac:chgData name="Petr Vrána" userId="S::xvrana2@mendelu.cz::82fa521c-3097-48f4-ba30-999f8c7ff696" providerId="AD" clId="Web-{BC9E9ED8-3FB2-AACB-BE37-FA487D48EDA3}" dt="2026-04-28T07:02:25.012" v="2" actId="20577"/>
-          <ac:spMkLst>
-            <pc:docMk/>
-            <pc:sldMk cId="1460814851" sldId="274"/>
-            <ac:spMk id="2" creationId="{23218BDF-5026-714D-6CF6-19FD63BD6BBA}"/>
-          </ac:spMkLst>
-        </pc:spChg>
-      </pc:sldChg>
-    </pc:docChg>
-  </pc:docChgLst>
 </pc:chgInfo>
 </file>
 
 <file path=ppt/charts/chart1.xml><?xml version="1.0" encoding="utf-8"?>
 <c:chartSpace xmlns:c="http://schemas.openxmlformats.org/drawingml/2006/chart" xmlns:a="http://schemas.openxmlformats.org/drawingml/2006/main" xmlns:r="http://schemas.openxmlformats.org/officeDocument/2006/relationships" xmlns:c16r2="http://schemas.microsoft.com/office/drawing/2015/06/chart">
   <c:date1904 val="0"/>
-  <c:lang val="en-US"/>
+  <c:lang val="cs-CZ"/>
   <c:roundedCorners val="0"/>
   <mc:AlternateContent xmlns:mc="http://schemas.openxmlformats.org/markup-compatibility/2006">
     <mc:Choice xmlns:c14="http://schemas.microsoft.com/office/drawing/2007/8/2/chart" Requires="c14">
@@ -7361,6 +7362,443 @@
           <a:chExt cx="0" cy="0"/>
         </a:xfrm>
       </p:grpSpPr>
+      <p:pic>
+        <p:nvPicPr>
+          <p:cNvPr id="5" name="Content Placeholder 4" descr="A graph with blue and orange lines&#10;&#10;AI-generated content may be incorrect.">
+            <a:extLst>
+              <a:ext uri="{FF2B5EF4-FFF2-40B4-BE49-F238E27FC236}">
+                <a16:creationId xmlns:a16="http://schemas.microsoft.com/office/drawing/2014/main" id="{CC996FFC-707F-8E46-2DF6-B089DAE7A581}"/>
+              </a:ext>
+            </a:extLst>
+          </p:cNvPr>
+          <p:cNvPicPr>
+            <a:picLocks noGrp="1" noChangeAspect="1"/>
+          </p:cNvPicPr>
+          <p:nvPr>
+            <p:ph sz="half" idx="1"/>
+          </p:nvPr>
+        </p:nvPicPr>
+        <p:blipFill>
+          <a:blip r:embed="rId2"/>
+          <a:stretch>
+            <a:fillRect/>
+          </a:stretch>
+        </p:blipFill>
+        <p:spPr>
+          <a:xfrm>
+            <a:off x="6360190" y="1043684"/>
+            <a:ext cx="5362577" cy="3411739"/>
+          </a:xfrm>
+          <a:prstGeom prst="rect">
+            <a:avLst/>
+          </a:prstGeom>
+        </p:spPr>
+      </p:pic>
+      <p:sp>
+        <p:nvSpPr>
+          <p:cNvPr id="3" name="Text Placeholder 2">
+            <a:extLst>
+              <a:ext uri="{FF2B5EF4-FFF2-40B4-BE49-F238E27FC236}">
+                <a16:creationId xmlns:a16="http://schemas.microsoft.com/office/drawing/2014/main" id="{4BD597A8-F9E6-B553-6C46-63092BF7E420}"/>
+              </a:ext>
+            </a:extLst>
+          </p:cNvPr>
+          <p:cNvSpPr>
+            <a:spLocks noGrp="1"/>
+          </p:cNvSpPr>
+          <p:nvPr>
+            <p:ph type="body" sz="quarter" idx="14"/>
+          </p:nvPr>
+        </p:nvSpPr>
+        <p:spPr/>
+        <p:txBody>
+          <a:bodyPr lIns="0" tIns="0" rIns="0" bIns="0" anchor="t"/>
+          <a:lstStyle/>
+          <a:p>
+            <a:r>
+              <a:rPr lang="en-GB">
+                <a:cs typeface="Arial"/>
+              </a:rPr>
+              <a:t>4) </a:t>
+            </a:r>
+            <a:r>
+              <a:rPr lang="en-GB" err="1">
+                <a:cs typeface="Arial"/>
+              </a:rPr>
+              <a:t>Agrární</a:t>
+            </a:r>
+            <a:r>
+              <a:rPr lang="en-GB">
+                <a:cs typeface="Arial"/>
+              </a:rPr>
+              <a:t> </a:t>
+            </a:r>
+            <a:r>
+              <a:rPr lang="en-GB" err="1">
+                <a:cs typeface="Arial"/>
+              </a:rPr>
+              <a:t>zahraniční</a:t>
+            </a:r>
+            <a:r>
+              <a:rPr lang="en-GB">
+                <a:cs typeface="Arial"/>
+              </a:rPr>
+              <a:t> </a:t>
+            </a:r>
+            <a:r>
+              <a:rPr lang="en-GB" err="1">
+                <a:cs typeface="Arial"/>
+              </a:rPr>
+              <a:t>obchod</a:t>
+            </a:r>
+            <a:endParaRPr lang="en-GB" err="1"/>
+          </a:p>
+        </p:txBody>
+      </p:sp>
+      <p:sp>
+        <p:nvSpPr>
+          <p:cNvPr id="6" name="TextBox 5">
+            <a:extLst>
+              <a:ext uri="{FF2B5EF4-FFF2-40B4-BE49-F238E27FC236}">
+                <a16:creationId xmlns:a16="http://schemas.microsoft.com/office/drawing/2014/main" id="{888F2ECA-17BB-34B1-A367-17425FE2E377}"/>
+              </a:ext>
+            </a:extLst>
+          </p:cNvPr>
+          <p:cNvSpPr txBox="1"/>
+          <p:nvPr/>
+        </p:nvSpPr>
+        <p:spPr>
+          <a:xfrm>
+            <a:off x="932447" y="1253289"/>
+            <a:ext cx="5123447" cy="1200329"/>
+          </a:xfrm>
+          <a:prstGeom prst="rect">
+            <a:avLst/>
+          </a:prstGeom>
+          <a:noFill/>
+        </p:spPr>
+        <p:txBody>
+          <a:bodyPr rot="0" spcFirstLastPara="0" vertOverflow="overflow" horzOverflow="overflow" vert="horz" wrap="square" lIns="91440" tIns="45720" rIns="91440" bIns="45720" numCol="1" spcCol="0" rtlCol="0" fromWordArt="0" anchor="t" anchorCtr="0" forceAA="0" compatLnSpc="1">
+            <a:prstTxWarp prst="textNoShape">
+              <a:avLst/>
+            </a:prstTxWarp>
+            <a:spAutoFit/>
+          </a:bodyPr>
+          <a:lstStyle/>
+          <a:p>
+            <a:pPr marL="285750" indent="-285750">
+              <a:buFont typeface="Arial"/>
+              <a:buChar char="•"/>
+            </a:pPr>
+            <a:r>
+              <a:rPr lang="en-GB" err="1">
+                <a:latin typeface="Arial"/>
+                <a:cs typeface="Arial"/>
+              </a:rPr>
+              <a:t>Celková</a:t>
+            </a:r>
+            <a:r>
+              <a:rPr lang="en-GB">
+                <a:latin typeface="Arial"/>
+                <a:cs typeface="Arial"/>
+              </a:rPr>
+              <a:t> </a:t>
+            </a:r>
+            <a:r>
+              <a:rPr lang="en-GB" err="1">
+                <a:latin typeface="Arial"/>
+                <a:cs typeface="Arial"/>
+              </a:rPr>
+              <a:t>výroba</a:t>
+            </a:r>
+            <a:r>
+              <a:rPr lang="en-GB">
+                <a:latin typeface="Arial"/>
+                <a:cs typeface="Arial"/>
+              </a:rPr>
+              <a:t> - </a:t>
+            </a:r>
+            <a:r>
+              <a:rPr lang="en-GB" err="1">
+                <a:latin typeface="Arial"/>
+                <a:cs typeface="Arial"/>
+              </a:rPr>
+              <a:t>poměrně</a:t>
+            </a:r>
+            <a:r>
+              <a:rPr lang="en-GB">
+                <a:latin typeface="Arial"/>
+                <a:cs typeface="Arial"/>
+              </a:rPr>
+              <a:t> </a:t>
+            </a:r>
+            <a:r>
+              <a:rPr lang="en-GB" err="1">
+                <a:latin typeface="Arial"/>
+                <a:cs typeface="Arial"/>
+              </a:rPr>
+              <a:t>stabilní</a:t>
+            </a:r>
+            <a:r>
+              <a:rPr lang="en-GB">
+                <a:latin typeface="Arial"/>
+                <a:cs typeface="Arial"/>
+              </a:rPr>
+              <a:t> </a:t>
+            </a:r>
+            <a:r>
+              <a:rPr lang="en-GB" err="1">
+                <a:latin typeface="Arial"/>
+                <a:cs typeface="Arial"/>
+              </a:rPr>
+              <a:t>hodnota</a:t>
+            </a:r>
+            <a:endParaRPr lang="en-GB">
+              <a:latin typeface="Arial"/>
+              <a:cs typeface="Arial"/>
+            </a:endParaRPr>
+          </a:p>
+          <a:p>
+            <a:pPr marL="285750" indent="-285750">
+              <a:buFont typeface="Arial"/>
+              <a:buChar char="•"/>
+            </a:pPr>
+            <a:r>
+              <a:rPr lang="en-GB">
+                <a:latin typeface="Arial"/>
+                <a:cs typeface="Arial"/>
+              </a:rPr>
+              <a:t>Export </a:t>
+            </a:r>
+            <a:r>
+              <a:rPr lang="en-GB" err="1">
+                <a:latin typeface="Arial"/>
+                <a:cs typeface="Arial"/>
+              </a:rPr>
+              <a:t>převažuje</a:t>
+            </a:r>
+            <a:r>
+              <a:rPr lang="en-GB">
+                <a:latin typeface="Arial"/>
+                <a:cs typeface="Arial"/>
+              </a:rPr>
+              <a:t> </a:t>
+            </a:r>
+            <a:r>
+              <a:rPr lang="en-GB" err="1">
+                <a:latin typeface="Arial"/>
+                <a:cs typeface="Arial"/>
+              </a:rPr>
+              <a:t>nad</a:t>
+            </a:r>
+            <a:r>
+              <a:rPr lang="en-GB">
+                <a:latin typeface="Arial"/>
+                <a:cs typeface="Arial"/>
+              </a:rPr>
+              <a:t> </a:t>
+            </a:r>
+            <a:r>
+              <a:rPr lang="en-GB" err="1">
+                <a:latin typeface="Arial"/>
+                <a:cs typeface="Arial"/>
+              </a:rPr>
+              <a:t>Importem</a:t>
+            </a:r>
+          </a:p>
+          <a:p>
+            <a:pPr marL="285750" indent="-285750">
+              <a:buFont typeface="Arial"/>
+              <a:buChar char="•"/>
+            </a:pPr>
+            <a:r>
+              <a:rPr lang="en-GB">
+                <a:latin typeface="Arial"/>
+                <a:cs typeface="Arial"/>
+              </a:rPr>
+              <a:t>Od 2022 </a:t>
+            </a:r>
+            <a:r>
+              <a:rPr lang="en-GB" err="1">
+                <a:latin typeface="Arial"/>
+                <a:cs typeface="Arial"/>
+              </a:rPr>
+              <a:t>pokles</a:t>
+            </a:r>
+            <a:r>
+              <a:rPr lang="en-GB">
+                <a:latin typeface="Arial"/>
+                <a:cs typeface="Arial"/>
+              </a:rPr>
+              <a:t> </a:t>
+            </a:r>
+            <a:r>
+              <a:rPr lang="en-GB" err="1">
+                <a:latin typeface="Arial"/>
+                <a:cs typeface="Arial"/>
+              </a:rPr>
+              <a:t>výroby</a:t>
+            </a:r>
+            <a:r>
+              <a:rPr lang="en-GB">
+                <a:latin typeface="Arial"/>
+                <a:cs typeface="Arial"/>
+              </a:rPr>
+              <a:t>, </a:t>
+            </a:r>
+            <a:r>
+              <a:rPr lang="en-GB" err="1">
+                <a:latin typeface="Arial"/>
+                <a:cs typeface="Arial"/>
+              </a:rPr>
+              <a:t>nárůst</a:t>
+            </a:r>
+            <a:r>
+              <a:rPr lang="en-GB">
+                <a:latin typeface="Arial"/>
+                <a:cs typeface="Arial"/>
+              </a:rPr>
+              <a:t> </a:t>
+            </a:r>
+            <a:r>
+              <a:rPr lang="en-GB" err="1">
+                <a:latin typeface="Arial"/>
+                <a:cs typeface="Arial"/>
+              </a:rPr>
+              <a:t>dovozu</a:t>
+            </a:r>
+            <a:endParaRPr lang="en-GB">
+              <a:latin typeface="Arial"/>
+              <a:cs typeface="Arial"/>
+            </a:endParaRPr>
+          </a:p>
+          <a:p>
+            <a:pPr marL="285750" indent="-285750">
+              <a:buFont typeface="Arial"/>
+              <a:buChar char="•"/>
+            </a:pPr>
+            <a:r>
+              <a:rPr lang="en-GB">
+                <a:latin typeface="Arial"/>
+                <a:cs typeface="Arial"/>
+              </a:rPr>
+              <a:t>U </a:t>
+            </a:r>
+            <a:r>
+              <a:rPr lang="en-GB" err="1">
+                <a:latin typeface="Arial"/>
+                <a:cs typeface="Arial"/>
+              </a:rPr>
+              <a:t>spotřebitelských</a:t>
+            </a:r>
+            <a:r>
+              <a:rPr lang="en-GB">
+                <a:latin typeface="Arial"/>
+                <a:cs typeface="Arial"/>
+              </a:rPr>
+              <a:t> </a:t>
+            </a:r>
+            <a:r>
+              <a:rPr lang="en-GB" err="1">
+                <a:latin typeface="Arial"/>
+                <a:cs typeface="Arial"/>
+              </a:rPr>
+              <a:t>cen</a:t>
+            </a:r>
+            <a:r>
+              <a:rPr lang="en-GB">
+                <a:latin typeface="Arial"/>
+                <a:cs typeface="Arial"/>
+              </a:rPr>
+              <a:t> </a:t>
+            </a:r>
+            <a:r>
+              <a:rPr lang="en-GB" err="1">
+                <a:latin typeface="Arial"/>
+                <a:cs typeface="Arial"/>
+              </a:rPr>
+              <a:t>vidíme</a:t>
+            </a:r>
+            <a:r>
+              <a:rPr lang="en-GB">
+                <a:latin typeface="Arial"/>
+                <a:cs typeface="Arial"/>
+              </a:rPr>
+              <a:t> </a:t>
+            </a:r>
+            <a:r>
+              <a:rPr lang="en-GB" err="1">
+                <a:latin typeface="Arial"/>
+                <a:cs typeface="Arial"/>
+              </a:rPr>
+              <a:t>nárůst</a:t>
+            </a:r>
+            <a:endParaRPr lang="en-GB" err="1">
+              <a:cs typeface="Arial" panose="020B0604020202020204" pitchFamily="34" charset="0"/>
+            </a:endParaRPr>
+          </a:p>
+        </p:txBody>
+      </p:sp>
+      <p:pic>
+        <p:nvPicPr>
+          <p:cNvPr id="7" name="Picture 6" descr="A graph with a line going up&#10;&#10;AI-generated content may be incorrect.">
+            <a:extLst>
+              <a:ext uri="{FF2B5EF4-FFF2-40B4-BE49-F238E27FC236}">
+                <a16:creationId xmlns:a16="http://schemas.microsoft.com/office/drawing/2014/main" id="{A9C376F9-201B-6BB5-1759-BB7AA9BF3961}"/>
+              </a:ext>
+            </a:extLst>
+          </p:cNvPr>
+          <p:cNvPicPr>
+            <a:picLocks noChangeAspect="1"/>
+          </p:cNvPicPr>
+          <p:nvPr/>
+        </p:nvPicPr>
+        <p:blipFill>
+          <a:blip r:embed="rId3"/>
+          <a:stretch>
+            <a:fillRect/>
+          </a:stretch>
+        </p:blipFill>
+        <p:spPr>
+          <a:xfrm>
+            <a:off x="526631" y="2995313"/>
+            <a:ext cx="5734050" cy="3438525"/>
+          </a:xfrm>
+          <a:prstGeom prst="rect">
+            <a:avLst/>
+          </a:prstGeom>
+        </p:spPr>
+      </p:pic>
+    </p:spTree>
+    <p:extLst>
+      <p:ext uri="{BB962C8B-B14F-4D97-AF65-F5344CB8AC3E}">
+        <p14:creationId xmlns:p14="http://schemas.microsoft.com/office/powerpoint/2010/main" val="329674865"/>
+      </p:ext>
+    </p:extLst>
+  </p:cSld>
+  <p:clrMapOvr>
+    <a:masterClrMapping/>
+  </p:clrMapOvr>
+</p:sld>
+</file>
+
+<file path=ppt/slides/slide11.xml><?xml version="1.0" encoding="utf-8"?>
+<p:sld xmlns:a="http://schemas.openxmlformats.org/drawingml/2006/main" xmlns:r="http://schemas.openxmlformats.org/officeDocument/2006/relationships" xmlns:p="http://schemas.openxmlformats.org/presentationml/2006/main">
+  <p:cSld>
+    <p:spTree>
+      <p:nvGrpSpPr>
+        <p:cNvPr id="1" name=""/>
+        <p:cNvGrpSpPr/>
+        <p:nvPr/>
+      </p:nvGrpSpPr>
+      <p:grpSpPr>
+        <a:xfrm>
+          <a:off x="0" y="0"/>
+          <a:ext cx="0" cy="0"/>
+          <a:chOff x="0" y="0"/>
+          <a:chExt cx="0" cy="0"/>
+        </a:xfrm>
+      </p:grpSpPr>
       <p:sp>
         <p:nvSpPr>
           <p:cNvPr id="2" name="Content Placeholder 1">
@@ -7651,7 +8089,7 @@
 </p:sld>
 </file>
 
-<file path=ppt/slides/slide11.xml><?xml version="1.0" encoding="utf-8"?>
+<file path=ppt/slides/slide12.xml><?xml version="1.0" encoding="utf-8"?>
 <p:sld xmlns:a="http://schemas.openxmlformats.org/drawingml/2006/main" xmlns:r="http://schemas.openxmlformats.org/officeDocument/2006/relationships" xmlns:p="http://schemas.openxmlformats.org/presentationml/2006/main">
   <p:cSld>
     <p:spTree>
@@ -7976,7 +8414,7 @@
 </p:sld>
 </file>
 
-<file path=ppt/slides/slide12.xml><?xml version="1.0" encoding="utf-8"?>
+<file path=ppt/slides/slide13.xml><?xml version="1.0" encoding="utf-8"?>
 <p:sld xmlns:a="http://schemas.openxmlformats.org/drawingml/2006/main" xmlns:r="http://schemas.openxmlformats.org/officeDocument/2006/relationships" xmlns:p="http://schemas.openxmlformats.org/presentationml/2006/main">
   <p:cSld>
     <p:spTree>
@@ -8705,7 +9143,7 @@
 </p:sld>
 </file>
 
-<file path=ppt/slides/slide13.xml><?xml version="1.0" encoding="utf-8"?>
+<file path=ppt/slides/slide14.xml><?xml version="1.0" encoding="utf-8"?>
 <p:sld xmlns:a="http://schemas.openxmlformats.org/drawingml/2006/main" xmlns:r="http://schemas.openxmlformats.org/officeDocument/2006/relationships" xmlns:p="http://schemas.openxmlformats.org/presentationml/2006/main">
   <p:cSld>
     <p:spTree>
@@ -9477,7 +9915,7 @@
 </p:sld>
 </file>
 
-<file path=ppt/slides/slide14.xml><?xml version="1.0" encoding="utf-8"?>
+<file path=ppt/slides/slide15.xml><?xml version="1.0" encoding="utf-8"?>
 <p:sld xmlns:a="http://schemas.openxmlformats.org/drawingml/2006/main" xmlns:r="http://schemas.openxmlformats.org/officeDocument/2006/relationships" xmlns:p="http://schemas.openxmlformats.org/presentationml/2006/main">
   <p:cSld>
     <p:spTree>
@@ -10420,7 +10858,7 @@
 </p:sld>
 </file>
 
-<file path=ppt/slides/slide15.xml><?xml version="1.0" encoding="utf-8"?>
+<file path=ppt/slides/slide16.xml><?xml version="1.0" encoding="utf-8"?>
 <p:sld xmlns:a="http://schemas.openxmlformats.org/drawingml/2006/main" xmlns:r="http://schemas.openxmlformats.org/officeDocument/2006/relationships" xmlns:p="http://schemas.openxmlformats.org/presentationml/2006/main">
   <p:cSld>
     <p:spTree>
@@ -11235,7 +11673,7 @@
 </p:sld>
 </file>
 
-<file path=ppt/slides/slide16.xml><?xml version="1.0" encoding="utf-8"?>
+<file path=ppt/slides/slide17.xml><?xml version="1.0" encoding="utf-8"?>
 <p:sld xmlns:a="http://schemas.openxmlformats.org/drawingml/2006/main" xmlns:r="http://schemas.openxmlformats.org/officeDocument/2006/relationships" xmlns:p="http://schemas.openxmlformats.org/presentationml/2006/main">
   <p:cSld>
     <p:spTree>
@@ -11423,7 +11861,7 @@
 </p:sld>
 </file>
 
-<file path=ppt/slides/slide17.xml><?xml version="1.0" encoding="utf-8"?>
+<file path=ppt/slides/slide18.xml><?xml version="1.0" encoding="utf-8"?>
 <p:sld xmlns:a="http://schemas.openxmlformats.org/drawingml/2006/main" xmlns:r="http://schemas.openxmlformats.org/officeDocument/2006/relationships" xmlns:p="http://schemas.openxmlformats.org/presentationml/2006/main">
   <p:cSld>
     <p:spTree>
@@ -11911,7 +12349,7 @@
 </p:sld>
 </file>
 
-<file path=ppt/slides/slide18.xml><?xml version="1.0" encoding="utf-8"?>
+<file path=ppt/slides/slide19.xml><?xml version="1.0" encoding="utf-8"?>
 <p:sld xmlns:a="http://schemas.openxmlformats.org/drawingml/2006/main" xmlns:r="http://schemas.openxmlformats.org/officeDocument/2006/relationships" xmlns:p="http://schemas.openxmlformats.org/presentationml/2006/main">
   <p:cSld>
     <p:spTree>
@@ -12545,6 +12983,209 @@
 </file>
 
 <file path=ppt/slides/slide3.xml><?xml version="1.0" encoding="utf-8"?>
+<p:sld xmlns:a="http://schemas.openxmlformats.org/drawingml/2006/main" xmlns:r="http://schemas.openxmlformats.org/officeDocument/2006/relationships" xmlns:p="http://schemas.openxmlformats.org/presentationml/2006/main">
+  <p:cSld>
+    <p:spTree>
+      <p:nvGrpSpPr>
+        <p:cNvPr id="1" name="">
+          <a:extLst>
+            <a:ext uri="{FF2B5EF4-FFF2-40B4-BE49-F238E27FC236}">
+              <a16:creationId xmlns:a16="http://schemas.microsoft.com/office/drawing/2014/main" id="{CC474546-9819-C5FB-FDA7-EDE4272E4847}"/>
+            </a:ext>
+          </a:extLst>
+        </p:cNvPr>
+        <p:cNvGrpSpPr/>
+        <p:nvPr/>
+      </p:nvGrpSpPr>
+      <p:grpSpPr>
+        <a:xfrm>
+          <a:off x="0" y="0"/>
+          <a:ext cx="0" cy="0"/>
+          <a:chOff x="0" y="0"/>
+          <a:chExt cx="0" cy="0"/>
+        </a:xfrm>
+      </p:grpSpPr>
+      <p:sp>
+        <p:nvSpPr>
+          <p:cNvPr id="4" name="Zástupný text 3">
+            <a:extLst>
+              <a:ext uri="{FF2B5EF4-FFF2-40B4-BE49-F238E27FC236}">
+                <a16:creationId xmlns:a16="http://schemas.microsoft.com/office/drawing/2014/main" id="{278707EF-71EB-457E-940E-FBA877C9B50D}"/>
+              </a:ext>
+            </a:extLst>
+          </p:cNvPr>
+          <p:cNvSpPr>
+            <a:spLocks noGrp="1"/>
+          </p:cNvSpPr>
+          <p:nvPr>
+            <p:ph type="body" sz="quarter" idx="14"/>
+          </p:nvPr>
+        </p:nvSpPr>
+        <p:spPr>
+          <a:xfrm>
+            <a:off x="885825" y="419101"/>
+            <a:ext cx="10934700" cy="1134534"/>
+          </a:xfrm>
+        </p:spPr>
+        <p:txBody>
+          <a:bodyPr lIns="0" tIns="0" rIns="0" bIns="0" anchor="t">
+            <a:normAutofit/>
+          </a:bodyPr>
+          <a:lstStyle/>
+          <a:p>
+            <a:r>
+              <a:rPr lang="cs-CZ" dirty="0"/>
+              <a:t>Úvod a cíl</a:t>
+            </a:r>
+          </a:p>
+        </p:txBody>
+      </p:sp>
+      <p:sp>
+        <p:nvSpPr>
+          <p:cNvPr id="2" name="Zástupný obsah 1">
+            <a:extLst>
+              <a:ext uri="{FF2B5EF4-FFF2-40B4-BE49-F238E27FC236}">
+                <a16:creationId xmlns:a16="http://schemas.microsoft.com/office/drawing/2014/main" id="{25BFDE36-F11C-5B38-C9DA-A19E5BA8D415}"/>
+              </a:ext>
+            </a:extLst>
+          </p:cNvPr>
+          <p:cNvSpPr>
+            <a:spLocks noGrp="1"/>
+          </p:cNvSpPr>
+          <p:nvPr>
+            <p:ph sz="half" idx="16"/>
+          </p:nvPr>
+        </p:nvSpPr>
+        <p:spPr>
+          <a:xfrm>
+            <a:off x="885818" y="1553635"/>
+            <a:ext cx="9869267" cy="4601632"/>
+          </a:xfrm>
+        </p:spPr>
+        <p:txBody>
+          <a:bodyPr>
+            <a:normAutofit/>
+          </a:bodyPr>
+          <a:lstStyle/>
+          <a:p>
+            <a:pPr marL="342900" indent="-342900">
+              <a:lnSpc>
+                <a:spcPct val="90000"/>
+              </a:lnSpc>
+              <a:buFont typeface="Arial" panose="020B0604020202020204" pitchFamily="34" charset="0"/>
+              <a:buChar char="•"/>
+            </a:pPr>
+            <a:r>
+              <a:rPr lang="cs-CZ" sz="2000" dirty="0"/>
+              <a:t>VO: </a:t>
+            </a:r>
+            <a:r>
+              <a:rPr lang="cs-CZ" sz="2000" b="1" dirty="0"/>
+              <a:t>Jak se vyvíjely ceny bílého jogurtu v jednotlivých článcích komoditní vertikály a do jaké míry se cenové změny přenášely mezi prvovýrobou, zpracovateli a spotřebiteli?</a:t>
+            </a:r>
+          </a:p>
+          <a:p>
+            <a:pPr marL="342900" indent="-342900">
+              <a:lnSpc>
+                <a:spcPct val="90000"/>
+              </a:lnSpc>
+              <a:buFont typeface="Arial" panose="020B0604020202020204" pitchFamily="34" charset="0"/>
+              <a:buChar char="•"/>
+            </a:pPr>
+            <a:endParaRPr lang="cs-CZ" sz="2000" b="1" dirty="0"/>
+          </a:p>
+          <a:p>
+            <a:r>
+              <a:rPr lang="cs-CZ" sz="2000" dirty="0"/>
+              <a:t>Cílem je zhodnotit vývoj cenového prostředí u bílého jogurtu se zaměřením na:</a:t>
+            </a:r>
+          </a:p>
+          <a:p>
+            <a:pPr marL="342900" indent="-342900">
+              <a:buFont typeface="Arial" panose="020B0604020202020204" pitchFamily="34" charset="0"/>
+              <a:buChar char="•"/>
+            </a:pPr>
+            <a:r>
+              <a:rPr lang="cs-CZ" sz="2000" dirty="0"/>
+              <a:t>postavení jogurtu v komoditní vertikále mléka, </a:t>
+            </a:r>
+          </a:p>
+          <a:p>
+            <a:pPr marL="342900" indent="-342900">
+              <a:buFont typeface="Arial" panose="020B0604020202020204" pitchFamily="34" charset="0"/>
+              <a:buChar char="•"/>
+            </a:pPr>
+            <a:r>
+              <a:rPr lang="cs-CZ" sz="2000" dirty="0"/>
+              <a:t>vývoj produkce jogurtu v Evropě a ve světě, </a:t>
+            </a:r>
+          </a:p>
+          <a:p>
+            <a:pPr marL="342900" indent="-342900">
+              <a:buFont typeface="Arial" panose="020B0604020202020204" pitchFamily="34" charset="0"/>
+              <a:buChar char="•"/>
+            </a:pPr>
+            <a:r>
+              <a:rPr lang="cs-CZ" sz="2000" dirty="0"/>
+              <a:t>nominální a reálný vývoj cen, </a:t>
+            </a:r>
+          </a:p>
+          <a:p>
+            <a:pPr marL="342900" indent="-342900">
+              <a:buFont typeface="Arial" panose="020B0604020202020204" pitchFamily="34" charset="0"/>
+              <a:buChar char="•"/>
+            </a:pPr>
+            <a:r>
+              <a:rPr lang="cs-CZ" sz="2000" dirty="0"/>
+              <a:t>zahraniční obchod a evropský trh, </a:t>
+            </a:r>
+          </a:p>
+          <a:p>
+            <a:pPr marL="342900" indent="-342900">
+              <a:buFont typeface="Arial" panose="020B0604020202020204" pitchFamily="34" charset="0"/>
+              <a:buChar char="•"/>
+            </a:pPr>
+            <a:r>
+              <a:rPr lang="cs-CZ" sz="2000" dirty="0"/>
+              <a:t>elasticitu a zpoždění cenové transmise.</a:t>
+            </a:r>
+          </a:p>
+          <a:p>
+            <a:pPr marL="342900" indent="-342900">
+              <a:lnSpc>
+                <a:spcPct val="90000"/>
+              </a:lnSpc>
+              <a:buFont typeface="Arial" panose="020B0604020202020204" pitchFamily="34" charset="0"/>
+              <a:buChar char="•"/>
+            </a:pPr>
+            <a:endParaRPr lang="cs-CZ" sz="2000" dirty="0"/>
+          </a:p>
+          <a:p>
+            <a:pPr marL="342900" indent="-342900">
+              <a:lnSpc>
+                <a:spcPct val="90000"/>
+              </a:lnSpc>
+              <a:buFont typeface="Arial" panose="020B0604020202020204" pitchFamily="34" charset="0"/>
+              <a:buChar char="•"/>
+            </a:pPr>
+            <a:endParaRPr lang="cs-CZ" sz="2000" dirty="0"/>
+          </a:p>
+        </p:txBody>
+      </p:sp>
+    </p:spTree>
+    <p:extLst>
+      <p:ext uri="{BB962C8B-B14F-4D97-AF65-F5344CB8AC3E}">
+        <p14:creationId xmlns:p14="http://schemas.microsoft.com/office/powerpoint/2010/main" val="3579569277"/>
+      </p:ext>
+    </p:extLst>
+  </p:cSld>
+  <p:clrMapOvr>
+    <a:masterClrMapping/>
+  </p:clrMapOvr>
+</p:sld>
+</file>
+
+<file path=ppt/slides/slide4.xml><?xml version="1.0" encoding="utf-8"?>
 <p:sld xmlns:a="http://schemas.openxmlformats.org/drawingml/2006/main" xmlns:r="http://schemas.openxmlformats.org/officeDocument/2006/relationships" xmlns:p="http://schemas.openxmlformats.org/presentationml/2006/main">
   <p:cSld>
     <p:spTree>
@@ -12824,7 +13465,7 @@
 </p:sld>
 </file>
 
-<file path=ppt/slides/slide4.xml><?xml version="1.0" encoding="utf-8"?>
+<file path=ppt/slides/slide5.xml><?xml version="1.0" encoding="utf-8"?>
 <p:sld xmlns:a="http://schemas.openxmlformats.org/drawingml/2006/main" xmlns:r="http://schemas.openxmlformats.org/officeDocument/2006/relationships" xmlns:p="http://schemas.openxmlformats.org/presentationml/2006/main">
   <p:cSld>
     <p:spTree>
@@ -13121,7 +13762,7 @@
 </p:sld>
 </file>
 
-<file path=ppt/slides/slide5.xml><?xml version="1.0" encoding="utf-8"?>
+<file path=ppt/slides/slide6.xml><?xml version="1.0" encoding="utf-8"?>
 <p:sld xmlns:a="http://schemas.openxmlformats.org/drawingml/2006/main" xmlns:r="http://schemas.openxmlformats.org/officeDocument/2006/relationships" xmlns:p="http://schemas.openxmlformats.org/presentationml/2006/main">
   <p:cSld>
     <p:spTree>
@@ -13655,7 +14296,7 @@
 </p:sld>
 </file>
 
-<file path=ppt/slides/slide6.xml><?xml version="1.0" encoding="utf-8"?>
+<file path=ppt/slides/slide7.xml><?xml version="1.0" encoding="utf-8"?>
 <p:sld xmlns:a="http://schemas.openxmlformats.org/drawingml/2006/main" xmlns:r="http://schemas.openxmlformats.org/officeDocument/2006/relationships" xmlns:p="http://schemas.openxmlformats.org/presentationml/2006/main">
   <p:cSld>
     <p:spTree>
@@ -14390,7 +15031,7 @@
 </p:sld>
 </file>
 
-<file path=ppt/slides/slide7.xml><?xml version="1.0" encoding="utf-8"?>
+<file path=ppt/slides/slide8.xml><?xml version="1.0" encoding="utf-8"?>
 <p:sld xmlns:a="http://schemas.openxmlformats.org/drawingml/2006/main" xmlns:r="http://schemas.openxmlformats.org/officeDocument/2006/relationships" xmlns:p="http://schemas.openxmlformats.org/presentationml/2006/main">
   <p:cSld>
     <p:spTree>
@@ -14829,7 +15470,7 @@
 </p:sld>
 </file>
 
-<file path=ppt/slides/slide8.xml><?xml version="1.0" encoding="utf-8"?>
+<file path=ppt/slides/slide9.xml><?xml version="1.0" encoding="utf-8"?>
 <p:sld xmlns:a="http://schemas.openxmlformats.org/drawingml/2006/main" xmlns:r="http://schemas.openxmlformats.org/officeDocument/2006/relationships" xmlns:p="http://schemas.openxmlformats.org/presentationml/2006/main">
   <p:cSld>
     <p:spTree>
@@ -15705,443 +16346,6 @@
     <p:extLst>
       <p:ext uri="{BB962C8B-B14F-4D97-AF65-F5344CB8AC3E}">
         <p14:creationId xmlns:p14="http://schemas.microsoft.com/office/powerpoint/2010/main" val="772860038"/>
-      </p:ext>
-    </p:extLst>
-  </p:cSld>
-  <p:clrMapOvr>
-    <a:masterClrMapping/>
-  </p:clrMapOvr>
-</p:sld>
-</file>
-
-<file path=ppt/slides/slide9.xml><?xml version="1.0" encoding="utf-8"?>
-<p:sld xmlns:a="http://schemas.openxmlformats.org/drawingml/2006/main" xmlns:r="http://schemas.openxmlformats.org/officeDocument/2006/relationships" xmlns:p="http://schemas.openxmlformats.org/presentationml/2006/main">
-  <p:cSld>
-    <p:spTree>
-      <p:nvGrpSpPr>
-        <p:cNvPr id="1" name=""/>
-        <p:cNvGrpSpPr/>
-        <p:nvPr/>
-      </p:nvGrpSpPr>
-      <p:grpSpPr>
-        <a:xfrm>
-          <a:off x="0" y="0"/>
-          <a:ext cx="0" cy="0"/>
-          <a:chOff x="0" y="0"/>
-          <a:chExt cx="0" cy="0"/>
-        </a:xfrm>
-      </p:grpSpPr>
-      <p:pic>
-        <p:nvPicPr>
-          <p:cNvPr id="5" name="Content Placeholder 4" descr="A graph with blue and orange lines&#10;&#10;AI-generated content may be incorrect.">
-            <a:extLst>
-              <a:ext uri="{FF2B5EF4-FFF2-40B4-BE49-F238E27FC236}">
-                <a16:creationId xmlns:a16="http://schemas.microsoft.com/office/drawing/2014/main" id="{CC996FFC-707F-8E46-2DF6-B089DAE7A581}"/>
-              </a:ext>
-            </a:extLst>
-          </p:cNvPr>
-          <p:cNvPicPr>
-            <a:picLocks noGrp="1" noChangeAspect="1"/>
-          </p:cNvPicPr>
-          <p:nvPr>
-            <p:ph sz="half" idx="1"/>
-          </p:nvPr>
-        </p:nvPicPr>
-        <p:blipFill>
-          <a:blip r:embed="rId2"/>
-          <a:stretch>
-            <a:fillRect/>
-          </a:stretch>
-        </p:blipFill>
-        <p:spPr>
-          <a:xfrm>
-            <a:off x="6360190" y="1043684"/>
-            <a:ext cx="5362577" cy="3411739"/>
-          </a:xfrm>
-          <a:prstGeom prst="rect">
-            <a:avLst/>
-          </a:prstGeom>
-        </p:spPr>
-      </p:pic>
-      <p:sp>
-        <p:nvSpPr>
-          <p:cNvPr id="3" name="Text Placeholder 2">
-            <a:extLst>
-              <a:ext uri="{FF2B5EF4-FFF2-40B4-BE49-F238E27FC236}">
-                <a16:creationId xmlns:a16="http://schemas.microsoft.com/office/drawing/2014/main" id="{4BD597A8-F9E6-B553-6C46-63092BF7E420}"/>
-              </a:ext>
-            </a:extLst>
-          </p:cNvPr>
-          <p:cNvSpPr>
-            <a:spLocks noGrp="1"/>
-          </p:cNvSpPr>
-          <p:nvPr>
-            <p:ph type="body" sz="quarter" idx="14"/>
-          </p:nvPr>
-        </p:nvSpPr>
-        <p:spPr/>
-        <p:txBody>
-          <a:bodyPr lIns="0" tIns="0" rIns="0" bIns="0" anchor="t"/>
-          <a:lstStyle/>
-          <a:p>
-            <a:r>
-              <a:rPr lang="en-GB">
-                <a:cs typeface="Arial"/>
-              </a:rPr>
-              <a:t>4) </a:t>
-            </a:r>
-            <a:r>
-              <a:rPr lang="en-GB" err="1">
-                <a:cs typeface="Arial"/>
-              </a:rPr>
-              <a:t>Agrární</a:t>
-            </a:r>
-            <a:r>
-              <a:rPr lang="en-GB">
-                <a:cs typeface="Arial"/>
-              </a:rPr>
-              <a:t> </a:t>
-            </a:r>
-            <a:r>
-              <a:rPr lang="en-GB" err="1">
-                <a:cs typeface="Arial"/>
-              </a:rPr>
-              <a:t>zahraniční</a:t>
-            </a:r>
-            <a:r>
-              <a:rPr lang="en-GB">
-                <a:cs typeface="Arial"/>
-              </a:rPr>
-              <a:t> </a:t>
-            </a:r>
-            <a:r>
-              <a:rPr lang="en-GB" err="1">
-                <a:cs typeface="Arial"/>
-              </a:rPr>
-              <a:t>obchod</a:t>
-            </a:r>
-            <a:endParaRPr lang="en-GB" err="1"/>
-          </a:p>
-        </p:txBody>
-      </p:sp>
-      <p:sp>
-        <p:nvSpPr>
-          <p:cNvPr id="6" name="TextBox 5">
-            <a:extLst>
-              <a:ext uri="{FF2B5EF4-FFF2-40B4-BE49-F238E27FC236}">
-                <a16:creationId xmlns:a16="http://schemas.microsoft.com/office/drawing/2014/main" id="{888F2ECA-17BB-34B1-A367-17425FE2E377}"/>
-              </a:ext>
-            </a:extLst>
-          </p:cNvPr>
-          <p:cNvSpPr txBox="1"/>
-          <p:nvPr/>
-        </p:nvSpPr>
-        <p:spPr>
-          <a:xfrm>
-            <a:off x="932447" y="1253289"/>
-            <a:ext cx="5123447" cy="1200329"/>
-          </a:xfrm>
-          <a:prstGeom prst="rect">
-            <a:avLst/>
-          </a:prstGeom>
-          <a:noFill/>
-        </p:spPr>
-        <p:txBody>
-          <a:bodyPr rot="0" spcFirstLastPara="0" vertOverflow="overflow" horzOverflow="overflow" vert="horz" wrap="square" lIns="91440" tIns="45720" rIns="91440" bIns="45720" numCol="1" spcCol="0" rtlCol="0" fromWordArt="0" anchor="t" anchorCtr="0" forceAA="0" compatLnSpc="1">
-            <a:prstTxWarp prst="textNoShape">
-              <a:avLst/>
-            </a:prstTxWarp>
-            <a:spAutoFit/>
-          </a:bodyPr>
-          <a:lstStyle/>
-          <a:p>
-            <a:pPr marL="285750" indent="-285750">
-              <a:buFont typeface="Arial"/>
-              <a:buChar char="•"/>
-            </a:pPr>
-            <a:r>
-              <a:rPr lang="en-GB" err="1">
-                <a:latin typeface="Arial"/>
-                <a:cs typeface="Arial"/>
-              </a:rPr>
-              <a:t>Celková</a:t>
-            </a:r>
-            <a:r>
-              <a:rPr lang="en-GB">
-                <a:latin typeface="Arial"/>
-                <a:cs typeface="Arial"/>
-              </a:rPr>
-              <a:t> </a:t>
-            </a:r>
-            <a:r>
-              <a:rPr lang="en-GB" err="1">
-                <a:latin typeface="Arial"/>
-                <a:cs typeface="Arial"/>
-              </a:rPr>
-              <a:t>výroba</a:t>
-            </a:r>
-            <a:r>
-              <a:rPr lang="en-GB">
-                <a:latin typeface="Arial"/>
-                <a:cs typeface="Arial"/>
-              </a:rPr>
-              <a:t> - </a:t>
-            </a:r>
-            <a:r>
-              <a:rPr lang="en-GB" err="1">
-                <a:latin typeface="Arial"/>
-                <a:cs typeface="Arial"/>
-              </a:rPr>
-              <a:t>poměrně</a:t>
-            </a:r>
-            <a:r>
-              <a:rPr lang="en-GB">
-                <a:latin typeface="Arial"/>
-                <a:cs typeface="Arial"/>
-              </a:rPr>
-              <a:t> </a:t>
-            </a:r>
-            <a:r>
-              <a:rPr lang="en-GB" err="1">
-                <a:latin typeface="Arial"/>
-                <a:cs typeface="Arial"/>
-              </a:rPr>
-              <a:t>stabilní</a:t>
-            </a:r>
-            <a:r>
-              <a:rPr lang="en-GB">
-                <a:latin typeface="Arial"/>
-                <a:cs typeface="Arial"/>
-              </a:rPr>
-              <a:t> </a:t>
-            </a:r>
-            <a:r>
-              <a:rPr lang="en-GB" err="1">
-                <a:latin typeface="Arial"/>
-                <a:cs typeface="Arial"/>
-              </a:rPr>
-              <a:t>hodnota</a:t>
-            </a:r>
-            <a:endParaRPr lang="en-GB">
-              <a:latin typeface="Arial"/>
-              <a:cs typeface="Arial"/>
-            </a:endParaRPr>
-          </a:p>
-          <a:p>
-            <a:pPr marL="285750" indent="-285750">
-              <a:buFont typeface="Arial"/>
-              <a:buChar char="•"/>
-            </a:pPr>
-            <a:r>
-              <a:rPr lang="en-GB">
-                <a:latin typeface="Arial"/>
-                <a:cs typeface="Arial"/>
-              </a:rPr>
-              <a:t>Export </a:t>
-            </a:r>
-            <a:r>
-              <a:rPr lang="en-GB" err="1">
-                <a:latin typeface="Arial"/>
-                <a:cs typeface="Arial"/>
-              </a:rPr>
-              <a:t>převažuje</a:t>
-            </a:r>
-            <a:r>
-              <a:rPr lang="en-GB">
-                <a:latin typeface="Arial"/>
-                <a:cs typeface="Arial"/>
-              </a:rPr>
-              <a:t> </a:t>
-            </a:r>
-            <a:r>
-              <a:rPr lang="en-GB" err="1">
-                <a:latin typeface="Arial"/>
-                <a:cs typeface="Arial"/>
-              </a:rPr>
-              <a:t>nad</a:t>
-            </a:r>
-            <a:r>
-              <a:rPr lang="en-GB">
-                <a:latin typeface="Arial"/>
-                <a:cs typeface="Arial"/>
-              </a:rPr>
-              <a:t> </a:t>
-            </a:r>
-            <a:r>
-              <a:rPr lang="en-GB" err="1">
-                <a:latin typeface="Arial"/>
-                <a:cs typeface="Arial"/>
-              </a:rPr>
-              <a:t>Importem</a:t>
-            </a:r>
-          </a:p>
-          <a:p>
-            <a:pPr marL="285750" indent="-285750">
-              <a:buFont typeface="Arial"/>
-              <a:buChar char="•"/>
-            </a:pPr>
-            <a:r>
-              <a:rPr lang="en-GB">
-                <a:latin typeface="Arial"/>
-                <a:cs typeface="Arial"/>
-              </a:rPr>
-              <a:t>Od 2022 </a:t>
-            </a:r>
-            <a:r>
-              <a:rPr lang="en-GB" err="1">
-                <a:latin typeface="Arial"/>
-                <a:cs typeface="Arial"/>
-              </a:rPr>
-              <a:t>pokles</a:t>
-            </a:r>
-            <a:r>
-              <a:rPr lang="en-GB">
-                <a:latin typeface="Arial"/>
-                <a:cs typeface="Arial"/>
-              </a:rPr>
-              <a:t> </a:t>
-            </a:r>
-            <a:r>
-              <a:rPr lang="en-GB" err="1">
-                <a:latin typeface="Arial"/>
-                <a:cs typeface="Arial"/>
-              </a:rPr>
-              <a:t>výroby</a:t>
-            </a:r>
-            <a:r>
-              <a:rPr lang="en-GB">
-                <a:latin typeface="Arial"/>
-                <a:cs typeface="Arial"/>
-              </a:rPr>
-              <a:t>, </a:t>
-            </a:r>
-            <a:r>
-              <a:rPr lang="en-GB" err="1">
-                <a:latin typeface="Arial"/>
-                <a:cs typeface="Arial"/>
-              </a:rPr>
-              <a:t>nárůst</a:t>
-            </a:r>
-            <a:r>
-              <a:rPr lang="en-GB">
-                <a:latin typeface="Arial"/>
-                <a:cs typeface="Arial"/>
-              </a:rPr>
-              <a:t> </a:t>
-            </a:r>
-            <a:r>
-              <a:rPr lang="en-GB" err="1">
-                <a:latin typeface="Arial"/>
-                <a:cs typeface="Arial"/>
-              </a:rPr>
-              <a:t>dovozu</a:t>
-            </a:r>
-            <a:endParaRPr lang="en-GB">
-              <a:latin typeface="Arial"/>
-              <a:cs typeface="Arial"/>
-            </a:endParaRPr>
-          </a:p>
-          <a:p>
-            <a:pPr marL="285750" indent="-285750">
-              <a:buFont typeface="Arial"/>
-              <a:buChar char="•"/>
-            </a:pPr>
-            <a:r>
-              <a:rPr lang="en-GB">
-                <a:latin typeface="Arial"/>
-                <a:cs typeface="Arial"/>
-              </a:rPr>
-              <a:t>U </a:t>
-            </a:r>
-            <a:r>
-              <a:rPr lang="en-GB" err="1">
-                <a:latin typeface="Arial"/>
-                <a:cs typeface="Arial"/>
-              </a:rPr>
-              <a:t>spotřebitelských</a:t>
-            </a:r>
-            <a:r>
-              <a:rPr lang="en-GB">
-                <a:latin typeface="Arial"/>
-                <a:cs typeface="Arial"/>
-              </a:rPr>
-              <a:t> </a:t>
-            </a:r>
-            <a:r>
-              <a:rPr lang="en-GB" err="1">
-                <a:latin typeface="Arial"/>
-                <a:cs typeface="Arial"/>
-              </a:rPr>
-              <a:t>cen</a:t>
-            </a:r>
-            <a:r>
-              <a:rPr lang="en-GB">
-                <a:latin typeface="Arial"/>
-                <a:cs typeface="Arial"/>
-              </a:rPr>
-              <a:t> </a:t>
-            </a:r>
-            <a:r>
-              <a:rPr lang="en-GB" err="1">
-                <a:latin typeface="Arial"/>
-                <a:cs typeface="Arial"/>
-              </a:rPr>
-              <a:t>vidíme</a:t>
-            </a:r>
-            <a:r>
-              <a:rPr lang="en-GB">
-                <a:latin typeface="Arial"/>
-                <a:cs typeface="Arial"/>
-              </a:rPr>
-              <a:t> </a:t>
-            </a:r>
-            <a:r>
-              <a:rPr lang="en-GB" err="1">
-                <a:latin typeface="Arial"/>
-                <a:cs typeface="Arial"/>
-              </a:rPr>
-              <a:t>nárůst</a:t>
-            </a:r>
-            <a:endParaRPr lang="en-GB" err="1">
-              <a:cs typeface="Arial" panose="020B0604020202020204" pitchFamily="34" charset="0"/>
-            </a:endParaRPr>
-          </a:p>
-        </p:txBody>
-      </p:sp>
-      <p:pic>
-        <p:nvPicPr>
-          <p:cNvPr id="7" name="Picture 6" descr="A graph with a line going up&#10;&#10;AI-generated content may be incorrect.">
-            <a:extLst>
-              <a:ext uri="{FF2B5EF4-FFF2-40B4-BE49-F238E27FC236}">
-                <a16:creationId xmlns:a16="http://schemas.microsoft.com/office/drawing/2014/main" id="{A9C376F9-201B-6BB5-1759-BB7AA9BF3961}"/>
-              </a:ext>
-            </a:extLst>
-          </p:cNvPr>
-          <p:cNvPicPr>
-            <a:picLocks noChangeAspect="1"/>
-          </p:cNvPicPr>
-          <p:nvPr/>
-        </p:nvPicPr>
-        <p:blipFill>
-          <a:blip r:embed="rId3"/>
-          <a:stretch>
-            <a:fillRect/>
-          </a:stretch>
-        </p:blipFill>
-        <p:spPr>
-          <a:xfrm>
-            <a:off x="526631" y="2995313"/>
-            <a:ext cx="5734050" cy="3438525"/>
-          </a:xfrm>
-          <a:prstGeom prst="rect">
-            <a:avLst/>
-          </a:prstGeom>
-        </p:spPr>
-      </p:pic>
-    </p:spTree>
-    <p:extLst>
-      <p:ext uri="{BB962C8B-B14F-4D97-AF65-F5344CB8AC3E}">
-        <p14:creationId xmlns:p14="http://schemas.microsoft.com/office/powerpoint/2010/main" val="329674865"/>
       </p:ext>
     </p:extLst>
   </p:cSld>

--- a/files/prezentace.pptx
+++ b/files/prezentace.pptx
@@ -6,8 +6,8 @@
   </p:sldMasterIdLst>
   <p:sldIdLst>
     <p:sldId id="256" r:id="rId2"/>
-    <p:sldId id="258" r:id="rId3"/>
-    <p:sldId id="277" r:id="rId4"/>
+    <p:sldId id="277" r:id="rId3"/>
+    <p:sldId id="258" r:id="rId4"/>
     <p:sldId id="260" r:id="rId5"/>
     <p:sldId id="262" r:id="rId6"/>
     <p:sldId id="265" r:id="rId7"/>
@@ -152,6 +152,11 @@
       </a:defRPr>
     </a:lvl9pPr>
   </p:defaultTextStyle>
+  <p:extLst>
+    <p:ext uri="{EFAFB233-063F-42B5-8137-9DF3F51BA10A}">
+      <p15:sldGuideLst xmlns:p15="http://schemas.microsoft.com/office/powerpoint/2012/main"/>
+    </p:ext>
+  </p:extLst>
 </p:presentation>
 </file>
 
@@ -1060,46 +1065,6 @@
     </pc:docChg>
   </pc:docChgLst>
   <pc:docChgLst>
-    <pc:chgData name="Petr Vrána" userId="S::xvrana2@mendelu.cz::82fa521c-3097-48f4-ba30-999f8c7ff696" providerId="AD" clId="Web-{BC9E9ED8-3FB2-AACB-BE37-FA487D48EDA3}"/>
-    <pc:docChg chg="modSld">
-      <pc:chgData name="Petr Vrána" userId="S::xvrana2@mendelu.cz::82fa521c-3097-48f4-ba30-999f8c7ff696" providerId="AD" clId="Web-{BC9E9ED8-3FB2-AACB-BE37-FA487D48EDA3}" dt="2026-04-28T07:02:25.012" v="2" actId="20577"/>
-      <pc:docMkLst>
-        <pc:docMk/>
-      </pc:docMkLst>
-      <pc:sldChg chg="modSp">
-        <pc:chgData name="Petr Vrána" userId="S::xvrana2@mendelu.cz::82fa521c-3097-48f4-ba30-999f8c7ff696" providerId="AD" clId="Web-{BC9E9ED8-3FB2-AACB-BE37-FA487D48EDA3}" dt="2026-04-28T07:02:25.012" v="2" actId="20577"/>
-        <pc:sldMkLst>
-          <pc:docMk/>
-          <pc:sldMk cId="1460814851" sldId="274"/>
-        </pc:sldMkLst>
-        <pc:spChg chg="mod">
-          <ac:chgData name="Petr Vrána" userId="S::xvrana2@mendelu.cz::82fa521c-3097-48f4-ba30-999f8c7ff696" providerId="AD" clId="Web-{BC9E9ED8-3FB2-AACB-BE37-FA487D48EDA3}" dt="2026-04-28T07:02:25.012" v="2" actId="20577"/>
-          <ac:spMkLst>
-            <pc:docMk/>
-            <pc:sldMk cId="1460814851" sldId="274"/>
-            <ac:spMk id="2" creationId="{23218BDF-5026-714D-6CF6-19FD63BD6BBA}"/>
-          </ac:spMkLst>
-        </pc:spChg>
-      </pc:sldChg>
-    </pc:docChg>
-  </pc:docChgLst>
-  <pc:docChgLst>
-    <pc:chgData name="Martina Mazurová" userId="S::xmazurov@mendelu.cz::67de52c5-fdf8-4364-96cd-b4a9a3dc7c53" providerId="AD" clId="Web-{AF6E80EA-17E8-7A49-3B47-CB58185BF69A}"/>
-    <pc:docChg chg="addSld">
-      <pc:chgData name="Martina Mazurová" userId="S::xmazurov@mendelu.cz::67de52c5-fdf8-4364-96cd-b4a9a3dc7c53" providerId="AD" clId="Web-{AF6E80EA-17E8-7A49-3B47-CB58185BF69A}" dt="2026-04-26T16:16:09.122" v="0"/>
-      <pc:docMkLst>
-        <pc:docMk/>
-      </pc:docMkLst>
-      <pc:sldChg chg="new">
-        <pc:chgData name="Martina Mazurová" userId="S::xmazurov@mendelu.cz::67de52c5-fdf8-4364-96cd-b4a9a3dc7c53" providerId="AD" clId="Web-{AF6E80EA-17E8-7A49-3B47-CB58185BF69A}" dt="2026-04-26T16:16:09.122" v="0"/>
-        <pc:sldMkLst>
-          <pc:docMk/>
-          <pc:sldMk cId="329674865" sldId="264"/>
-        </pc:sldMkLst>
-      </pc:sldChg>
-    </pc:docChg>
-  </pc:docChgLst>
-  <pc:docChgLst>
     <pc:chgData name="Martina Mazurová" userId="S::xmazurov@mendelu.cz::67de52c5-fdf8-4364-96cd-b4a9a3dc7c53" providerId="AD" clId="Web-{0CC88C09-4F55-9E2A-B9A7-C7A97F1CBB70}"/>
     <pc:docChg chg="modSld">
       <pc:chgData name="Martina Mazurová" userId="S::xmazurov@mendelu.cz::67de52c5-fdf8-4364-96cd-b4a9a3dc7c53" providerId="AD" clId="Web-{0CC88C09-4F55-9E2A-B9A7-C7A97F1CBB70}" dt="2026-04-27T09:07:47.100" v="124" actId="20577"/>
@@ -1160,6 +1125,46 @@
             <ac:picMk id="7" creationId="{A9C376F9-201B-6BB5-1759-BB7AA9BF3961}"/>
           </ac:picMkLst>
         </pc:picChg>
+      </pc:sldChg>
+    </pc:docChg>
+  </pc:docChgLst>
+  <pc:docChgLst>
+    <pc:chgData name="Martina Mazurová" userId="S::xmazurov@mendelu.cz::67de52c5-fdf8-4364-96cd-b4a9a3dc7c53" providerId="AD" clId="Web-{AF6E80EA-17E8-7A49-3B47-CB58185BF69A}"/>
+    <pc:docChg chg="addSld">
+      <pc:chgData name="Martina Mazurová" userId="S::xmazurov@mendelu.cz::67de52c5-fdf8-4364-96cd-b4a9a3dc7c53" providerId="AD" clId="Web-{AF6E80EA-17E8-7A49-3B47-CB58185BF69A}" dt="2026-04-26T16:16:09.122" v="0"/>
+      <pc:docMkLst>
+        <pc:docMk/>
+      </pc:docMkLst>
+      <pc:sldChg chg="new">
+        <pc:chgData name="Martina Mazurová" userId="S::xmazurov@mendelu.cz::67de52c5-fdf8-4364-96cd-b4a9a3dc7c53" providerId="AD" clId="Web-{AF6E80EA-17E8-7A49-3B47-CB58185BF69A}" dt="2026-04-26T16:16:09.122" v="0"/>
+        <pc:sldMkLst>
+          <pc:docMk/>
+          <pc:sldMk cId="329674865" sldId="264"/>
+        </pc:sldMkLst>
+      </pc:sldChg>
+    </pc:docChg>
+  </pc:docChgLst>
+  <pc:docChgLst>
+    <pc:chgData name="Petr Vrána" userId="S::xvrana2@mendelu.cz::82fa521c-3097-48f4-ba30-999f8c7ff696" providerId="AD" clId="Web-{BC9E9ED8-3FB2-AACB-BE37-FA487D48EDA3}"/>
+    <pc:docChg chg="modSld">
+      <pc:chgData name="Petr Vrána" userId="S::xvrana2@mendelu.cz::82fa521c-3097-48f4-ba30-999f8c7ff696" providerId="AD" clId="Web-{BC9E9ED8-3FB2-AACB-BE37-FA487D48EDA3}" dt="2026-04-28T07:02:25.012" v="2" actId="20577"/>
+      <pc:docMkLst>
+        <pc:docMk/>
+      </pc:docMkLst>
+      <pc:sldChg chg="modSp">
+        <pc:chgData name="Petr Vrána" userId="S::xvrana2@mendelu.cz::82fa521c-3097-48f4-ba30-999f8c7ff696" providerId="AD" clId="Web-{BC9E9ED8-3FB2-AACB-BE37-FA487D48EDA3}" dt="2026-04-28T07:02:25.012" v="2" actId="20577"/>
+        <pc:sldMkLst>
+          <pc:docMk/>
+          <pc:sldMk cId="1460814851" sldId="274"/>
+        </pc:sldMkLst>
+        <pc:spChg chg="mod">
+          <ac:chgData name="Petr Vrána" userId="S::xvrana2@mendelu.cz::82fa521c-3097-48f4-ba30-999f8c7ff696" providerId="AD" clId="Web-{BC9E9ED8-3FB2-AACB-BE37-FA487D48EDA3}" dt="2026-04-28T07:02:25.012" v="2" actId="20577"/>
+          <ac:spMkLst>
+            <pc:docMk/>
+            <pc:sldMk cId="1460814851" sldId="274"/>
+            <ac:spMk id="2" creationId="{23218BDF-5026-714D-6CF6-19FD63BD6BBA}"/>
+          </ac:spMkLst>
+        </pc:spChg>
       </pc:sldChg>
     </pc:docChg>
   </pc:docChgLst>
@@ -12708,6 +12713,209 @@
   <p:cSld>
     <p:spTree>
       <p:nvGrpSpPr>
+        <p:cNvPr id="1" name="">
+          <a:extLst>
+            <a:ext uri="{FF2B5EF4-FFF2-40B4-BE49-F238E27FC236}">
+              <a16:creationId xmlns:a16="http://schemas.microsoft.com/office/drawing/2014/main" id="{CC474546-9819-C5FB-FDA7-EDE4272E4847}"/>
+            </a:ext>
+          </a:extLst>
+        </p:cNvPr>
+        <p:cNvGrpSpPr/>
+        <p:nvPr/>
+      </p:nvGrpSpPr>
+      <p:grpSpPr>
+        <a:xfrm>
+          <a:off x="0" y="0"/>
+          <a:ext cx="0" cy="0"/>
+          <a:chOff x="0" y="0"/>
+          <a:chExt cx="0" cy="0"/>
+        </a:xfrm>
+      </p:grpSpPr>
+      <p:sp>
+        <p:nvSpPr>
+          <p:cNvPr id="4" name="Zástupný text 3">
+            <a:extLst>
+              <a:ext uri="{FF2B5EF4-FFF2-40B4-BE49-F238E27FC236}">
+                <a16:creationId xmlns:a16="http://schemas.microsoft.com/office/drawing/2014/main" id="{278707EF-71EB-457E-940E-FBA877C9B50D}"/>
+              </a:ext>
+            </a:extLst>
+          </p:cNvPr>
+          <p:cNvSpPr>
+            <a:spLocks noGrp="1"/>
+          </p:cNvSpPr>
+          <p:nvPr>
+            <p:ph type="body" sz="quarter" idx="14"/>
+          </p:nvPr>
+        </p:nvSpPr>
+        <p:spPr>
+          <a:xfrm>
+            <a:off x="885825" y="419101"/>
+            <a:ext cx="10934700" cy="1134534"/>
+          </a:xfrm>
+        </p:spPr>
+        <p:txBody>
+          <a:bodyPr lIns="0" tIns="0" rIns="0" bIns="0" anchor="t">
+            <a:normAutofit/>
+          </a:bodyPr>
+          <a:lstStyle/>
+          <a:p>
+            <a:r>
+              <a:rPr lang="cs-CZ" dirty="0"/>
+              <a:t>Úvod a cíl</a:t>
+            </a:r>
+          </a:p>
+        </p:txBody>
+      </p:sp>
+      <p:sp>
+        <p:nvSpPr>
+          <p:cNvPr id="2" name="Zástupný obsah 1">
+            <a:extLst>
+              <a:ext uri="{FF2B5EF4-FFF2-40B4-BE49-F238E27FC236}">
+                <a16:creationId xmlns:a16="http://schemas.microsoft.com/office/drawing/2014/main" id="{25BFDE36-F11C-5B38-C9DA-A19E5BA8D415}"/>
+              </a:ext>
+            </a:extLst>
+          </p:cNvPr>
+          <p:cNvSpPr>
+            <a:spLocks noGrp="1"/>
+          </p:cNvSpPr>
+          <p:nvPr>
+            <p:ph sz="half" idx="16"/>
+          </p:nvPr>
+        </p:nvSpPr>
+        <p:spPr>
+          <a:xfrm>
+            <a:off x="885818" y="1553635"/>
+            <a:ext cx="9869267" cy="4601632"/>
+          </a:xfrm>
+        </p:spPr>
+        <p:txBody>
+          <a:bodyPr>
+            <a:normAutofit/>
+          </a:bodyPr>
+          <a:lstStyle/>
+          <a:p>
+            <a:pPr marL="342900" indent="-342900">
+              <a:lnSpc>
+                <a:spcPct val="90000"/>
+              </a:lnSpc>
+              <a:buFont typeface="Arial" panose="020B0604020202020204" pitchFamily="34" charset="0"/>
+              <a:buChar char="•"/>
+            </a:pPr>
+            <a:r>
+              <a:rPr lang="cs-CZ" sz="2000" dirty="0"/>
+              <a:t>VO: </a:t>
+            </a:r>
+            <a:r>
+              <a:rPr lang="cs-CZ" sz="2000" b="1" dirty="0"/>
+              <a:t>Jak se vyvíjely ceny bílého jogurtu v jednotlivých článcích komoditní vertikály a do jaké míry se cenové změny přenášely mezi prvovýrobou, zpracovateli a spotřebiteli?</a:t>
+            </a:r>
+          </a:p>
+          <a:p>
+            <a:pPr marL="342900" indent="-342900">
+              <a:lnSpc>
+                <a:spcPct val="90000"/>
+              </a:lnSpc>
+              <a:buFont typeface="Arial" panose="020B0604020202020204" pitchFamily="34" charset="0"/>
+              <a:buChar char="•"/>
+            </a:pPr>
+            <a:endParaRPr lang="cs-CZ" sz="2000" b="1" dirty="0"/>
+          </a:p>
+          <a:p>
+            <a:r>
+              <a:rPr lang="cs-CZ" sz="2000" dirty="0"/>
+              <a:t>Cílem je zhodnotit vývoj cenového prostředí u bílého jogurtu se zaměřením na:</a:t>
+            </a:r>
+          </a:p>
+          <a:p>
+            <a:pPr marL="342900" indent="-342900">
+              <a:buFont typeface="Arial" panose="020B0604020202020204" pitchFamily="34" charset="0"/>
+              <a:buChar char="•"/>
+            </a:pPr>
+            <a:r>
+              <a:rPr lang="cs-CZ" sz="2000" dirty="0"/>
+              <a:t>postavení jogurtu v komoditní vertikále mléka, </a:t>
+            </a:r>
+          </a:p>
+          <a:p>
+            <a:pPr marL="342900" indent="-342900">
+              <a:buFont typeface="Arial" panose="020B0604020202020204" pitchFamily="34" charset="0"/>
+              <a:buChar char="•"/>
+            </a:pPr>
+            <a:r>
+              <a:rPr lang="cs-CZ" sz="2000" dirty="0"/>
+              <a:t>vývoj produkce jogurtu v Evropě a ve světě, </a:t>
+            </a:r>
+          </a:p>
+          <a:p>
+            <a:pPr marL="342900" indent="-342900">
+              <a:buFont typeface="Arial" panose="020B0604020202020204" pitchFamily="34" charset="0"/>
+              <a:buChar char="•"/>
+            </a:pPr>
+            <a:r>
+              <a:rPr lang="cs-CZ" sz="2000" dirty="0"/>
+              <a:t>nominální a reálný vývoj cen, </a:t>
+            </a:r>
+          </a:p>
+          <a:p>
+            <a:pPr marL="342900" indent="-342900">
+              <a:buFont typeface="Arial" panose="020B0604020202020204" pitchFamily="34" charset="0"/>
+              <a:buChar char="•"/>
+            </a:pPr>
+            <a:r>
+              <a:rPr lang="cs-CZ" sz="2000" dirty="0"/>
+              <a:t>zahraniční obchod a evropský trh, </a:t>
+            </a:r>
+          </a:p>
+          <a:p>
+            <a:pPr marL="342900" indent="-342900">
+              <a:buFont typeface="Arial" panose="020B0604020202020204" pitchFamily="34" charset="0"/>
+              <a:buChar char="•"/>
+            </a:pPr>
+            <a:r>
+              <a:rPr lang="cs-CZ" sz="2000" dirty="0"/>
+              <a:t>elasticitu a zpoždění cenové transmise.</a:t>
+            </a:r>
+          </a:p>
+          <a:p>
+            <a:pPr marL="342900" indent="-342900">
+              <a:lnSpc>
+                <a:spcPct val="90000"/>
+              </a:lnSpc>
+              <a:buFont typeface="Arial" panose="020B0604020202020204" pitchFamily="34" charset="0"/>
+              <a:buChar char="•"/>
+            </a:pPr>
+            <a:endParaRPr lang="cs-CZ" sz="2000" dirty="0"/>
+          </a:p>
+          <a:p>
+            <a:pPr marL="342900" indent="-342900">
+              <a:lnSpc>
+                <a:spcPct val="90000"/>
+              </a:lnSpc>
+              <a:buFont typeface="Arial" panose="020B0604020202020204" pitchFamily="34" charset="0"/>
+              <a:buChar char="•"/>
+            </a:pPr>
+            <a:endParaRPr lang="cs-CZ" sz="2000" dirty="0"/>
+          </a:p>
+        </p:txBody>
+      </p:sp>
+    </p:spTree>
+    <p:extLst>
+      <p:ext uri="{BB962C8B-B14F-4D97-AF65-F5344CB8AC3E}">
+        <p14:creationId xmlns:p14="http://schemas.microsoft.com/office/powerpoint/2010/main" val="3579569277"/>
+      </p:ext>
+    </p:extLst>
+  </p:cSld>
+  <p:clrMapOvr>
+    <a:masterClrMapping/>
+  </p:clrMapOvr>
+</p:sld>
+</file>
+
+<file path=ppt/slides/slide3.xml><?xml version="1.0" encoding="utf-8"?>
+<p:sld xmlns:a="http://schemas.openxmlformats.org/drawingml/2006/main" xmlns:r="http://schemas.openxmlformats.org/officeDocument/2006/relationships" xmlns:p="http://schemas.openxmlformats.org/presentationml/2006/main">
+  <p:cSld>
+    <p:spTree>
+      <p:nvGrpSpPr>
         <p:cNvPr id="1" name=""/>
         <p:cNvGrpSpPr/>
         <p:nvPr/>
@@ -12973,209 +13181,6 @@
     <p:extLst>
       <p:ext uri="{BB962C8B-B14F-4D97-AF65-F5344CB8AC3E}">
         <p14:creationId xmlns:p14="http://schemas.microsoft.com/office/powerpoint/2010/main" val="3856913408"/>
-      </p:ext>
-    </p:extLst>
-  </p:cSld>
-  <p:clrMapOvr>
-    <a:masterClrMapping/>
-  </p:clrMapOvr>
-</p:sld>
-</file>
-
-<file path=ppt/slides/slide3.xml><?xml version="1.0" encoding="utf-8"?>
-<p:sld xmlns:a="http://schemas.openxmlformats.org/drawingml/2006/main" xmlns:r="http://schemas.openxmlformats.org/officeDocument/2006/relationships" xmlns:p="http://schemas.openxmlformats.org/presentationml/2006/main">
-  <p:cSld>
-    <p:spTree>
-      <p:nvGrpSpPr>
-        <p:cNvPr id="1" name="">
-          <a:extLst>
-            <a:ext uri="{FF2B5EF4-FFF2-40B4-BE49-F238E27FC236}">
-              <a16:creationId xmlns:a16="http://schemas.microsoft.com/office/drawing/2014/main" id="{CC474546-9819-C5FB-FDA7-EDE4272E4847}"/>
-            </a:ext>
-          </a:extLst>
-        </p:cNvPr>
-        <p:cNvGrpSpPr/>
-        <p:nvPr/>
-      </p:nvGrpSpPr>
-      <p:grpSpPr>
-        <a:xfrm>
-          <a:off x="0" y="0"/>
-          <a:ext cx="0" cy="0"/>
-          <a:chOff x="0" y="0"/>
-          <a:chExt cx="0" cy="0"/>
-        </a:xfrm>
-      </p:grpSpPr>
-      <p:sp>
-        <p:nvSpPr>
-          <p:cNvPr id="4" name="Zástupný text 3">
-            <a:extLst>
-              <a:ext uri="{FF2B5EF4-FFF2-40B4-BE49-F238E27FC236}">
-                <a16:creationId xmlns:a16="http://schemas.microsoft.com/office/drawing/2014/main" id="{278707EF-71EB-457E-940E-FBA877C9B50D}"/>
-              </a:ext>
-            </a:extLst>
-          </p:cNvPr>
-          <p:cNvSpPr>
-            <a:spLocks noGrp="1"/>
-          </p:cNvSpPr>
-          <p:nvPr>
-            <p:ph type="body" sz="quarter" idx="14"/>
-          </p:nvPr>
-        </p:nvSpPr>
-        <p:spPr>
-          <a:xfrm>
-            <a:off x="885825" y="419101"/>
-            <a:ext cx="10934700" cy="1134534"/>
-          </a:xfrm>
-        </p:spPr>
-        <p:txBody>
-          <a:bodyPr lIns="0" tIns="0" rIns="0" bIns="0" anchor="t">
-            <a:normAutofit/>
-          </a:bodyPr>
-          <a:lstStyle/>
-          <a:p>
-            <a:r>
-              <a:rPr lang="cs-CZ" dirty="0"/>
-              <a:t>Úvod a cíl</a:t>
-            </a:r>
-          </a:p>
-        </p:txBody>
-      </p:sp>
-      <p:sp>
-        <p:nvSpPr>
-          <p:cNvPr id="2" name="Zástupný obsah 1">
-            <a:extLst>
-              <a:ext uri="{FF2B5EF4-FFF2-40B4-BE49-F238E27FC236}">
-                <a16:creationId xmlns:a16="http://schemas.microsoft.com/office/drawing/2014/main" id="{25BFDE36-F11C-5B38-C9DA-A19E5BA8D415}"/>
-              </a:ext>
-            </a:extLst>
-          </p:cNvPr>
-          <p:cNvSpPr>
-            <a:spLocks noGrp="1"/>
-          </p:cNvSpPr>
-          <p:nvPr>
-            <p:ph sz="half" idx="16"/>
-          </p:nvPr>
-        </p:nvSpPr>
-        <p:spPr>
-          <a:xfrm>
-            <a:off x="885818" y="1553635"/>
-            <a:ext cx="9869267" cy="4601632"/>
-          </a:xfrm>
-        </p:spPr>
-        <p:txBody>
-          <a:bodyPr>
-            <a:normAutofit/>
-          </a:bodyPr>
-          <a:lstStyle/>
-          <a:p>
-            <a:pPr marL="342900" indent="-342900">
-              <a:lnSpc>
-                <a:spcPct val="90000"/>
-              </a:lnSpc>
-              <a:buFont typeface="Arial" panose="020B0604020202020204" pitchFamily="34" charset="0"/>
-              <a:buChar char="•"/>
-            </a:pPr>
-            <a:r>
-              <a:rPr lang="cs-CZ" sz="2000" dirty="0"/>
-              <a:t>VO: </a:t>
-            </a:r>
-            <a:r>
-              <a:rPr lang="cs-CZ" sz="2000" b="1" dirty="0"/>
-              <a:t>Jak se vyvíjely ceny bílého jogurtu v jednotlivých článcích komoditní vertikály a do jaké míry se cenové změny přenášely mezi prvovýrobou, zpracovateli a spotřebiteli?</a:t>
-            </a:r>
-          </a:p>
-          <a:p>
-            <a:pPr marL="342900" indent="-342900">
-              <a:lnSpc>
-                <a:spcPct val="90000"/>
-              </a:lnSpc>
-              <a:buFont typeface="Arial" panose="020B0604020202020204" pitchFamily="34" charset="0"/>
-              <a:buChar char="•"/>
-            </a:pPr>
-            <a:endParaRPr lang="cs-CZ" sz="2000" b="1" dirty="0"/>
-          </a:p>
-          <a:p>
-            <a:r>
-              <a:rPr lang="cs-CZ" sz="2000" dirty="0"/>
-              <a:t>Cílem je zhodnotit vývoj cenového prostředí u bílého jogurtu se zaměřením na:</a:t>
-            </a:r>
-          </a:p>
-          <a:p>
-            <a:pPr marL="342900" indent="-342900">
-              <a:buFont typeface="Arial" panose="020B0604020202020204" pitchFamily="34" charset="0"/>
-              <a:buChar char="•"/>
-            </a:pPr>
-            <a:r>
-              <a:rPr lang="cs-CZ" sz="2000" dirty="0"/>
-              <a:t>postavení jogurtu v komoditní vertikále mléka, </a:t>
-            </a:r>
-          </a:p>
-          <a:p>
-            <a:pPr marL="342900" indent="-342900">
-              <a:buFont typeface="Arial" panose="020B0604020202020204" pitchFamily="34" charset="0"/>
-              <a:buChar char="•"/>
-            </a:pPr>
-            <a:r>
-              <a:rPr lang="cs-CZ" sz="2000" dirty="0"/>
-              <a:t>vývoj produkce jogurtu v Evropě a ve světě, </a:t>
-            </a:r>
-          </a:p>
-          <a:p>
-            <a:pPr marL="342900" indent="-342900">
-              <a:buFont typeface="Arial" panose="020B0604020202020204" pitchFamily="34" charset="0"/>
-              <a:buChar char="•"/>
-            </a:pPr>
-            <a:r>
-              <a:rPr lang="cs-CZ" sz="2000" dirty="0"/>
-              <a:t>nominální a reálný vývoj cen, </a:t>
-            </a:r>
-          </a:p>
-          <a:p>
-            <a:pPr marL="342900" indent="-342900">
-              <a:buFont typeface="Arial" panose="020B0604020202020204" pitchFamily="34" charset="0"/>
-              <a:buChar char="•"/>
-            </a:pPr>
-            <a:r>
-              <a:rPr lang="cs-CZ" sz="2000" dirty="0"/>
-              <a:t>zahraniční obchod a evropský trh, </a:t>
-            </a:r>
-          </a:p>
-          <a:p>
-            <a:pPr marL="342900" indent="-342900">
-              <a:buFont typeface="Arial" panose="020B0604020202020204" pitchFamily="34" charset="0"/>
-              <a:buChar char="•"/>
-            </a:pPr>
-            <a:r>
-              <a:rPr lang="cs-CZ" sz="2000" dirty="0"/>
-              <a:t>elasticitu a zpoždění cenové transmise.</a:t>
-            </a:r>
-          </a:p>
-          <a:p>
-            <a:pPr marL="342900" indent="-342900">
-              <a:lnSpc>
-                <a:spcPct val="90000"/>
-              </a:lnSpc>
-              <a:buFont typeface="Arial" panose="020B0604020202020204" pitchFamily="34" charset="0"/>
-              <a:buChar char="•"/>
-            </a:pPr>
-            <a:endParaRPr lang="cs-CZ" sz="2000" dirty="0"/>
-          </a:p>
-          <a:p>
-            <a:pPr marL="342900" indent="-342900">
-              <a:lnSpc>
-                <a:spcPct val="90000"/>
-              </a:lnSpc>
-              <a:buFont typeface="Arial" panose="020B0604020202020204" pitchFamily="34" charset="0"/>
-              <a:buChar char="•"/>
-            </a:pPr>
-            <a:endParaRPr lang="cs-CZ" sz="2000" dirty="0"/>
-          </a:p>
-        </p:txBody>
-      </p:sp>
-    </p:spTree>
-    <p:extLst>
-      <p:ext uri="{BB962C8B-B14F-4D97-AF65-F5344CB8AC3E}">
-        <p14:creationId xmlns:p14="http://schemas.microsoft.com/office/powerpoint/2010/main" val="3579569277"/>
       </p:ext>
     </p:extLst>
   </p:cSld>

--- a/files/prezentace.pptx
+++ b/files/prezentace.pptx
@@ -11,19 +11,22 @@
     <p:sldId id="260" r:id="rId5"/>
     <p:sldId id="262" r:id="rId6"/>
     <p:sldId id="265" r:id="rId7"/>
-    <p:sldId id="267" r:id="rId8"/>
-    <p:sldId id="268" r:id="rId9"/>
-    <p:sldId id="269" r:id="rId10"/>
-    <p:sldId id="264" r:id="rId11"/>
-    <p:sldId id="263" r:id="rId12"/>
-    <p:sldId id="276" r:id="rId13"/>
-    <p:sldId id="266" r:id="rId14"/>
-    <p:sldId id="270" r:id="rId15"/>
-    <p:sldId id="271" r:id="rId16"/>
-    <p:sldId id="272" r:id="rId17"/>
-    <p:sldId id="273" r:id="rId18"/>
-    <p:sldId id="274" r:id="rId19"/>
-    <p:sldId id="275" r:id="rId20"/>
+    <p:sldId id="278" r:id="rId8"/>
+    <p:sldId id="267" r:id="rId9"/>
+    <p:sldId id="268" r:id="rId10"/>
+    <p:sldId id="269" r:id="rId11"/>
+    <p:sldId id="279" r:id="rId12"/>
+    <p:sldId id="280" r:id="rId13"/>
+    <p:sldId id="264" r:id="rId14"/>
+    <p:sldId id="263" r:id="rId15"/>
+    <p:sldId id="276" r:id="rId16"/>
+    <p:sldId id="266" r:id="rId17"/>
+    <p:sldId id="270" r:id="rId18"/>
+    <p:sldId id="271" r:id="rId19"/>
+    <p:sldId id="272" r:id="rId20"/>
+    <p:sldId id="273" r:id="rId21"/>
+    <p:sldId id="274" r:id="rId22"/>
+    <p:sldId id="275" r:id="rId23"/>
   </p:sldIdLst>
   <p:sldSz cx="12192000" cy="6858000"/>
   <p:notesSz cx="6858000" cy="9144000"/>
@@ -1065,6 +1068,46 @@
     </pc:docChg>
   </pc:docChgLst>
   <pc:docChgLst>
+    <pc:chgData name="Petr Vrána" userId="S::xvrana2@mendelu.cz::82fa521c-3097-48f4-ba30-999f8c7ff696" providerId="AD" clId="Web-{BC9E9ED8-3FB2-AACB-BE37-FA487D48EDA3}"/>
+    <pc:docChg chg="modSld">
+      <pc:chgData name="Petr Vrána" userId="S::xvrana2@mendelu.cz::82fa521c-3097-48f4-ba30-999f8c7ff696" providerId="AD" clId="Web-{BC9E9ED8-3FB2-AACB-BE37-FA487D48EDA3}" dt="2026-04-28T07:02:25.012" v="2" actId="20577"/>
+      <pc:docMkLst>
+        <pc:docMk/>
+      </pc:docMkLst>
+      <pc:sldChg chg="modSp">
+        <pc:chgData name="Petr Vrána" userId="S::xvrana2@mendelu.cz::82fa521c-3097-48f4-ba30-999f8c7ff696" providerId="AD" clId="Web-{BC9E9ED8-3FB2-AACB-BE37-FA487D48EDA3}" dt="2026-04-28T07:02:25.012" v="2" actId="20577"/>
+        <pc:sldMkLst>
+          <pc:docMk/>
+          <pc:sldMk cId="1460814851" sldId="274"/>
+        </pc:sldMkLst>
+        <pc:spChg chg="mod">
+          <ac:chgData name="Petr Vrána" userId="S::xvrana2@mendelu.cz::82fa521c-3097-48f4-ba30-999f8c7ff696" providerId="AD" clId="Web-{BC9E9ED8-3FB2-AACB-BE37-FA487D48EDA3}" dt="2026-04-28T07:02:25.012" v="2" actId="20577"/>
+          <ac:spMkLst>
+            <pc:docMk/>
+            <pc:sldMk cId="1460814851" sldId="274"/>
+            <ac:spMk id="2" creationId="{23218BDF-5026-714D-6CF6-19FD63BD6BBA}"/>
+          </ac:spMkLst>
+        </pc:spChg>
+      </pc:sldChg>
+    </pc:docChg>
+  </pc:docChgLst>
+  <pc:docChgLst>
+    <pc:chgData name="Martina Mazurová" userId="S::xmazurov@mendelu.cz::67de52c5-fdf8-4364-96cd-b4a9a3dc7c53" providerId="AD" clId="Web-{AF6E80EA-17E8-7A49-3B47-CB58185BF69A}"/>
+    <pc:docChg chg="addSld">
+      <pc:chgData name="Martina Mazurová" userId="S::xmazurov@mendelu.cz::67de52c5-fdf8-4364-96cd-b4a9a3dc7c53" providerId="AD" clId="Web-{AF6E80EA-17E8-7A49-3B47-CB58185BF69A}" dt="2026-04-26T16:16:09.122" v="0"/>
+      <pc:docMkLst>
+        <pc:docMk/>
+      </pc:docMkLst>
+      <pc:sldChg chg="new">
+        <pc:chgData name="Martina Mazurová" userId="S::xmazurov@mendelu.cz::67de52c5-fdf8-4364-96cd-b4a9a3dc7c53" providerId="AD" clId="Web-{AF6E80EA-17E8-7A49-3B47-CB58185BF69A}" dt="2026-04-26T16:16:09.122" v="0"/>
+        <pc:sldMkLst>
+          <pc:docMk/>
+          <pc:sldMk cId="329674865" sldId="264"/>
+        </pc:sldMkLst>
+      </pc:sldChg>
+    </pc:docChg>
+  </pc:docChgLst>
+  <pc:docChgLst>
     <pc:chgData name="Martina Mazurová" userId="S::xmazurov@mendelu.cz::67de52c5-fdf8-4364-96cd-b4a9a3dc7c53" providerId="AD" clId="Web-{0CC88C09-4F55-9E2A-B9A7-C7A97F1CBB70}"/>
     <pc:docChg chg="modSld">
       <pc:chgData name="Martina Mazurová" userId="S::xmazurov@mendelu.cz::67de52c5-fdf8-4364-96cd-b4a9a3dc7c53" providerId="AD" clId="Web-{0CC88C09-4F55-9E2A-B9A7-C7A97F1CBB70}" dt="2026-04-27T09:07:47.100" v="124" actId="20577"/>
@@ -1125,46 +1168,6 @@
             <ac:picMk id="7" creationId="{A9C376F9-201B-6BB5-1759-BB7AA9BF3961}"/>
           </ac:picMkLst>
         </pc:picChg>
-      </pc:sldChg>
-    </pc:docChg>
-  </pc:docChgLst>
-  <pc:docChgLst>
-    <pc:chgData name="Martina Mazurová" userId="S::xmazurov@mendelu.cz::67de52c5-fdf8-4364-96cd-b4a9a3dc7c53" providerId="AD" clId="Web-{AF6E80EA-17E8-7A49-3B47-CB58185BF69A}"/>
-    <pc:docChg chg="addSld">
-      <pc:chgData name="Martina Mazurová" userId="S::xmazurov@mendelu.cz::67de52c5-fdf8-4364-96cd-b4a9a3dc7c53" providerId="AD" clId="Web-{AF6E80EA-17E8-7A49-3B47-CB58185BF69A}" dt="2026-04-26T16:16:09.122" v="0"/>
-      <pc:docMkLst>
-        <pc:docMk/>
-      </pc:docMkLst>
-      <pc:sldChg chg="new">
-        <pc:chgData name="Martina Mazurová" userId="S::xmazurov@mendelu.cz::67de52c5-fdf8-4364-96cd-b4a9a3dc7c53" providerId="AD" clId="Web-{AF6E80EA-17E8-7A49-3B47-CB58185BF69A}" dt="2026-04-26T16:16:09.122" v="0"/>
-        <pc:sldMkLst>
-          <pc:docMk/>
-          <pc:sldMk cId="329674865" sldId="264"/>
-        </pc:sldMkLst>
-      </pc:sldChg>
-    </pc:docChg>
-  </pc:docChgLst>
-  <pc:docChgLst>
-    <pc:chgData name="Petr Vrána" userId="S::xvrana2@mendelu.cz::82fa521c-3097-48f4-ba30-999f8c7ff696" providerId="AD" clId="Web-{BC9E9ED8-3FB2-AACB-BE37-FA487D48EDA3}"/>
-    <pc:docChg chg="modSld">
-      <pc:chgData name="Petr Vrána" userId="S::xvrana2@mendelu.cz::82fa521c-3097-48f4-ba30-999f8c7ff696" providerId="AD" clId="Web-{BC9E9ED8-3FB2-AACB-BE37-FA487D48EDA3}" dt="2026-04-28T07:02:25.012" v="2" actId="20577"/>
-      <pc:docMkLst>
-        <pc:docMk/>
-      </pc:docMkLst>
-      <pc:sldChg chg="modSp">
-        <pc:chgData name="Petr Vrána" userId="S::xvrana2@mendelu.cz::82fa521c-3097-48f4-ba30-999f8c7ff696" providerId="AD" clId="Web-{BC9E9ED8-3FB2-AACB-BE37-FA487D48EDA3}" dt="2026-04-28T07:02:25.012" v="2" actId="20577"/>
-        <pc:sldMkLst>
-          <pc:docMk/>
-          <pc:sldMk cId="1460814851" sldId="274"/>
-        </pc:sldMkLst>
-        <pc:spChg chg="mod">
-          <ac:chgData name="Petr Vrána" userId="S::xvrana2@mendelu.cz::82fa521c-3097-48f4-ba30-999f8c7ff696" providerId="AD" clId="Web-{BC9E9ED8-3FB2-AACB-BE37-FA487D48EDA3}" dt="2026-04-28T07:02:25.012" v="2" actId="20577"/>
-          <ac:spMkLst>
-            <pc:docMk/>
-            <pc:sldMk cId="1460814851" sldId="274"/>
-            <ac:spMk id="2" creationId="{23218BDF-5026-714D-6CF6-19FD63BD6BBA}"/>
-          </ac:spMkLst>
-        </pc:spChg>
       </pc:sldChg>
     </pc:docChg>
   </pc:docChgLst>
@@ -7367,6 +7370,1276 @@
           <a:chExt cx="0" cy="0"/>
         </a:xfrm>
       </p:grpSpPr>
+      <p:sp>
+        <p:nvSpPr>
+          <p:cNvPr id="2" name="Content Placeholder 1">
+            <a:extLst>
+              <a:ext uri="{FF2B5EF4-FFF2-40B4-BE49-F238E27FC236}">
+                <a16:creationId xmlns:a16="http://schemas.microsoft.com/office/drawing/2014/main" id="{73BE7F54-419C-A154-D569-31C6B1ADB812}"/>
+              </a:ext>
+            </a:extLst>
+          </p:cNvPr>
+          <p:cNvSpPr>
+            <a:spLocks noGrp="1"/>
+          </p:cNvSpPr>
+          <p:nvPr>
+            <p:ph sz="half" idx="1"/>
+          </p:nvPr>
+        </p:nvSpPr>
+        <p:spPr>
+          <a:xfrm>
+            <a:off x="885822" y="1200150"/>
+            <a:ext cx="5362577" cy="5237292"/>
+          </a:xfrm>
+        </p:spPr>
+        <p:txBody>
+          <a:bodyPr lIns="0" tIns="0" rIns="0" bIns="0" anchor="t"/>
+          <a:lstStyle/>
+          <a:p>
+            <a:pPr marL="285750" indent="-285750">
+              <a:buFont typeface="Arial"/>
+              <a:buChar char="•"/>
+            </a:pPr>
+            <a:r>
+              <a:rPr lang="en-US" err="1">
+                <a:ea typeface="+mn-lt"/>
+                <a:cs typeface="+mn-lt"/>
+              </a:rPr>
+              <a:t>Cenové</a:t>
+            </a:r>
+            <a:r>
+              <a:rPr lang="en-US">
+                <a:ea typeface="+mn-lt"/>
+                <a:cs typeface="+mn-lt"/>
+              </a:rPr>
+              <a:t> </a:t>
+            </a:r>
+            <a:r>
+              <a:rPr lang="en-US" err="1">
+                <a:ea typeface="+mn-lt"/>
+                <a:cs typeface="+mn-lt"/>
+              </a:rPr>
+              <a:t>řady</a:t>
+            </a:r>
+            <a:r>
+              <a:rPr lang="en-US">
+                <a:ea typeface="+mn-lt"/>
+                <a:cs typeface="+mn-lt"/>
+              </a:rPr>
+              <a:t> </a:t>
+            </a:r>
+            <a:r>
+              <a:rPr lang="en-US" err="1">
+                <a:ea typeface="+mn-lt"/>
+                <a:cs typeface="+mn-lt"/>
+              </a:rPr>
+              <a:t>byly</a:t>
+            </a:r>
+            <a:r>
+              <a:rPr lang="en-US">
+                <a:ea typeface="+mn-lt"/>
+                <a:cs typeface="+mn-lt"/>
+              </a:rPr>
+              <a:t> </a:t>
+            </a:r>
+            <a:r>
+              <a:rPr lang="en-US" err="1">
+                <a:ea typeface="+mn-lt"/>
+                <a:cs typeface="+mn-lt"/>
+              </a:rPr>
+              <a:t>očištěny</a:t>
+            </a:r>
+            <a:r>
+              <a:rPr lang="en-US">
+                <a:ea typeface="+mn-lt"/>
+                <a:cs typeface="+mn-lt"/>
+              </a:rPr>
+              <a:t> o </a:t>
+            </a:r>
+            <a:r>
+              <a:rPr lang="en-US" err="1">
+                <a:ea typeface="+mn-lt"/>
+                <a:cs typeface="+mn-lt"/>
+              </a:rPr>
+              <a:t>inflaci</a:t>
+            </a:r>
+            <a:r>
+              <a:rPr lang="en-US">
+                <a:ea typeface="+mn-lt"/>
+                <a:cs typeface="+mn-lt"/>
+              </a:rPr>
+              <a:t> </a:t>
+            </a:r>
+            <a:r>
+              <a:rPr lang="en-US" err="1">
+                <a:ea typeface="+mn-lt"/>
+                <a:cs typeface="+mn-lt"/>
+              </a:rPr>
+              <a:t>pomocí</a:t>
+            </a:r>
+            <a:r>
+              <a:rPr lang="en-US">
+                <a:ea typeface="+mn-lt"/>
+                <a:cs typeface="+mn-lt"/>
+              </a:rPr>
+              <a:t> </a:t>
+            </a:r>
+            <a:r>
+              <a:rPr lang="en-US" err="1">
+                <a:ea typeface="+mn-lt"/>
+                <a:cs typeface="+mn-lt"/>
+              </a:rPr>
+              <a:t>měsíční</a:t>
+            </a:r>
+            <a:r>
+              <a:rPr lang="en-US">
+                <a:ea typeface="+mn-lt"/>
+                <a:cs typeface="+mn-lt"/>
+              </a:rPr>
+              <a:t> </a:t>
+            </a:r>
+            <a:r>
+              <a:rPr lang="en-US" err="1">
+                <a:ea typeface="+mn-lt"/>
+                <a:cs typeface="+mn-lt"/>
+              </a:rPr>
+              <a:t>míry</a:t>
+            </a:r>
+            <a:r>
+              <a:rPr lang="en-US">
+                <a:ea typeface="+mn-lt"/>
+                <a:cs typeface="+mn-lt"/>
+              </a:rPr>
+              <a:t> </a:t>
+            </a:r>
+            <a:r>
+              <a:rPr lang="en-US" err="1">
+                <a:ea typeface="+mn-lt"/>
+                <a:cs typeface="+mn-lt"/>
+              </a:rPr>
+              <a:t>inflace</a:t>
+            </a:r>
+            <a:r>
+              <a:rPr lang="en-US">
+                <a:ea typeface="+mn-lt"/>
+                <a:cs typeface="+mn-lt"/>
+              </a:rPr>
+              <a:t>.</a:t>
+            </a:r>
+            <a:endParaRPr lang="en-US"/>
+          </a:p>
+          <a:p>
+            <a:pPr marL="285750" indent="-285750">
+              <a:buFont typeface="Arial"/>
+              <a:buChar char="•"/>
+            </a:pPr>
+            <a:r>
+              <a:rPr lang="en-US">
+                <a:ea typeface="+mn-lt"/>
+                <a:cs typeface="+mn-lt"/>
+              </a:rPr>
+              <a:t>V </a:t>
+            </a:r>
+            <a:r>
+              <a:rPr lang="en-US" err="1">
+                <a:ea typeface="+mn-lt"/>
+                <a:cs typeface="+mn-lt"/>
+              </a:rPr>
+              <a:t>reálném</a:t>
+            </a:r>
+            <a:r>
+              <a:rPr lang="en-US">
+                <a:ea typeface="+mn-lt"/>
+                <a:cs typeface="+mn-lt"/>
+              </a:rPr>
+              <a:t> </a:t>
+            </a:r>
+            <a:r>
+              <a:rPr lang="en-US" err="1">
+                <a:ea typeface="+mn-lt"/>
+                <a:cs typeface="+mn-lt"/>
+              </a:rPr>
+              <a:t>vyjádření</a:t>
+            </a:r>
+            <a:r>
+              <a:rPr lang="en-US">
+                <a:ea typeface="+mn-lt"/>
+                <a:cs typeface="+mn-lt"/>
+              </a:rPr>
+              <a:t> je </a:t>
+            </a:r>
+            <a:r>
+              <a:rPr lang="en-US" err="1">
+                <a:ea typeface="+mn-lt"/>
+                <a:cs typeface="+mn-lt"/>
+              </a:rPr>
+              <a:t>růst</a:t>
+            </a:r>
+            <a:r>
+              <a:rPr lang="en-US">
+                <a:ea typeface="+mn-lt"/>
+                <a:cs typeface="+mn-lt"/>
+              </a:rPr>
+              <a:t> </a:t>
+            </a:r>
+            <a:r>
+              <a:rPr lang="en-US" err="1">
+                <a:ea typeface="+mn-lt"/>
+                <a:cs typeface="+mn-lt"/>
+              </a:rPr>
+              <a:t>cen</a:t>
+            </a:r>
+            <a:r>
+              <a:rPr lang="en-US">
+                <a:ea typeface="+mn-lt"/>
+                <a:cs typeface="+mn-lt"/>
+              </a:rPr>
+              <a:t> po </a:t>
+            </a:r>
+            <a:r>
+              <a:rPr lang="en-US" err="1">
+                <a:ea typeface="+mn-lt"/>
+                <a:cs typeface="+mn-lt"/>
+              </a:rPr>
+              <a:t>roce</a:t>
+            </a:r>
+            <a:r>
+              <a:rPr lang="en-US">
+                <a:ea typeface="+mn-lt"/>
+                <a:cs typeface="+mn-lt"/>
+              </a:rPr>
+              <a:t> 2021 </a:t>
+            </a:r>
+            <a:r>
+              <a:rPr lang="en-US" err="1">
+                <a:ea typeface="+mn-lt"/>
+                <a:cs typeface="+mn-lt"/>
+              </a:rPr>
+              <a:t>méně</a:t>
+            </a:r>
+            <a:r>
+              <a:rPr lang="en-US">
+                <a:ea typeface="+mn-lt"/>
+                <a:cs typeface="+mn-lt"/>
+              </a:rPr>
+              <a:t> </a:t>
+            </a:r>
+            <a:r>
+              <a:rPr lang="en-US" err="1">
+                <a:ea typeface="+mn-lt"/>
+                <a:cs typeface="+mn-lt"/>
+              </a:rPr>
+              <a:t>výrazný</a:t>
+            </a:r>
+            <a:r>
+              <a:rPr lang="en-US">
+                <a:ea typeface="+mn-lt"/>
+                <a:cs typeface="+mn-lt"/>
+              </a:rPr>
+              <a:t>.</a:t>
+            </a:r>
+            <a:endParaRPr lang="en-US"/>
+          </a:p>
+          <a:p>
+            <a:pPr marL="285750" indent="-285750">
+              <a:buFont typeface="Arial"/>
+              <a:buChar char="•"/>
+            </a:pPr>
+            <a:r>
+              <a:rPr lang="en-US">
+                <a:ea typeface="+mn-lt"/>
+                <a:cs typeface="+mn-lt"/>
+              </a:rPr>
+              <a:t>U </a:t>
+            </a:r>
+            <a:r>
+              <a:rPr lang="en-US" b="1">
+                <a:ea typeface="+mn-lt"/>
+                <a:cs typeface="+mn-lt"/>
+              </a:rPr>
+              <a:t>SC</a:t>
+            </a:r>
+            <a:r>
+              <a:rPr lang="en-US">
+                <a:ea typeface="+mn-lt"/>
+                <a:cs typeface="+mn-lt"/>
+              </a:rPr>
+              <a:t> se </a:t>
+            </a:r>
+            <a:r>
+              <a:rPr lang="en-US" err="1">
+                <a:ea typeface="+mn-lt"/>
+                <a:cs typeface="+mn-lt"/>
+              </a:rPr>
+              <a:t>nominální</a:t>
+            </a:r>
+            <a:r>
+              <a:rPr lang="en-US">
+                <a:ea typeface="+mn-lt"/>
+                <a:cs typeface="+mn-lt"/>
+              </a:rPr>
+              <a:t> </a:t>
+            </a:r>
+            <a:r>
+              <a:rPr lang="en-US" err="1">
+                <a:ea typeface="+mn-lt"/>
+                <a:cs typeface="+mn-lt"/>
+              </a:rPr>
+              <a:t>zdražení</a:t>
+            </a:r>
+            <a:r>
+              <a:rPr lang="en-US">
+                <a:ea typeface="+mn-lt"/>
+                <a:cs typeface="+mn-lt"/>
+              </a:rPr>
+              <a:t> po </a:t>
+            </a:r>
+            <a:r>
+              <a:rPr lang="en-US" err="1">
+                <a:ea typeface="+mn-lt"/>
+                <a:cs typeface="+mn-lt"/>
+              </a:rPr>
+              <a:t>očištění</a:t>
+            </a:r>
+            <a:r>
+              <a:rPr lang="en-US">
+                <a:ea typeface="+mn-lt"/>
+                <a:cs typeface="+mn-lt"/>
+              </a:rPr>
+              <a:t> </a:t>
+            </a:r>
+            <a:r>
+              <a:rPr lang="en-US" err="1">
+                <a:ea typeface="+mn-lt"/>
+                <a:cs typeface="+mn-lt"/>
+              </a:rPr>
+              <a:t>mění</a:t>
+            </a:r>
+            <a:r>
+              <a:rPr lang="en-US">
+                <a:ea typeface="+mn-lt"/>
+                <a:cs typeface="+mn-lt"/>
+              </a:rPr>
+              <a:t> </a:t>
+            </a:r>
+            <a:r>
+              <a:rPr lang="en-US" err="1">
+                <a:ea typeface="+mn-lt"/>
+                <a:cs typeface="+mn-lt"/>
+              </a:rPr>
+              <a:t>spíše</a:t>
+            </a:r>
+            <a:r>
+              <a:rPr lang="en-US">
+                <a:ea typeface="+mn-lt"/>
+                <a:cs typeface="+mn-lt"/>
+              </a:rPr>
+              <a:t> </a:t>
+            </a:r>
+            <a:r>
+              <a:rPr lang="en-US" err="1">
+                <a:ea typeface="+mn-lt"/>
+                <a:cs typeface="+mn-lt"/>
+              </a:rPr>
+              <a:t>ve</a:t>
+            </a:r>
+            <a:r>
+              <a:rPr lang="en-US">
+                <a:ea typeface="+mn-lt"/>
+                <a:cs typeface="+mn-lt"/>
+              </a:rPr>
+              <a:t> </a:t>
+            </a:r>
+            <a:r>
+              <a:rPr lang="en-US" err="1">
+                <a:ea typeface="+mn-lt"/>
+                <a:cs typeface="+mn-lt"/>
+              </a:rPr>
+              <a:t>stagnaci</a:t>
+            </a:r>
+            <a:r>
+              <a:rPr lang="en-US">
+                <a:ea typeface="+mn-lt"/>
+                <a:cs typeface="+mn-lt"/>
+              </a:rPr>
+              <a:t> </a:t>
+            </a:r>
+            <a:r>
+              <a:rPr lang="en-US" err="1">
+                <a:ea typeface="+mn-lt"/>
+                <a:cs typeface="+mn-lt"/>
+              </a:rPr>
+              <a:t>až</a:t>
+            </a:r>
+            <a:r>
+              <a:rPr lang="en-US">
+                <a:ea typeface="+mn-lt"/>
+                <a:cs typeface="+mn-lt"/>
+              </a:rPr>
+              <a:t> </a:t>
+            </a:r>
+            <a:r>
+              <a:rPr lang="en-US" err="1">
+                <a:ea typeface="+mn-lt"/>
+                <a:cs typeface="+mn-lt"/>
+              </a:rPr>
+              <a:t>mírný</a:t>
+            </a:r>
+            <a:r>
+              <a:rPr lang="en-US">
+                <a:ea typeface="+mn-lt"/>
+                <a:cs typeface="+mn-lt"/>
+              </a:rPr>
+              <a:t> </a:t>
+            </a:r>
+            <a:r>
+              <a:rPr lang="en-US" err="1">
+                <a:ea typeface="+mn-lt"/>
+                <a:cs typeface="+mn-lt"/>
+              </a:rPr>
+              <a:t>pokles</a:t>
+            </a:r>
+            <a:r>
+              <a:rPr lang="en-US">
+                <a:ea typeface="+mn-lt"/>
+                <a:cs typeface="+mn-lt"/>
+              </a:rPr>
+              <a:t>.</a:t>
+            </a:r>
+            <a:endParaRPr lang="en-US"/>
+          </a:p>
+          <a:p>
+            <a:pPr marL="285750" indent="-285750">
+              <a:buFont typeface="Arial"/>
+              <a:buChar char="•"/>
+            </a:pPr>
+            <a:r>
+              <a:rPr lang="en-US">
+                <a:ea typeface="+mn-lt"/>
+                <a:cs typeface="+mn-lt"/>
+              </a:rPr>
+              <a:t>U </a:t>
+            </a:r>
+            <a:r>
+              <a:rPr lang="en-US" b="1">
+                <a:ea typeface="+mn-lt"/>
+                <a:cs typeface="+mn-lt"/>
+              </a:rPr>
+              <a:t>CPV</a:t>
+            </a:r>
+            <a:r>
+              <a:rPr lang="en-US">
+                <a:ea typeface="+mn-lt"/>
+                <a:cs typeface="+mn-lt"/>
+              </a:rPr>
+              <a:t> se </a:t>
+            </a:r>
+            <a:r>
+              <a:rPr lang="en-US" err="1">
+                <a:ea typeface="+mn-lt"/>
+                <a:cs typeface="+mn-lt"/>
+              </a:rPr>
+              <a:t>ukazuje</a:t>
+            </a:r>
+            <a:r>
+              <a:rPr lang="en-US">
+                <a:ea typeface="+mn-lt"/>
+                <a:cs typeface="+mn-lt"/>
+              </a:rPr>
+              <a:t> </a:t>
+            </a:r>
+            <a:r>
+              <a:rPr lang="en-US" err="1">
+                <a:ea typeface="+mn-lt"/>
+                <a:cs typeface="+mn-lt"/>
+              </a:rPr>
+              <a:t>stabilnější</a:t>
+            </a:r>
+            <a:r>
+              <a:rPr lang="en-US">
+                <a:ea typeface="+mn-lt"/>
+                <a:cs typeface="+mn-lt"/>
+              </a:rPr>
+              <a:t> </a:t>
+            </a:r>
+            <a:r>
+              <a:rPr lang="en-US" err="1">
+                <a:ea typeface="+mn-lt"/>
+                <a:cs typeface="+mn-lt"/>
+              </a:rPr>
+              <a:t>reálný</a:t>
+            </a:r>
+            <a:r>
+              <a:rPr lang="en-US">
+                <a:ea typeface="+mn-lt"/>
+                <a:cs typeface="+mn-lt"/>
+              </a:rPr>
+              <a:t> </a:t>
+            </a:r>
+            <a:r>
+              <a:rPr lang="en-US" err="1">
+                <a:ea typeface="+mn-lt"/>
+                <a:cs typeface="+mn-lt"/>
+              </a:rPr>
+              <a:t>vývoj</a:t>
+            </a:r>
+            <a:r>
+              <a:rPr lang="en-US">
+                <a:ea typeface="+mn-lt"/>
+                <a:cs typeface="+mn-lt"/>
+              </a:rPr>
+              <a:t>.</a:t>
+            </a:r>
+            <a:endParaRPr lang="en-US"/>
+          </a:p>
+          <a:p>
+            <a:pPr marL="285750" indent="-285750">
+              <a:buFont typeface="Arial"/>
+              <a:buChar char="•"/>
+            </a:pPr>
+            <a:r>
+              <a:rPr lang="en-US">
+                <a:ea typeface="+mn-lt"/>
+                <a:cs typeface="+mn-lt"/>
+              </a:rPr>
+              <a:t>U </a:t>
+            </a:r>
+            <a:r>
+              <a:rPr lang="en-US" b="1">
+                <a:ea typeface="+mn-lt"/>
+                <a:cs typeface="+mn-lt"/>
+              </a:rPr>
+              <a:t>CZV</a:t>
+            </a:r>
+            <a:r>
+              <a:rPr lang="en-US">
+                <a:ea typeface="+mn-lt"/>
+                <a:cs typeface="+mn-lt"/>
+              </a:rPr>
+              <a:t> </a:t>
+            </a:r>
+            <a:r>
+              <a:rPr lang="en-US" err="1">
+                <a:ea typeface="+mn-lt"/>
+                <a:cs typeface="+mn-lt"/>
+              </a:rPr>
+              <a:t>přetrvává</a:t>
+            </a:r>
+            <a:r>
+              <a:rPr lang="en-US">
+                <a:ea typeface="+mn-lt"/>
+                <a:cs typeface="+mn-lt"/>
+              </a:rPr>
+              <a:t> </a:t>
+            </a:r>
+            <a:r>
+              <a:rPr lang="en-US" err="1">
+                <a:ea typeface="+mn-lt"/>
+                <a:cs typeface="+mn-lt"/>
+              </a:rPr>
+              <a:t>vyšší</a:t>
+            </a:r>
+            <a:r>
+              <a:rPr lang="en-US">
+                <a:ea typeface="+mn-lt"/>
+                <a:cs typeface="+mn-lt"/>
+              </a:rPr>
+              <a:t> </a:t>
+            </a:r>
+            <a:r>
+              <a:rPr lang="en-US" err="1">
+                <a:ea typeface="+mn-lt"/>
+                <a:cs typeface="+mn-lt"/>
+              </a:rPr>
+              <a:t>volatilita</a:t>
+            </a:r>
+            <a:r>
+              <a:rPr lang="en-US">
+                <a:ea typeface="+mn-lt"/>
+                <a:cs typeface="+mn-lt"/>
+              </a:rPr>
+              <a:t>, ale </a:t>
+            </a:r>
+            <a:r>
+              <a:rPr lang="en-US" err="1">
+                <a:ea typeface="+mn-lt"/>
+                <a:cs typeface="+mn-lt"/>
+              </a:rPr>
+              <a:t>část</a:t>
+            </a:r>
+            <a:r>
+              <a:rPr lang="en-US">
+                <a:ea typeface="+mn-lt"/>
+                <a:cs typeface="+mn-lt"/>
+              </a:rPr>
+              <a:t> </a:t>
+            </a:r>
+            <a:r>
+              <a:rPr lang="en-US" err="1">
+                <a:ea typeface="+mn-lt"/>
+                <a:cs typeface="+mn-lt"/>
+              </a:rPr>
+              <a:t>růstu</a:t>
+            </a:r>
+            <a:r>
+              <a:rPr lang="en-US">
+                <a:ea typeface="+mn-lt"/>
+                <a:cs typeface="+mn-lt"/>
+              </a:rPr>
+              <a:t> </a:t>
+            </a:r>
+            <a:r>
+              <a:rPr lang="en-US" err="1">
+                <a:ea typeface="+mn-lt"/>
+                <a:cs typeface="+mn-lt"/>
+              </a:rPr>
+              <a:t>byla</a:t>
+            </a:r>
+            <a:r>
+              <a:rPr lang="en-US">
+                <a:ea typeface="+mn-lt"/>
+                <a:cs typeface="+mn-lt"/>
+              </a:rPr>
+              <a:t> </a:t>
+            </a:r>
+            <a:r>
+              <a:rPr lang="en-US" err="1">
+                <a:ea typeface="+mn-lt"/>
+                <a:cs typeface="+mn-lt"/>
+              </a:rPr>
+              <a:t>způsobena</a:t>
+            </a:r>
+            <a:r>
+              <a:rPr lang="en-US">
+                <a:ea typeface="+mn-lt"/>
+                <a:cs typeface="+mn-lt"/>
+              </a:rPr>
+              <a:t> </a:t>
+            </a:r>
+            <a:r>
+              <a:rPr lang="en-US" err="1">
+                <a:ea typeface="+mn-lt"/>
+                <a:cs typeface="+mn-lt"/>
+              </a:rPr>
+              <a:t>obecnou</a:t>
+            </a:r>
+            <a:r>
+              <a:rPr lang="en-US">
+                <a:ea typeface="+mn-lt"/>
+                <a:cs typeface="+mn-lt"/>
+              </a:rPr>
+              <a:t> </a:t>
+            </a:r>
+            <a:r>
+              <a:rPr lang="en-US" err="1">
+                <a:ea typeface="+mn-lt"/>
+                <a:cs typeface="+mn-lt"/>
+              </a:rPr>
+              <a:t>inflací</a:t>
+            </a:r>
+            <a:r>
+              <a:rPr lang="en-US">
+                <a:ea typeface="+mn-lt"/>
+                <a:cs typeface="+mn-lt"/>
+              </a:rPr>
+              <a:t>.</a:t>
+            </a:r>
+            <a:endParaRPr lang="en-US"/>
+          </a:p>
+          <a:p>
+            <a:endParaRPr lang="en-US">
+              <a:cs typeface="Arial"/>
+            </a:endParaRPr>
+          </a:p>
+        </p:txBody>
+      </p:sp>
+      <p:sp>
+        <p:nvSpPr>
+          <p:cNvPr id="3" name="Text Placeholder 2">
+            <a:extLst>
+              <a:ext uri="{FF2B5EF4-FFF2-40B4-BE49-F238E27FC236}">
+                <a16:creationId xmlns:a16="http://schemas.microsoft.com/office/drawing/2014/main" id="{CB489C35-9018-D4C6-F16F-7426926DFB3C}"/>
+              </a:ext>
+            </a:extLst>
+          </p:cNvPr>
+          <p:cNvSpPr>
+            <a:spLocks noGrp="1"/>
+          </p:cNvSpPr>
+          <p:nvPr>
+            <p:ph type="body" sz="quarter" idx="14"/>
+          </p:nvPr>
+        </p:nvSpPr>
+        <p:spPr/>
+        <p:txBody>
+          <a:bodyPr lIns="0" tIns="0" rIns="0" bIns="0" anchor="t"/>
+          <a:lstStyle/>
+          <a:p>
+            <a:r>
+              <a:rPr lang="en-US">
+                <a:ea typeface="+mn-lt"/>
+                <a:cs typeface="+mn-lt"/>
+              </a:rPr>
+              <a:t>3) Po </a:t>
+            </a:r>
+            <a:r>
+              <a:rPr lang="en-US" err="1">
+                <a:ea typeface="+mn-lt"/>
+                <a:cs typeface="+mn-lt"/>
+              </a:rPr>
+              <a:t>očištění</a:t>
+            </a:r>
+            <a:r>
+              <a:rPr lang="en-US">
+                <a:ea typeface="+mn-lt"/>
+                <a:cs typeface="+mn-lt"/>
+              </a:rPr>
+              <a:t> o </a:t>
+            </a:r>
+            <a:r>
+              <a:rPr lang="en-US" err="1">
+                <a:ea typeface="+mn-lt"/>
+                <a:cs typeface="+mn-lt"/>
+              </a:rPr>
+              <a:t>inflaci</a:t>
+            </a:r>
+            <a:r>
+              <a:rPr lang="en-US">
+                <a:ea typeface="+mn-lt"/>
+                <a:cs typeface="+mn-lt"/>
+              </a:rPr>
+              <a:t> je </a:t>
+            </a:r>
+            <a:r>
+              <a:rPr lang="en-US" err="1">
+                <a:ea typeface="+mn-lt"/>
+                <a:cs typeface="+mn-lt"/>
+              </a:rPr>
+              <a:t>růst</a:t>
+            </a:r>
+            <a:r>
+              <a:rPr lang="en-US">
+                <a:ea typeface="+mn-lt"/>
+                <a:cs typeface="+mn-lt"/>
+              </a:rPr>
+              <a:t> </a:t>
+            </a:r>
+            <a:r>
+              <a:rPr lang="en-US" err="1">
+                <a:ea typeface="+mn-lt"/>
+                <a:cs typeface="+mn-lt"/>
+              </a:rPr>
+              <a:t>cen</a:t>
+            </a:r>
+            <a:r>
+              <a:rPr lang="en-US">
+                <a:ea typeface="+mn-lt"/>
+                <a:cs typeface="+mn-lt"/>
+              </a:rPr>
+              <a:t> </a:t>
+            </a:r>
+            <a:r>
+              <a:rPr lang="en-US" err="1">
+                <a:ea typeface="+mn-lt"/>
+                <a:cs typeface="+mn-lt"/>
+              </a:rPr>
+              <a:t>výrazně</a:t>
+            </a:r>
+            <a:r>
+              <a:rPr lang="en-US">
+                <a:ea typeface="+mn-lt"/>
+                <a:cs typeface="+mn-lt"/>
+              </a:rPr>
+              <a:t> </a:t>
+            </a:r>
+            <a:r>
+              <a:rPr lang="en-US" err="1">
+                <a:ea typeface="+mn-lt"/>
+                <a:cs typeface="+mn-lt"/>
+              </a:rPr>
+              <a:t>mírnější</a:t>
+            </a:r>
+            <a:endParaRPr lang="en-US" err="1"/>
+          </a:p>
+        </p:txBody>
+      </p:sp>
+      <p:pic>
+        <p:nvPicPr>
+          <p:cNvPr id="5" name="Content Placeholder 4">
+            <a:extLst>
+              <a:ext uri="{FF2B5EF4-FFF2-40B4-BE49-F238E27FC236}">
+                <a16:creationId xmlns:a16="http://schemas.microsoft.com/office/drawing/2014/main" id="{B639FEA3-4C79-C570-1557-30E75909B85C}"/>
+              </a:ext>
+            </a:extLst>
+          </p:cNvPr>
+          <p:cNvPicPr>
+            <a:picLocks noGrp="1" noChangeAspect="1"/>
+          </p:cNvPicPr>
+          <p:nvPr>
+            <p:ph sz="half" idx="15"/>
+          </p:nvPr>
+        </p:nvPicPr>
+        <p:blipFill>
+          <a:blip r:embed="rId2"/>
+          <a:stretch>
+            <a:fillRect/>
+          </a:stretch>
+        </p:blipFill>
+        <p:spPr>
+          <a:xfrm>
+            <a:off x="6351847" y="3347034"/>
+            <a:ext cx="5362577" cy="2396235"/>
+          </a:xfrm>
+          <a:prstGeom prst="rect">
+            <a:avLst/>
+          </a:prstGeom>
+        </p:spPr>
+      </p:pic>
+      <p:pic>
+        <p:nvPicPr>
+          <p:cNvPr id="7" name="Content Placeholder 4">
+            <a:extLst>
+              <a:ext uri="{FF2B5EF4-FFF2-40B4-BE49-F238E27FC236}">
+                <a16:creationId xmlns:a16="http://schemas.microsoft.com/office/drawing/2014/main" id="{B8BACDE5-A0A2-D819-2E51-444B19158FF4}"/>
+              </a:ext>
+            </a:extLst>
+          </p:cNvPr>
+          <p:cNvPicPr>
+            <a:picLocks noChangeAspect="1"/>
+          </p:cNvPicPr>
+          <p:nvPr/>
+        </p:nvPicPr>
+        <p:blipFill>
+          <a:blip r:embed="rId3"/>
+          <a:srcRect l="70" t="-263" b="9473"/>
+          <a:stretch>
+            <a:fillRect/>
+          </a:stretch>
+        </p:blipFill>
+        <p:spPr>
+          <a:xfrm>
+            <a:off x="6355584" y="1040963"/>
+            <a:ext cx="5358840" cy="2304950"/>
+          </a:xfrm>
+          <a:prstGeom prst="rect">
+            <a:avLst/>
+          </a:prstGeom>
+        </p:spPr>
+      </p:pic>
+    </p:spTree>
+    <p:extLst>
+      <p:ext uri="{BB962C8B-B14F-4D97-AF65-F5344CB8AC3E}">
+        <p14:creationId xmlns:p14="http://schemas.microsoft.com/office/powerpoint/2010/main" val="772860038"/>
+      </p:ext>
+    </p:extLst>
+  </p:cSld>
+  <p:clrMapOvr>
+    <a:masterClrMapping/>
+  </p:clrMapOvr>
+</p:sld>
+</file>
+
+<file path=ppt/slides/slide11.xml><?xml version="1.0" encoding="utf-8"?>
+<p:sld xmlns:a="http://schemas.openxmlformats.org/drawingml/2006/main" xmlns:r="http://schemas.openxmlformats.org/officeDocument/2006/relationships" xmlns:p="http://schemas.openxmlformats.org/presentationml/2006/main">
+  <p:cSld>
+    <p:spTree>
+      <p:nvGrpSpPr>
+        <p:cNvPr id="1" name="">
+          <a:extLst>
+            <a:ext uri="{FF2B5EF4-FFF2-40B4-BE49-F238E27FC236}">
+              <a16:creationId xmlns:a16="http://schemas.microsoft.com/office/drawing/2014/main" id="{A5DEB00E-029F-6F38-CE98-3969EBD6D16B}"/>
+            </a:ext>
+          </a:extLst>
+        </p:cNvPr>
+        <p:cNvGrpSpPr/>
+        <p:nvPr/>
+      </p:nvGrpSpPr>
+      <p:grpSpPr>
+        <a:xfrm>
+          <a:off x="0" y="0"/>
+          <a:ext cx="0" cy="0"/>
+          <a:chOff x="0" y="0"/>
+          <a:chExt cx="0" cy="0"/>
+        </a:xfrm>
+      </p:grpSpPr>
+      <p:sp>
+        <p:nvSpPr>
+          <p:cNvPr id="3" name="Text Placeholder 2">
+            <a:extLst>
+              <a:ext uri="{FF2B5EF4-FFF2-40B4-BE49-F238E27FC236}">
+                <a16:creationId xmlns:a16="http://schemas.microsoft.com/office/drawing/2014/main" id="{987C3685-7999-4ED5-F2F6-3D35CA45B963}"/>
+              </a:ext>
+            </a:extLst>
+          </p:cNvPr>
+          <p:cNvSpPr>
+            <a:spLocks noGrp="1"/>
+          </p:cNvSpPr>
+          <p:nvPr>
+            <p:ph type="body" sz="quarter" idx="14"/>
+          </p:nvPr>
+        </p:nvSpPr>
+        <p:spPr/>
+        <p:txBody>
+          <a:bodyPr lIns="0" tIns="0" rIns="0" bIns="0" anchor="t"/>
+          <a:lstStyle/>
+          <a:p>
+            <a:r>
+              <a:rPr lang="en-US">
+                <a:ea typeface="+mn-lt"/>
+                <a:cs typeface="+mn-lt"/>
+              </a:rPr>
+              <a:t>3) Po </a:t>
+            </a:r>
+            <a:r>
+              <a:rPr lang="en-US" err="1">
+                <a:ea typeface="+mn-lt"/>
+                <a:cs typeface="+mn-lt"/>
+              </a:rPr>
+              <a:t>očištění</a:t>
+            </a:r>
+            <a:r>
+              <a:rPr lang="en-US">
+                <a:ea typeface="+mn-lt"/>
+                <a:cs typeface="+mn-lt"/>
+              </a:rPr>
+              <a:t> o </a:t>
+            </a:r>
+            <a:r>
+              <a:rPr lang="en-US" err="1">
+                <a:ea typeface="+mn-lt"/>
+                <a:cs typeface="+mn-lt"/>
+              </a:rPr>
+              <a:t>inflaci</a:t>
+            </a:r>
+            <a:r>
+              <a:rPr lang="en-US">
+                <a:ea typeface="+mn-lt"/>
+                <a:cs typeface="+mn-lt"/>
+              </a:rPr>
+              <a:t> je </a:t>
+            </a:r>
+            <a:r>
+              <a:rPr lang="en-US" err="1">
+                <a:ea typeface="+mn-lt"/>
+                <a:cs typeface="+mn-lt"/>
+              </a:rPr>
+              <a:t>růst</a:t>
+            </a:r>
+            <a:r>
+              <a:rPr lang="en-US">
+                <a:ea typeface="+mn-lt"/>
+                <a:cs typeface="+mn-lt"/>
+              </a:rPr>
+              <a:t> </a:t>
+            </a:r>
+            <a:r>
+              <a:rPr lang="en-US" err="1">
+                <a:ea typeface="+mn-lt"/>
+                <a:cs typeface="+mn-lt"/>
+              </a:rPr>
+              <a:t>cen</a:t>
+            </a:r>
+            <a:r>
+              <a:rPr lang="en-US">
+                <a:ea typeface="+mn-lt"/>
+                <a:cs typeface="+mn-lt"/>
+              </a:rPr>
+              <a:t> </a:t>
+            </a:r>
+            <a:r>
+              <a:rPr lang="en-US" err="1">
+                <a:ea typeface="+mn-lt"/>
+                <a:cs typeface="+mn-lt"/>
+              </a:rPr>
+              <a:t>výrazně</a:t>
+            </a:r>
+            <a:r>
+              <a:rPr lang="en-US">
+                <a:ea typeface="+mn-lt"/>
+                <a:cs typeface="+mn-lt"/>
+              </a:rPr>
+              <a:t> </a:t>
+            </a:r>
+            <a:r>
+              <a:rPr lang="en-US" err="1">
+                <a:ea typeface="+mn-lt"/>
+                <a:cs typeface="+mn-lt"/>
+              </a:rPr>
+              <a:t>mírnější</a:t>
+            </a:r>
+            <a:endParaRPr lang="en-US" err="1"/>
+          </a:p>
+        </p:txBody>
+      </p:sp>
+      <p:pic>
+        <p:nvPicPr>
+          <p:cNvPr id="5" name="Content Placeholder 4">
+            <a:extLst>
+              <a:ext uri="{FF2B5EF4-FFF2-40B4-BE49-F238E27FC236}">
+                <a16:creationId xmlns:a16="http://schemas.microsoft.com/office/drawing/2014/main" id="{CD5F7F16-FFEA-3F98-13EC-C7DF4719705E}"/>
+              </a:ext>
+            </a:extLst>
+          </p:cNvPr>
+          <p:cNvPicPr>
+            <a:picLocks noGrp="1" noChangeAspect="1"/>
+          </p:cNvPicPr>
+          <p:nvPr>
+            <p:ph sz="half" idx="15"/>
+          </p:nvPr>
+        </p:nvPicPr>
+        <p:blipFill>
+          <a:blip r:embed="rId2"/>
+          <a:stretch>
+            <a:fillRect/>
+          </a:stretch>
+        </p:blipFill>
+        <p:spPr>
+          <a:xfrm>
+            <a:off x="1291353" y="1354948"/>
+            <a:ext cx="10084219" cy="4506072"/>
+          </a:xfrm>
+          <a:prstGeom prst="rect">
+            <a:avLst/>
+          </a:prstGeom>
+        </p:spPr>
+      </p:pic>
+    </p:spTree>
+    <p:extLst>
+      <p:ext uri="{BB962C8B-B14F-4D97-AF65-F5344CB8AC3E}">
+        <p14:creationId xmlns:p14="http://schemas.microsoft.com/office/powerpoint/2010/main" val="3895229665"/>
+      </p:ext>
+    </p:extLst>
+  </p:cSld>
+  <p:clrMapOvr>
+    <a:masterClrMapping/>
+  </p:clrMapOvr>
+</p:sld>
+</file>
+
+<file path=ppt/slides/slide12.xml><?xml version="1.0" encoding="utf-8"?>
+<p:sld xmlns:a="http://schemas.openxmlformats.org/drawingml/2006/main" xmlns:r="http://schemas.openxmlformats.org/officeDocument/2006/relationships" xmlns:p="http://schemas.openxmlformats.org/presentationml/2006/main">
+  <p:cSld>
+    <p:spTree>
+      <p:nvGrpSpPr>
+        <p:cNvPr id="1" name="">
+          <a:extLst>
+            <a:ext uri="{FF2B5EF4-FFF2-40B4-BE49-F238E27FC236}">
+              <a16:creationId xmlns:a16="http://schemas.microsoft.com/office/drawing/2014/main" id="{541B82CE-90AE-4FB0-A8E0-C8E5412E87BD}"/>
+            </a:ext>
+          </a:extLst>
+        </p:cNvPr>
+        <p:cNvGrpSpPr/>
+        <p:nvPr/>
+      </p:nvGrpSpPr>
+      <p:grpSpPr>
+        <a:xfrm>
+          <a:off x="0" y="0"/>
+          <a:ext cx="0" cy="0"/>
+          <a:chOff x="0" y="0"/>
+          <a:chExt cx="0" cy="0"/>
+        </a:xfrm>
+      </p:grpSpPr>
+      <p:sp>
+        <p:nvSpPr>
+          <p:cNvPr id="3" name="Text Placeholder 2">
+            <a:extLst>
+              <a:ext uri="{FF2B5EF4-FFF2-40B4-BE49-F238E27FC236}">
+                <a16:creationId xmlns:a16="http://schemas.microsoft.com/office/drawing/2014/main" id="{A7135CF8-A6B6-2749-B304-E15656712D16}"/>
+              </a:ext>
+            </a:extLst>
+          </p:cNvPr>
+          <p:cNvSpPr>
+            <a:spLocks noGrp="1"/>
+          </p:cNvSpPr>
+          <p:nvPr>
+            <p:ph type="body" sz="quarter" idx="14"/>
+          </p:nvPr>
+        </p:nvSpPr>
+        <p:spPr/>
+        <p:txBody>
+          <a:bodyPr lIns="0" tIns="0" rIns="0" bIns="0" anchor="t"/>
+          <a:lstStyle/>
+          <a:p>
+            <a:r>
+              <a:rPr lang="en-US">
+                <a:ea typeface="+mn-lt"/>
+                <a:cs typeface="+mn-lt"/>
+              </a:rPr>
+              <a:t>3) Po </a:t>
+            </a:r>
+            <a:r>
+              <a:rPr lang="en-US" err="1">
+                <a:ea typeface="+mn-lt"/>
+                <a:cs typeface="+mn-lt"/>
+              </a:rPr>
+              <a:t>očištění</a:t>
+            </a:r>
+            <a:r>
+              <a:rPr lang="en-US">
+                <a:ea typeface="+mn-lt"/>
+                <a:cs typeface="+mn-lt"/>
+              </a:rPr>
+              <a:t> o </a:t>
+            </a:r>
+            <a:r>
+              <a:rPr lang="en-US" err="1">
+                <a:ea typeface="+mn-lt"/>
+                <a:cs typeface="+mn-lt"/>
+              </a:rPr>
+              <a:t>inflaci</a:t>
+            </a:r>
+            <a:r>
+              <a:rPr lang="en-US">
+                <a:ea typeface="+mn-lt"/>
+                <a:cs typeface="+mn-lt"/>
+              </a:rPr>
+              <a:t> je </a:t>
+            </a:r>
+            <a:r>
+              <a:rPr lang="en-US" err="1">
+                <a:ea typeface="+mn-lt"/>
+                <a:cs typeface="+mn-lt"/>
+              </a:rPr>
+              <a:t>růst</a:t>
+            </a:r>
+            <a:r>
+              <a:rPr lang="en-US">
+                <a:ea typeface="+mn-lt"/>
+                <a:cs typeface="+mn-lt"/>
+              </a:rPr>
+              <a:t> </a:t>
+            </a:r>
+            <a:r>
+              <a:rPr lang="en-US" err="1">
+                <a:ea typeface="+mn-lt"/>
+                <a:cs typeface="+mn-lt"/>
+              </a:rPr>
+              <a:t>cen</a:t>
+            </a:r>
+            <a:r>
+              <a:rPr lang="en-US">
+                <a:ea typeface="+mn-lt"/>
+                <a:cs typeface="+mn-lt"/>
+              </a:rPr>
+              <a:t> </a:t>
+            </a:r>
+            <a:r>
+              <a:rPr lang="en-US" err="1">
+                <a:ea typeface="+mn-lt"/>
+                <a:cs typeface="+mn-lt"/>
+              </a:rPr>
+              <a:t>výrazně</a:t>
+            </a:r>
+            <a:r>
+              <a:rPr lang="en-US">
+                <a:ea typeface="+mn-lt"/>
+                <a:cs typeface="+mn-lt"/>
+              </a:rPr>
+              <a:t> </a:t>
+            </a:r>
+            <a:r>
+              <a:rPr lang="en-US" err="1">
+                <a:ea typeface="+mn-lt"/>
+                <a:cs typeface="+mn-lt"/>
+              </a:rPr>
+              <a:t>mírnější</a:t>
+            </a:r>
+            <a:endParaRPr lang="en-US" err="1"/>
+          </a:p>
+        </p:txBody>
+      </p:sp>
+      <p:pic>
+        <p:nvPicPr>
+          <p:cNvPr id="5" name="Content Placeholder 4">
+            <a:extLst>
+              <a:ext uri="{FF2B5EF4-FFF2-40B4-BE49-F238E27FC236}">
+                <a16:creationId xmlns:a16="http://schemas.microsoft.com/office/drawing/2014/main" id="{66F39A5A-8688-74A0-6C08-BD80E7E20D64}"/>
+              </a:ext>
+            </a:extLst>
+          </p:cNvPr>
+          <p:cNvPicPr>
+            <a:picLocks noGrp="1" noChangeAspect="1"/>
+          </p:cNvPicPr>
+          <p:nvPr>
+            <p:ph sz="half" idx="15"/>
+          </p:nvPr>
+        </p:nvPicPr>
+        <p:blipFill>
+          <a:blip r:embed="rId2"/>
+          <a:stretch>
+            <a:fillRect/>
+          </a:stretch>
+        </p:blipFill>
+        <p:spPr>
+          <a:xfrm>
+            <a:off x="757952" y="3259948"/>
+            <a:ext cx="10934700" cy="4886104"/>
+          </a:xfrm>
+          <a:prstGeom prst="rect">
+            <a:avLst/>
+          </a:prstGeom>
+        </p:spPr>
+      </p:pic>
+      <p:pic>
+        <p:nvPicPr>
+          <p:cNvPr id="7" name="Content Placeholder 4">
+            <a:extLst>
+              <a:ext uri="{FF2B5EF4-FFF2-40B4-BE49-F238E27FC236}">
+                <a16:creationId xmlns:a16="http://schemas.microsoft.com/office/drawing/2014/main" id="{57A2F84F-79B8-83FB-5BD2-B8B797E68AC1}"/>
+              </a:ext>
+            </a:extLst>
+          </p:cNvPr>
+          <p:cNvPicPr>
+            <a:picLocks noChangeAspect="1"/>
+          </p:cNvPicPr>
+          <p:nvPr/>
+        </p:nvPicPr>
+        <p:blipFill>
+          <a:blip r:embed="rId3"/>
+          <a:srcRect l="70" t="-264" b="29320"/>
+          <a:stretch>
+            <a:fillRect/>
+          </a:stretch>
+        </p:blipFill>
+        <p:spPr>
+          <a:xfrm>
+            <a:off x="757952" y="-412604"/>
+            <a:ext cx="10927080" cy="3672552"/>
+          </a:xfrm>
+          <a:prstGeom prst="rect">
+            <a:avLst/>
+          </a:prstGeom>
+        </p:spPr>
+      </p:pic>
+    </p:spTree>
+    <p:extLst>
+      <p:ext uri="{BB962C8B-B14F-4D97-AF65-F5344CB8AC3E}">
+        <p14:creationId xmlns:p14="http://schemas.microsoft.com/office/powerpoint/2010/main" val="1932078718"/>
+      </p:ext>
+    </p:extLst>
+  </p:cSld>
+  <p:clrMapOvr>
+    <a:masterClrMapping/>
+  </p:clrMapOvr>
+</p:sld>
+</file>
+
+<file path=ppt/slides/slide13.xml><?xml version="1.0" encoding="utf-8"?>
+<p:sld xmlns:a="http://schemas.openxmlformats.org/drawingml/2006/main" xmlns:r="http://schemas.openxmlformats.org/officeDocument/2006/relationships" xmlns:p="http://schemas.openxmlformats.org/presentationml/2006/main">
+  <p:cSld>
+    <p:spTree>
+      <p:nvGrpSpPr>
+        <p:cNvPr id="1" name=""/>
+        <p:cNvGrpSpPr/>
+        <p:nvPr/>
+      </p:nvGrpSpPr>
+      <p:grpSpPr>
+        <a:xfrm>
+          <a:off x="0" y="0"/>
+          <a:ext cx="0" cy="0"/>
+          <a:chOff x="0" y="0"/>
+          <a:chExt cx="0" cy="0"/>
+        </a:xfrm>
+      </p:grpSpPr>
       <p:pic>
         <p:nvPicPr>
           <p:cNvPr id="5" name="Content Placeholder 4" descr="A graph with blue and orange lines&#10;&#10;AI-generated content may be incorrect.">
@@ -7787,7 +9060,7 @@
 </p:sld>
 </file>
 
-<file path=ppt/slides/slide11.xml><?xml version="1.0" encoding="utf-8"?>
+<file path=ppt/slides/slide14.xml><?xml version="1.0" encoding="utf-8"?>
 <p:sld xmlns:a="http://schemas.openxmlformats.org/drawingml/2006/main" xmlns:r="http://schemas.openxmlformats.org/officeDocument/2006/relationships" xmlns:p="http://schemas.openxmlformats.org/presentationml/2006/main">
   <p:cSld>
     <p:spTree>
@@ -8094,7 +9367,7 @@
 </p:sld>
 </file>
 
-<file path=ppt/slides/slide12.xml><?xml version="1.0" encoding="utf-8"?>
+<file path=ppt/slides/slide15.xml><?xml version="1.0" encoding="utf-8"?>
 <p:sld xmlns:a="http://schemas.openxmlformats.org/drawingml/2006/main" xmlns:r="http://schemas.openxmlformats.org/officeDocument/2006/relationships" xmlns:p="http://schemas.openxmlformats.org/presentationml/2006/main">
   <p:cSld>
     <p:spTree>
@@ -8419,7 +9692,7 @@
 </p:sld>
 </file>
 
-<file path=ppt/slides/slide13.xml><?xml version="1.0" encoding="utf-8"?>
+<file path=ppt/slides/slide16.xml><?xml version="1.0" encoding="utf-8"?>
 <p:sld xmlns:a="http://schemas.openxmlformats.org/drawingml/2006/main" xmlns:r="http://schemas.openxmlformats.org/officeDocument/2006/relationships" xmlns:p="http://schemas.openxmlformats.org/presentationml/2006/main">
   <p:cSld>
     <p:spTree>
@@ -9148,7 +10421,7 @@
 </p:sld>
 </file>
 
-<file path=ppt/slides/slide14.xml><?xml version="1.0" encoding="utf-8"?>
+<file path=ppt/slides/slide17.xml><?xml version="1.0" encoding="utf-8"?>
 <p:sld xmlns:a="http://schemas.openxmlformats.org/drawingml/2006/main" xmlns:r="http://schemas.openxmlformats.org/officeDocument/2006/relationships" xmlns:p="http://schemas.openxmlformats.org/presentationml/2006/main">
   <p:cSld>
     <p:spTree>
@@ -9920,7 +11193,7 @@
 </p:sld>
 </file>
 
-<file path=ppt/slides/slide15.xml><?xml version="1.0" encoding="utf-8"?>
+<file path=ppt/slides/slide18.xml><?xml version="1.0" encoding="utf-8"?>
 <p:sld xmlns:a="http://schemas.openxmlformats.org/drawingml/2006/main" xmlns:r="http://schemas.openxmlformats.org/officeDocument/2006/relationships" xmlns:p="http://schemas.openxmlformats.org/presentationml/2006/main">
   <p:cSld>
     <p:spTree>
@@ -10863,7 +12136,7 @@
 </p:sld>
 </file>
 
-<file path=ppt/slides/slide16.xml><?xml version="1.0" encoding="utf-8"?>
+<file path=ppt/slides/slide19.xml><?xml version="1.0" encoding="utf-8"?>
 <p:sld xmlns:a="http://schemas.openxmlformats.org/drawingml/2006/main" xmlns:r="http://schemas.openxmlformats.org/officeDocument/2006/relationships" xmlns:p="http://schemas.openxmlformats.org/presentationml/2006/main">
   <p:cSld>
     <p:spTree>
@@ -11669,1036 +12942,6 @@
     <p:extLst>
       <p:ext uri="{BB962C8B-B14F-4D97-AF65-F5344CB8AC3E}">
         <p14:creationId xmlns:p14="http://schemas.microsoft.com/office/powerpoint/2010/main" val="116746634"/>
-      </p:ext>
-    </p:extLst>
-  </p:cSld>
-  <p:clrMapOvr>
-    <a:masterClrMapping/>
-  </p:clrMapOvr>
-</p:sld>
-</file>
-
-<file path=ppt/slides/slide17.xml><?xml version="1.0" encoding="utf-8"?>
-<p:sld xmlns:a="http://schemas.openxmlformats.org/drawingml/2006/main" xmlns:r="http://schemas.openxmlformats.org/officeDocument/2006/relationships" xmlns:p="http://schemas.openxmlformats.org/presentationml/2006/main">
-  <p:cSld>
-    <p:spTree>
-      <p:nvGrpSpPr>
-        <p:cNvPr id="1" name=""/>
-        <p:cNvGrpSpPr/>
-        <p:nvPr/>
-      </p:nvGrpSpPr>
-      <p:grpSpPr>
-        <a:xfrm>
-          <a:off x="0" y="0"/>
-          <a:ext cx="0" cy="0"/>
-          <a:chOff x="0" y="0"/>
-          <a:chExt cx="0" cy="0"/>
-        </a:xfrm>
-      </p:grpSpPr>
-      <p:sp>
-        <p:nvSpPr>
-          <p:cNvPr id="3" name="Text Placeholder 2">
-            <a:extLst>
-              <a:ext uri="{FF2B5EF4-FFF2-40B4-BE49-F238E27FC236}">
-                <a16:creationId xmlns:a16="http://schemas.microsoft.com/office/drawing/2014/main" id="{4BC72877-9187-F663-6F21-84A4494EB104}"/>
-              </a:ext>
-            </a:extLst>
-          </p:cNvPr>
-          <p:cNvSpPr>
-            <a:spLocks noGrp="1"/>
-          </p:cNvSpPr>
-          <p:nvPr>
-            <p:ph type="body" sz="quarter" idx="14"/>
-          </p:nvPr>
-        </p:nvSpPr>
-        <p:spPr/>
-        <p:txBody>
-          <a:bodyPr lIns="0" tIns="0" rIns="0" bIns="0" anchor="t"/>
-          <a:lstStyle/>
-          <a:p>
-            <a:r>
-              <a:rPr lang="en-US">
-                <a:cs typeface="Arial"/>
-              </a:rPr>
-              <a:t>6) </a:t>
-            </a:r>
-            <a:r>
-              <a:rPr lang="en-US" err="1">
-                <a:cs typeface="Arial"/>
-              </a:rPr>
-              <a:t>Přenos</a:t>
-            </a:r>
-            <a:r>
-              <a:rPr lang="en-US">
-                <a:cs typeface="Arial"/>
-              </a:rPr>
-              <a:t> </a:t>
-            </a:r>
-            <a:r>
-              <a:rPr lang="en-US" err="1">
-                <a:cs typeface="Arial"/>
-              </a:rPr>
-              <a:t>cen</a:t>
-            </a:r>
-            <a:r>
-              <a:rPr lang="en-US">
-                <a:cs typeface="Arial"/>
-              </a:rPr>
-              <a:t> je </a:t>
-            </a:r>
-            <a:r>
-              <a:rPr lang="en-US" err="1">
-                <a:cs typeface="Arial"/>
-              </a:rPr>
-              <a:t>časově</a:t>
-            </a:r>
-            <a:r>
-              <a:rPr lang="en-US">
-                <a:cs typeface="Arial"/>
-              </a:rPr>
-              <a:t> </a:t>
-            </a:r>
-            <a:r>
-              <a:rPr lang="en-US" err="1">
-                <a:cs typeface="Arial"/>
-              </a:rPr>
-              <a:t>zpožděný</a:t>
-            </a:r>
-            <a:r>
-              <a:rPr lang="en-US">
-                <a:cs typeface="Arial"/>
-              </a:rPr>
-              <a:t> a </a:t>
-            </a:r>
-            <a:r>
-              <a:rPr lang="en-US" err="1">
-                <a:cs typeface="Arial"/>
-              </a:rPr>
-              <a:t>liší</a:t>
-            </a:r>
-            <a:r>
-              <a:rPr lang="en-US">
-                <a:cs typeface="Arial"/>
-              </a:rPr>
-              <a:t> se </a:t>
-            </a:r>
-            <a:r>
-              <a:rPr lang="en-US" err="1">
-                <a:cs typeface="Arial"/>
-              </a:rPr>
-              <a:t>podle</a:t>
-            </a:r>
-            <a:r>
-              <a:rPr lang="en-US">
-                <a:cs typeface="Arial"/>
-              </a:rPr>
-              <a:t> </a:t>
-            </a:r>
-            <a:r>
-              <a:rPr lang="en-US" err="1">
-                <a:cs typeface="Arial"/>
-              </a:rPr>
-              <a:t>článků</a:t>
-            </a:r>
-            <a:r>
-              <a:rPr lang="en-US">
-                <a:cs typeface="Arial"/>
-              </a:rPr>
-              <a:t> </a:t>
-            </a:r>
-            <a:r>
-              <a:rPr lang="en-US" err="1">
-                <a:cs typeface="Arial"/>
-              </a:rPr>
-              <a:t>vertikály</a:t>
-            </a:r>
-            <a:endParaRPr lang="en-US" b="0" err="1">
-              <a:cs typeface="Arial"/>
-            </a:endParaRPr>
-          </a:p>
-          <a:p>
-            <a:endParaRPr lang="en-US">
-              <a:cs typeface="Arial"/>
-            </a:endParaRPr>
-          </a:p>
-        </p:txBody>
-      </p:sp>
-      <p:pic>
-        <p:nvPicPr>
-          <p:cNvPr id="5" name="Picture 4">
-            <a:extLst>
-              <a:ext uri="{FF2B5EF4-FFF2-40B4-BE49-F238E27FC236}">
-                <a16:creationId xmlns:a16="http://schemas.microsoft.com/office/drawing/2014/main" id="{6D258F36-E9F6-B2C9-73D2-8FFB9763048E}"/>
-              </a:ext>
-            </a:extLst>
-          </p:cNvPr>
-          <p:cNvPicPr>
-            <a:picLocks noChangeAspect="1"/>
-          </p:cNvPicPr>
-          <p:nvPr/>
-        </p:nvPicPr>
-        <p:blipFill>
-          <a:blip r:embed="rId2"/>
-          <a:stretch>
-            <a:fillRect/>
-          </a:stretch>
-        </p:blipFill>
-        <p:spPr>
-          <a:xfrm>
-            <a:off x="2025811" y="1710883"/>
-            <a:ext cx="6934682" cy="4304335"/>
-          </a:xfrm>
-          <a:prstGeom prst="rect">
-            <a:avLst/>
-          </a:prstGeom>
-        </p:spPr>
-      </p:pic>
-    </p:spTree>
-    <p:extLst>
-      <p:ext uri="{BB962C8B-B14F-4D97-AF65-F5344CB8AC3E}">
-        <p14:creationId xmlns:p14="http://schemas.microsoft.com/office/powerpoint/2010/main" val="3290670207"/>
-      </p:ext>
-    </p:extLst>
-  </p:cSld>
-  <p:clrMapOvr>
-    <a:masterClrMapping/>
-  </p:clrMapOvr>
-</p:sld>
-</file>
-
-<file path=ppt/slides/slide18.xml><?xml version="1.0" encoding="utf-8"?>
-<p:sld xmlns:a="http://schemas.openxmlformats.org/drawingml/2006/main" xmlns:r="http://schemas.openxmlformats.org/officeDocument/2006/relationships" xmlns:p="http://schemas.openxmlformats.org/presentationml/2006/main">
-  <p:cSld>
-    <p:spTree>
-      <p:nvGrpSpPr>
-        <p:cNvPr id="1" name=""/>
-        <p:cNvGrpSpPr/>
-        <p:nvPr/>
-      </p:nvGrpSpPr>
-      <p:grpSpPr>
-        <a:xfrm>
-          <a:off x="0" y="0"/>
-          <a:ext cx="0" cy="0"/>
-          <a:chOff x="0" y="0"/>
-          <a:chExt cx="0" cy="0"/>
-        </a:xfrm>
-      </p:grpSpPr>
-      <p:sp>
-        <p:nvSpPr>
-          <p:cNvPr id="2" name="Content Placeholder 1">
-            <a:extLst>
-              <a:ext uri="{FF2B5EF4-FFF2-40B4-BE49-F238E27FC236}">
-                <a16:creationId xmlns:a16="http://schemas.microsoft.com/office/drawing/2014/main" id="{23218BDF-5026-714D-6CF6-19FD63BD6BBA}"/>
-              </a:ext>
-            </a:extLst>
-          </p:cNvPr>
-          <p:cNvSpPr>
-            <a:spLocks noGrp="1"/>
-          </p:cNvSpPr>
-          <p:nvPr>
-            <p:ph sz="half" idx="1"/>
-          </p:nvPr>
-        </p:nvSpPr>
-        <p:spPr>
-          <a:xfrm>
-            <a:off x="885822" y="1200150"/>
-            <a:ext cx="10931038" cy="4703017"/>
-          </a:xfrm>
-        </p:spPr>
-        <p:txBody>
-          <a:bodyPr lIns="0" tIns="0" rIns="0" bIns="0" anchor="t"/>
-          <a:lstStyle/>
-          <a:p>
-            <a:pPr marL="342900" indent="-342900">
-              <a:buFont typeface="Arial"/>
-              <a:buChar char="•"/>
-            </a:pPr>
-            <a:r>
-              <a:rPr lang="en-GB" err="1">
-                <a:cs typeface="Arial"/>
-              </a:rPr>
-              <a:t>Klíčový</a:t>
-            </a:r>
-            <a:r>
-              <a:rPr lang="en-GB">
-                <a:cs typeface="Arial"/>
-              </a:rPr>
-              <a:t> </a:t>
-            </a:r>
-            <a:r>
-              <a:rPr lang="en-GB" err="1">
-                <a:cs typeface="Arial"/>
-              </a:rPr>
-              <a:t>produkt</a:t>
-            </a:r>
-            <a:r>
-              <a:rPr lang="en-GB">
-                <a:cs typeface="Arial"/>
-              </a:rPr>
-              <a:t> </a:t>
-            </a:r>
-            <a:r>
-              <a:rPr lang="en-GB" err="1">
-                <a:cs typeface="Arial"/>
-              </a:rPr>
-              <a:t>mlékárenského</a:t>
-            </a:r>
-            <a:r>
-              <a:rPr lang="en-GB">
-                <a:cs typeface="Arial"/>
-              </a:rPr>
-              <a:t> </a:t>
-            </a:r>
-            <a:r>
-              <a:rPr lang="en-GB" err="1">
-                <a:cs typeface="Arial"/>
-              </a:rPr>
-              <a:t>průmyslu</a:t>
-            </a:r>
-            <a:r>
-              <a:rPr lang="en-GB">
-                <a:cs typeface="Arial"/>
-              </a:rPr>
-              <a:t> </a:t>
-            </a:r>
-          </a:p>
-          <a:p>
-            <a:pPr marL="342900" indent="-342900">
-              <a:buFont typeface="Arial"/>
-              <a:buChar char="•"/>
-            </a:pPr>
-            <a:r>
-              <a:rPr lang="en-GB" err="1">
-                <a:ea typeface="+mn-lt"/>
-                <a:cs typeface="+mn-lt"/>
-              </a:rPr>
-              <a:t>Růst</a:t>
-            </a:r>
-            <a:r>
-              <a:rPr lang="en-GB">
-                <a:ea typeface="+mn-lt"/>
-                <a:cs typeface="+mn-lt"/>
-              </a:rPr>
-              <a:t> </a:t>
-            </a:r>
-            <a:r>
-              <a:rPr lang="en-GB" err="1">
-                <a:ea typeface="+mn-lt"/>
-                <a:cs typeface="+mn-lt"/>
-              </a:rPr>
-              <a:t>nominálních</a:t>
-            </a:r>
-            <a:r>
-              <a:rPr lang="en-GB">
-                <a:ea typeface="+mn-lt"/>
-                <a:cs typeface="+mn-lt"/>
-              </a:rPr>
-              <a:t> </a:t>
-            </a:r>
-            <a:r>
-              <a:rPr lang="en-GB" err="1">
-                <a:ea typeface="+mn-lt"/>
-                <a:cs typeface="+mn-lt"/>
-              </a:rPr>
-              <a:t>cen</a:t>
-            </a:r>
-            <a:r>
-              <a:rPr lang="en-GB">
-                <a:ea typeface="+mn-lt"/>
-                <a:cs typeface="+mn-lt"/>
-              </a:rPr>
-              <a:t> po </a:t>
-            </a:r>
-            <a:r>
-              <a:rPr lang="en-GB" err="1">
-                <a:ea typeface="+mn-lt"/>
-                <a:cs typeface="+mn-lt"/>
-              </a:rPr>
-              <a:t>roce</a:t>
-            </a:r>
-            <a:r>
-              <a:rPr lang="en-GB">
-                <a:ea typeface="+mn-lt"/>
-                <a:cs typeface="+mn-lt"/>
-              </a:rPr>
-              <a:t> 2024 </a:t>
-            </a:r>
-            <a:r>
-              <a:rPr lang="en-GB">
-                <a:solidFill>
-                  <a:srgbClr val="000000"/>
-                </a:solidFill>
-                <a:ea typeface="+mn-lt"/>
-                <a:cs typeface="+mn-lt"/>
-              </a:rPr>
-              <a:t>→ </a:t>
-            </a:r>
-            <a:r>
-              <a:rPr lang="en-GB" err="1">
-                <a:solidFill>
-                  <a:srgbClr val="000000"/>
-                </a:solidFill>
-                <a:ea typeface="+mn-lt"/>
-                <a:cs typeface="+mn-lt"/>
-              </a:rPr>
-              <a:t>očištění</a:t>
-            </a:r>
-            <a:r>
-              <a:rPr lang="en-GB">
-                <a:solidFill>
-                  <a:srgbClr val="000000"/>
-                </a:solidFill>
-                <a:ea typeface="+mn-lt"/>
-                <a:cs typeface="+mn-lt"/>
-              </a:rPr>
-              <a:t> </a:t>
-            </a:r>
-            <a:r>
-              <a:rPr lang="en-GB" err="1">
-                <a:solidFill>
-                  <a:srgbClr val="000000"/>
-                </a:solidFill>
-                <a:ea typeface="+mn-lt"/>
-                <a:cs typeface="+mn-lt"/>
-              </a:rPr>
-              <a:t>cen</a:t>
-            </a:r>
-            <a:r>
-              <a:rPr lang="en-GB">
-                <a:solidFill>
-                  <a:srgbClr val="000000"/>
-                </a:solidFill>
-                <a:ea typeface="+mn-lt"/>
-                <a:cs typeface="+mn-lt"/>
-              </a:rPr>
-              <a:t> o </a:t>
-            </a:r>
-            <a:r>
-              <a:rPr lang="en-GB" err="1">
-                <a:solidFill>
-                  <a:srgbClr val="000000"/>
-                </a:solidFill>
-                <a:ea typeface="+mn-lt"/>
-                <a:cs typeface="+mn-lt"/>
-              </a:rPr>
-              <a:t>inflaci</a:t>
-            </a:r>
-            <a:endParaRPr lang="en-GB">
-              <a:solidFill>
-                <a:srgbClr val="000000"/>
-              </a:solidFill>
-              <a:ea typeface="+mn-lt"/>
-              <a:cs typeface="+mn-lt"/>
-            </a:endParaRPr>
-          </a:p>
-          <a:p>
-            <a:pPr marL="342900" indent="-342900">
-              <a:buFont typeface="Arial"/>
-              <a:buChar char="•"/>
-            </a:pPr>
-            <a:r>
-              <a:rPr lang="en-GB" err="1">
-                <a:solidFill>
-                  <a:srgbClr val="000000"/>
-                </a:solidFill>
-                <a:ea typeface="+mn-lt"/>
-                <a:cs typeface="+mn-lt"/>
-              </a:rPr>
-              <a:t>Trh</a:t>
-            </a:r>
-            <a:r>
-              <a:rPr lang="en-GB">
-                <a:solidFill>
-                  <a:srgbClr val="000000"/>
-                </a:solidFill>
-                <a:ea typeface="+mn-lt"/>
-                <a:cs typeface="+mn-lt"/>
-              </a:rPr>
-              <a:t> s </a:t>
-            </a:r>
-            <a:r>
-              <a:rPr lang="en-GB" err="1">
-                <a:solidFill>
-                  <a:srgbClr val="000000"/>
-                </a:solidFill>
-                <a:ea typeface="+mn-lt"/>
-                <a:cs typeface="+mn-lt"/>
-              </a:rPr>
-              <a:t>jogurty</a:t>
-            </a:r>
-            <a:r>
-              <a:rPr lang="en-GB">
-                <a:solidFill>
-                  <a:srgbClr val="000000"/>
-                </a:solidFill>
-                <a:ea typeface="+mn-lt"/>
-                <a:cs typeface="+mn-lt"/>
-              </a:rPr>
-              <a:t> v EU = </a:t>
-            </a:r>
-            <a:r>
-              <a:rPr lang="en-GB" err="1">
-                <a:solidFill>
-                  <a:srgbClr val="000000"/>
-                </a:solidFill>
-                <a:ea typeface="+mn-lt"/>
-                <a:cs typeface="+mn-lt"/>
-              </a:rPr>
-              <a:t>vysoká</a:t>
-            </a:r>
-            <a:r>
-              <a:rPr lang="en-GB">
-                <a:solidFill>
-                  <a:srgbClr val="000000"/>
-                </a:solidFill>
-                <a:ea typeface="+mn-lt"/>
-                <a:cs typeface="+mn-lt"/>
-              </a:rPr>
-              <a:t> </a:t>
-            </a:r>
-            <a:r>
-              <a:rPr lang="en-GB" err="1">
-                <a:solidFill>
-                  <a:srgbClr val="000000"/>
-                </a:solidFill>
-                <a:ea typeface="+mn-lt"/>
-                <a:cs typeface="+mn-lt"/>
-              </a:rPr>
-              <a:t>integrace</a:t>
-            </a:r>
-            <a:endParaRPr lang="en-GB">
-              <a:solidFill>
-                <a:srgbClr val="000000"/>
-              </a:solidFill>
-              <a:ea typeface="+mn-lt"/>
-              <a:cs typeface="+mn-lt"/>
-            </a:endParaRPr>
-          </a:p>
-          <a:p>
-            <a:pPr marL="342900" indent="-342900">
-              <a:buFont typeface="Arial"/>
-              <a:buChar char="•"/>
-            </a:pPr>
-            <a:r>
-              <a:rPr lang="en-GB" err="1">
-                <a:solidFill>
-                  <a:srgbClr val="000000"/>
-                </a:solidFill>
-                <a:ea typeface="+mn-lt"/>
-                <a:cs typeface="+mn-lt"/>
-              </a:rPr>
-              <a:t>Cenové</a:t>
-            </a:r>
-            <a:r>
-              <a:rPr lang="en-GB">
-                <a:solidFill>
-                  <a:srgbClr val="000000"/>
-                </a:solidFill>
-                <a:ea typeface="+mn-lt"/>
-                <a:cs typeface="+mn-lt"/>
-              </a:rPr>
-              <a:t> </a:t>
-            </a:r>
-            <a:r>
-              <a:rPr lang="en-GB" err="1">
-                <a:solidFill>
-                  <a:srgbClr val="000000"/>
-                </a:solidFill>
-                <a:ea typeface="+mn-lt"/>
-                <a:cs typeface="+mn-lt"/>
-              </a:rPr>
-              <a:t>šoky</a:t>
-            </a:r>
-            <a:r>
-              <a:rPr lang="en-GB">
-                <a:solidFill>
-                  <a:srgbClr val="000000"/>
-                </a:solidFill>
-                <a:ea typeface="+mn-lt"/>
-                <a:cs typeface="+mn-lt"/>
-              </a:rPr>
-              <a:t> se </a:t>
-            </a:r>
-            <a:r>
-              <a:rPr lang="en-GB" err="1">
-                <a:solidFill>
-                  <a:srgbClr val="000000"/>
-                </a:solidFill>
-                <a:ea typeface="+mn-lt"/>
-                <a:cs typeface="+mn-lt"/>
-              </a:rPr>
-              <a:t>neprojevují</a:t>
-            </a:r>
-            <a:r>
-              <a:rPr lang="en-GB">
-                <a:solidFill>
-                  <a:srgbClr val="000000"/>
-                </a:solidFill>
-                <a:ea typeface="+mn-lt"/>
-                <a:cs typeface="+mn-lt"/>
-              </a:rPr>
-              <a:t> </a:t>
-            </a:r>
-            <a:r>
-              <a:rPr lang="en-GB" err="1">
-                <a:solidFill>
-                  <a:srgbClr val="000000"/>
-                </a:solidFill>
-                <a:ea typeface="+mn-lt"/>
-                <a:cs typeface="+mn-lt"/>
-              </a:rPr>
-              <a:t>stejně</a:t>
-            </a:r>
-            <a:r>
-              <a:rPr lang="en-GB">
-                <a:solidFill>
-                  <a:srgbClr val="000000"/>
-                </a:solidFill>
-                <a:ea typeface="+mn-lt"/>
-                <a:cs typeface="+mn-lt"/>
-              </a:rPr>
-              <a:t> </a:t>
-            </a:r>
-            <a:r>
-              <a:rPr lang="en-GB" err="1">
-                <a:solidFill>
-                  <a:srgbClr val="000000"/>
-                </a:solidFill>
-                <a:ea typeface="+mn-lt"/>
-                <a:cs typeface="+mn-lt"/>
-              </a:rPr>
-              <a:t>intenzivně</a:t>
-            </a:r>
-            <a:endParaRPr lang="en-GB">
-              <a:solidFill>
-                <a:srgbClr val="000000"/>
-              </a:solidFill>
-              <a:ea typeface="+mn-lt"/>
-              <a:cs typeface="+mn-lt"/>
-            </a:endParaRPr>
-          </a:p>
-          <a:p>
-            <a:pPr marL="1028700" lvl="1" indent="-342900">
-              <a:buClr>
-                <a:srgbClr val="AA006E"/>
-              </a:buClr>
-              <a:buFont typeface="Courier New"/>
-              <a:buChar char="o"/>
-            </a:pPr>
-            <a:endParaRPr lang="en-GB">
-              <a:solidFill>
-                <a:srgbClr val="000000"/>
-              </a:solidFill>
-              <a:ea typeface="+mn-lt"/>
-              <a:cs typeface="+mn-lt"/>
-            </a:endParaRPr>
-          </a:p>
-          <a:p>
-            <a:pPr lvl="1" indent="0">
-              <a:buClr>
-                <a:srgbClr val="AA006E"/>
-              </a:buClr>
-              <a:buNone/>
-            </a:pPr>
-            <a:endParaRPr lang="en-GB">
-              <a:solidFill>
-                <a:srgbClr val="000000"/>
-              </a:solidFill>
-              <a:ea typeface="+mn-lt"/>
-              <a:cs typeface="+mn-lt"/>
-            </a:endParaRPr>
-          </a:p>
-        </p:txBody>
-      </p:sp>
-      <p:sp>
-        <p:nvSpPr>
-          <p:cNvPr id="3" name="Text Placeholder 2">
-            <a:extLst>
-              <a:ext uri="{FF2B5EF4-FFF2-40B4-BE49-F238E27FC236}">
-                <a16:creationId xmlns:a16="http://schemas.microsoft.com/office/drawing/2014/main" id="{B3EF70C9-2109-F8FC-1808-23705237D2DE}"/>
-              </a:ext>
-            </a:extLst>
-          </p:cNvPr>
-          <p:cNvSpPr>
-            <a:spLocks noGrp="1"/>
-          </p:cNvSpPr>
-          <p:nvPr>
-            <p:ph type="body" sz="quarter" idx="14"/>
-          </p:nvPr>
-        </p:nvSpPr>
-        <p:spPr/>
-        <p:txBody>
-          <a:bodyPr lIns="0" tIns="0" rIns="0" bIns="0" anchor="t"/>
-          <a:lstStyle/>
-          <a:p>
-            <a:r>
-              <a:rPr lang="en-GB" err="1">
-                <a:cs typeface="Arial"/>
-              </a:rPr>
-              <a:t>Závěr</a:t>
-            </a:r>
-            <a:endParaRPr lang="en-GB" err="1"/>
-          </a:p>
-        </p:txBody>
-      </p:sp>
-    </p:spTree>
-    <p:extLst>
-      <p:ext uri="{BB962C8B-B14F-4D97-AF65-F5344CB8AC3E}">
-        <p14:creationId xmlns:p14="http://schemas.microsoft.com/office/powerpoint/2010/main" val="1460814851"/>
-      </p:ext>
-    </p:extLst>
-  </p:cSld>
-  <p:clrMapOvr>
-    <a:masterClrMapping/>
-  </p:clrMapOvr>
-</p:sld>
-</file>
-
-<file path=ppt/slides/slide19.xml><?xml version="1.0" encoding="utf-8"?>
-<p:sld xmlns:a="http://schemas.openxmlformats.org/drawingml/2006/main" xmlns:r="http://schemas.openxmlformats.org/officeDocument/2006/relationships" xmlns:p="http://schemas.openxmlformats.org/presentationml/2006/main">
-  <p:cSld>
-    <p:spTree>
-      <p:nvGrpSpPr>
-        <p:cNvPr id="1" name=""/>
-        <p:cNvGrpSpPr/>
-        <p:nvPr/>
-      </p:nvGrpSpPr>
-      <p:grpSpPr>
-        <a:xfrm>
-          <a:off x="0" y="0"/>
-          <a:ext cx="0" cy="0"/>
-          <a:chOff x="0" y="0"/>
-          <a:chExt cx="0" cy="0"/>
-        </a:xfrm>
-      </p:grpSpPr>
-      <p:sp>
-        <p:nvSpPr>
-          <p:cNvPr id="2" name="Content Placeholder 1">
-            <a:extLst>
-              <a:ext uri="{FF2B5EF4-FFF2-40B4-BE49-F238E27FC236}">
-                <a16:creationId xmlns:a16="http://schemas.microsoft.com/office/drawing/2014/main" id="{11A9CE4D-C18E-06AD-E229-B1206F874B8F}"/>
-              </a:ext>
-            </a:extLst>
-          </p:cNvPr>
-          <p:cNvSpPr>
-            <a:spLocks noGrp="1"/>
-          </p:cNvSpPr>
-          <p:nvPr>
-            <p:ph sz="half" idx="1"/>
-          </p:nvPr>
-        </p:nvSpPr>
-        <p:spPr>
-          <a:xfrm>
-            <a:off x="885822" y="1200150"/>
-            <a:ext cx="10681338" cy="4703017"/>
-          </a:xfrm>
-        </p:spPr>
-        <p:txBody>
-          <a:bodyPr/>
-          <a:lstStyle/>
-          <a:p>
-            <a:pPr marL="342900" indent="-342900">
-              <a:buFont typeface="Arial" panose="020B0604020202020204" pitchFamily="34" charset="0"/>
-              <a:buChar char="•"/>
-            </a:pPr>
-            <a:r>
-              <a:rPr lang="cs-CZ" sz="1400"/>
-              <a:t>CLAL. (2023). </a:t>
-            </a:r>
-            <a:r>
-              <a:rPr lang="cs-CZ" sz="1400" err="1"/>
-              <a:t>Annual</a:t>
-            </a:r>
-            <a:r>
-              <a:rPr lang="cs-CZ" sz="1400"/>
-              <a:t> </a:t>
-            </a:r>
-            <a:r>
-              <a:rPr lang="cs-CZ" sz="1400" err="1"/>
-              <a:t>production</a:t>
-            </a:r>
-            <a:r>
-              <a:rPr lang="cs-CZ" sz="1400"/>
-              <a:t> </a:t>
-            </a:r>
-            <a:r>
-              <a:rPr lang="cs-CZ" sz="1400" err="1"/>
-              <a:t>of</a:t>
-            </a:r>
-            <a:r>
-              <a:rPr lang="cs-CZ" sz="1400"/>
-              <a:t> </a:t>
-            </a:r>
-            <a:r>
-              <a:rPr lang="cs-CZ" sz="1400" err="1"/>
-              <a:t>yogurt</a:t>
-            </a:r>
-            <a:r>
-              <a:rPr lang="cs-CZ" sz="1400"/>
-              <a:t> in </a:t>
-            </a:r>
-            <a:r>
-              <a:rPr lang="cs-CZ" sz="1400" err="1"/>
-              <a:t>the</a:t>
-            </a:r>
-            <a:r>
-              <a:rPr lang="cs-CZ" sz="1400"/>
-              <a:t> </a:t>
-            </a:r>
-            <a:r>
-              <a:rPr lang="cs-CZ" sz="1400" err="1"/>
-              <a:t>European</a:t>
-            </a:r>
-            <a:r>
-              <a:rPr lang="cs-CZ" sz="1400"/>
-              <a:t> Union (EU-27) </a:t>
-            </a:r>
-            <a:r>
-              <a:rPr lang="cs-CZ" sz="1400" err="1"/>
-              <a:t>from</a:t>
-            </a:r>
-            <a:r>
-              <a:rPr lang="cs-CZ" sz="1400"/>
-              <a:t> 2016 to 2022. In Statista. </a:t>
-            </a:r>
-            <a:r>
-              <a:rPr lang="cs-CZ" sz="1400">
-                <a:hlinkClick r:id="rId2"/>
-              </a:rPr>
-              <a:t>https://www.statista.com/statistics/1190879/yogurt-production-in-europe/</a:t>
-            </a:r>
-            <a:endParaRPr lang="cs-CZ" sz="1400"/>
-          </a:p>
-          <a:p>
-            <a:pPr marL="342900" indent="-342900">
-              <a:buFont typeface="Arial" panose="020B0604020202020204" pitchFamily="34" charset="0"/>
-              <a:buChar char="•"/>
-            </a:pPr>
-            <a:r>
-              <a:rPr lang="cs-CZ" sz="1400" err="1"/>
-              <a:t>Enterprise</a:t>
-            </a:r>
-            <a:r>
-              <a:rPr lang="cs-CZ" sz="1400"/>
-              <a:t> </a:t>
-            </a:r>
-            <a:r>
-              <a:rPr lang="cs-CZ" sz="1400" err="1"/>
-              <a:t>Greece</a:t>
-            </a:r>
-            <a:r>
-              <a:rPr lang="cs-CZ" sz="1400"/>
-              <a:t>. (2021). </a:t>
-            </a:r>
-            <a:r>
-              <a:rPr lang="cs-CZ" sz="1400" err="1"/>
-              <a:t>Healthy</a:t>
-            </a:r>
-            <a:r>
-              <a:rPr lang="cs-CZ" sz="1400"/>
-              <a:t> food </a:t>
-            </a:r>
-            <a:r>
-              <a:rPr lang="cs-CZ" sz="1400" err="1"/>
-              <a:t>trends</a:t>
-            </a:r>
-            <a:r>
-              <a:rPr lang="cs-CZ" sz="1400"/>
-              <a:t> </a:t>
-            </a:r>
-            <a:r>
-              <a:rPr lang="cs-CZ" sz="1400" err="1"/>
-              <a:t>help</a:t>
-            </a:r>
-            <a:r>
-              <a:rPr lang="cs-CZ" sz="1400"/>
-              <a:t> drive </a:t>
-            </a:r>
-            <a:r>
-              <a:rPr lang="cs-CZ" sz="1400" err="1"/>
-              <a:t>record</a:t>
-            </a:r>
-            <a:r>
-              <a:rPr lang="cs-CZ" sz="1400"/>
-              <a:t> </a:t>
-            </a:r>
-            <a:r>
-              <a:rPr lang="cs-CZ" sz="1400" err="1"/>
-              <a:t>Greek</a:t>
-            </a:r>
-            <a:r>
-              <a:rPr lang="cs-CZ" sz="1400"/>
-              <a:t> </a:t>
-            </a:r>
-            <a:r>
-              <a:rPr lang="cs-CZ" sz="1400" err="1"/>
-              <a:t>feta</a:t>
-            </a:r>
-            <a:r>
-              <a:rPr lang="cs-CZ" sz="1400"/>
-              <a:t>, </a:t>
-            </a:r>
-            <a:r>
-              <a:rPr lang="cs-CZ" sz="1400" err="1"/>
-              <a:t>yogurt</a:t>
-            </a:r>
-            <a:r>
-              <a:rPr lang="cs-CZ" sz="1400"/>
-              <a:t> </a:t>
-            </a:r>
-            <a:r>
-              <a:rPr lang="cs-CZ" sz="1400" err="1"/>
-              <a:t>exports</a:t>
-            </a:r>
-            <a:r>
-              <a:rPr lang="cs-CZ" sz="1400"/>
-              <a:t>. </a:t>
-            </a:r>
-            <a:r>
-              <a:rPr lang="cs-CZ" sz="1400">
-                <a:hlinkClick r:id="rId3"/>
-              </a:rPr>
-              <a:t>https://newsletters.enterprisegreece.gov.gr/newsletter-articles/healthy-food-trends-help-drive-record-greek-feta-yogurt-exports/</a:t>
-            </a:r>
-            <a:endParaRPr lang="cs-CZ" sz="1400"/>
-          </a:p>
-          <a:p>
-            <a:pPr marL="342900" indent="-342900">
-              <a:buFont typeface="Arial" panose="020B0604020202020204" pitchFamily="34" charset="0"/>
-              <a:buChar char="•"/>
-            </a:pPr>
-            <a:r>
-              <a:rPr lang="cs-CZ" sz="1400"/>
-              <a:t>FAO (2024). </a:t>
-            </a:r>
-            <a:r>
-              <a:rPr lang="cs-CZ" sz="1400" err="1"/>
-              <a:t>Gateway</a:t>
-            </a:r>
-            <a:r>
-              <a:rPr lang="cs-CZ" sz="1400"/>
-              <a:t> to </a:t>
-            </a:r>
-            <a:r>
-              <a:rPr lang="cs-CZ" sz="1400" err="1"/>
-              <a:t>dairy</a:t>
-            </a:r>
-            <a:r>
-              <a:rPr lang="cs-CZ" sz="1400"/>
-              <a:t> </a:t>
-            </a:r>
-            <a:r>
-              <a:rPr lang="cs-CZ" sz="1400" err="1"/>
-              <a:t>production</a:t>
-            </a:r>
-            <a:r>
-              <a:rPr lang="cs-CZ" sz="1400"/>
-              <a:t> and </a:t>
-            </a:r>
-            <a:r>
-              <a:rPr lang="cs-CZ" sz="1400" err="1"/>
-              <a:t>products</a:t>
-            </a:r>
-            <a:r>
-              <a:rPr lang="cs-CZ" sz="1400"/>
-              <a:t>. Food and </a:t>
-            </a:r>
-            <a:r>
-              <a:rPr lang="cs-CZ" sz="1400" err="1"/>
-              <a:t>Agriculture</a:t>
-            </a:r>
-            <a:r>
-              <a:rPr lang="cs-CZ" sz="1400"/>
-              <a:t> </a:t>
-            </a:r>
-            <a:r>
-              <a:rPr lang="cs-CZ" sz="1400" err="1"/>
-              <a:t>Organization</a:t>
-            </a:r>
-            <a:r>
-              <a:rPr lang="cs-CZ" sz="1400"/>
-              <a:t> </a:t>
-            </a:r>
-            <a:r>
-              <a:rPr lang="cs-CZ" sz="1400" err="1"/>
-              <a:t>of</a:t>
-            </a:r>
-            <a:r>
-              <a:rPr lang="cs-CZ" sz="1400"/>
-              <a:t> </a:t>
-            </a:r>
-            <a:r>
-              <a:rPr lang="cs-CZ" sz="1400" err="1"/>
-              <a:t>the</a:t>
-            </a:r>
-            <a:r>
-              <a:rPr lang="cs-CZ" sz="1400"/>
-              <a:t> United </a:t>
-            </a:r>
-            <a:r>
-              <a:rPr lang="cs-CZ" sz="1400" err="1"/>
-              <a:t>Nations</a:t>
-            </a:r>
-            <a:r>
-              <a:rPr lang="cs-CZ" sz="1400"/>
-              <a:t>. </a:t>
-            </a:r>
-            <a:r>
-              <a:rPr lang="cs-CZ" sz="1400">
-                <a:hlinkClick r:id="rId4"/>
-              </a:rPr>
-              <a:t>https://www.fao.org/dairy-production-products/production/milk-production/en</a:t>
-            </a:r>
-            <a:endParaRPr lang="cs-CZ" sz="1400"/>
-          </a:p>
-          <a:p>
-            <a:pPr marL="342900" indent="-342900">
-              <a:buFont typeface="Arial" panose="020B0604020202020204" pitchFamily="34" charset="0"/>
-              <a:buChar char="•"/>
-            </a:pPr>
-            <a:endParaRPr lang="cs-CZ" sz="1400"/>
-          </a:p>
-          <a:p>
-            <a:br>
-              <a:rPr lang="cs-CZ"/>
-            </a:br>
-            <a:endParaRPr lang="en-US"/>
-          </a:p>
-        </p:txBody>
-      </p:sp>
-      <p:sp>
-        <p:nvSpPr>
-          <p:cNvPr id="3" name="Text Placeholder 2">
-            <a:extLst>
-              <a:ext uri="{FF2B5EF4-FFF2-40B4-BE49-F238E27FC236}">
-                <a16:creationId xmlns:a16="http://schemas.microsoft.com/office/drawing/2014/main" id="{67B607FE-04CD-5A93-691C-2EFD2CE257E3}"/>
-              </a:ext>
-            </a:extLst>
-          </p:cNvPr>
-          <p:cNvSpPr>
-            <a:spLocks noGrp="1"/>
-          </p:cNvSpPr>
-          <p:nvPr>
-            <p:ph type="body" sz="quarter" idx="14"/>
-          </p:nvPr>
-        </p:nvSpPr>
-        <p:spPr/>
-        <p:txBody>
-          <a:bodyPr/>
-          <a:lstStyle/>
-          <a:p>
-            <a:r>
-              <a:rPr lang="en-US" err="1"/>
-              <a:t>Zdroje</a:t>
-            </a:r>
-            <a:endParaRPr lang="en-US"/>
-          </a:p>
-        </p:txBody>
-      </p:sp>
-    </p:spTree>
-    <p:extLst>
-      <p:ext uri="{BB962C8B-B14F-4D97-AF65-F5344CB8AC3E}">
-        <p14:creationId xmlns:p14="http://schemas.microsoft.com/office/powerpoint/2010/main" val="2231974394"/>
       </p:ext>
     </p:extLst>
   </p:cSld>
@@ -12902,6 +13145,1036 @@
     <p:extLst>
       <p:ext uri="{BB962C8B-B14F-4D97-AF65-F5344CB8AC3E}">
         <p14:creationId xmlns:p14="http://schemas.microsoft.com/office/powerpoint/2010/main" val="3579569277"/>
+      </p:ext>
+    </p:extLst>
+  </p:cSld>
+  <p:clrMapOvr>
+    <a:masterClrMapping/>
+  </p:clrMapOvr>
+</p:sld>
+</file>
+
+<file path=ppt/slides/slide20.xml><?xml version="1.0" encoding="utf-8"?>
+<p:sld xmlns:a="http://schemas.openxmlformats.org/drawingml/2006/main" xmlns:r="http://schemas.openxmlformats.org/officeDocument/2006/relationships" xmlns:p="http://schemas.openxmlformats.org/presentationml/2006/main">
+  <p:cSld>
+    <p:spTree>
+      <p:nvGrpSpPr>
+        <p:cNvPr id="1" name=""/>
+        <p:cNvGrpSpPr/>
+        <p:nvPr/>
+      </p:nvGrpSpPr>
+      <p:grpSpPr>
+        <a:xfrm>
+          <a:off x="0" y="0"/>
+          <a:ext cx="0" cy="0"/>
+          <a:chOff x="0" y="0"/>
+          <a:chExt cx="0" cy="0"/>
+        </a:xfrm>
+      </p:grpSpPr>
+      <p:sp>
+        <p:nvSpPr>
+          <p:cNvPr id="3" name="Text Placeholder 2">
+            <a:extLst>
+              <a:ext uri="{FF2B5EF4-FFF2-40B4-BE49-F238E27FC236}">
+                <a16:creationId xmlns:a16="http://schemas.microsoft.com/office/drawing/2014/main" id="{4BC72877-9187-F663-6F21-84A4494EB104}"/>
+              </a:ext>
+            </a:extLst>
+          </p:cNvPr>
+          <p:cNvSpPr>
+            <a:spLocks noGrp="1"/>
+          </p:cNvSpPr>
+          <p:nvPr>
+            <p:ph type="body" sz="quarter" idx="14"/>
+          </p:nvPr>
+        </p:nvSpPr>
+        <p:spPr/>
+        <p:txBody>
+          <a:bodyPr lIns="0" tIns="0" rIns="0" bIns="0" anchor="t"/>
+          <a:lstStyle/>
+          <a:p>
+            <a:r>
+              <a:rPr lang="en-US">
+                <a:cs typeface="Arial"/>
+              </a:rPr>
+              <a:t>6) </a:t>
+            </a:r>
+            <a:r>
+              <a:rPr lang="en-US" err="1">
+                <a:cs typeface="Arial"/>
+              </a:rPr>
+              <a:t>Přenos</a:t>
+            </a:r>
+            <a:r>
+              <a:rPr lang="en-US">
+                <a:cs typeface="Arial"/>
+              </a:rPr>
+              <a:t> </a:t>
+            </a:r>
+            <a:r>
+              <a:rPr lang="en-US" err="1">
+                <a:cs typeface="Arial"/>
+              </a:rPr>
+              <a:t>cen</a:t>
+            </a:r>
+            <a:r>
+              <a:rPr lang="en-US">
+                <a:cs typeface="Arial"/>
+              </a:rPr>
+              <a:t> je </a:t>
+            </a:r>
+            <a:r>
+              <a:rPr lang="en-US" err="1">
+                <a:cs typeface="Arial"/>
+              </a:rPr>
+              <a:t>časově</a:t>
+            </a:r>
+            <a:r>
+              <a:rPr lang="en-US">
+                <a:cs typeface="Arial"/>
+              </a:rPr>
+              <a:t> </a:t>
+            </a:r>
+            <a:r>
+              <a:rPr lang="en-US" err="1">
+                <a:cs typeface="Arial"/>
+              </a:rPr>
+              <a:t>zpožděný</a:t>
+            </a:r>
+            <a:r>
+              <a:rPr lang="en-US">
+                <a:cs typeface="Arial"/>
+              </a:rPr>
+              <a:t> a </a:t>
+            </a:r>
+            <a:r>
+              <a:rPr lang="en-US" err="1">
+                <a:cs typeface="Arial"/>
+              </a:rPr>
+              <a:t>liší</a:t>
+            </a:r>
+            <a:r>
+              <a:rPr lang="en-US">
+                <a:cs typeface="Arial"/>
+              </a:rPr>
+              <a:t> se </a:t>
+            </a:r>
+            <a:r>
+              <a:rPr lang="en-US" err="1">
+                <a:cs typeface="Arial"/>
+              </a:rPr>
+              <a:t>podle</a:t>
+            </a:r>
+            <a:r>
+              <a:rPr lang="en-US">
+                <a:cs typeface="Arial"/>
+              </a:rPr>
+              <a:t> </a:t>
+            </a:r>
+            <a:r>
+              <a:rPr lang="en-US" err="1">
+                <a:cs typeface="Arial"/>
+              </a:rPr>
+              <a:t>článků</a:t>
+            </a:r>
+            <a:r>
+              <a:rPr lang="en-US">
+                <a:cs typeface="Arial"/>
+              </a:rPr>
+              <a:t> </a:t>
+            </a:r>
+            <a:r>
+              <a:rPr lang="en-US" err="1">
+                <a:cs typeface="Arial"/>
+              </a:rPr>
+              <a:t>vertikály</a:t>
+            </a:r>
+            <a:endParaRPr lang="en-US" b="0" err="1">
+              <a:cs typeface="Arial"/>
+            </a:endParaRPr>
+          </a:p>
+          <a:p>
+            <a:endParaRPr lang="en-US">
+              <a:cs typeface="Arial"/>
+            </a:endParaRPr>
+          </a:p>
+        </p:txBody>
+      </p:sp>
+      <p:pic>
+        <p:nvPicPr>
+          <p:cNvPr id="5" name="Picture 4">
+            <a:extLst>
+              <a:ext uri="{FF2B5EF4-FFF2-40B4-BE49-F238E27FC236}">
+                <a16:creationId xmlns:a16="http://schemas.microsoft.com/office/drawing/2014/main" id="{6D258F36-E9F6-B2C9-73D2-8FFB9763048E}"/>
+              </a:ext>
+            </a:extLst>
+          </p:cNvPr>
+          <p:cNvPicPr>
+            <a:picLocks noChangeAspect="1"/>
+          </p:cNvPicPr>
+          <p:nvPr/>
+        </p:nvPicPr>
+        <p:blipFill>
+          <a:blip r:embed="rId2"/>
+          <a:stretch>
+            <a:fillRect/>
+          </a:stretch>
+        </p:blipFill>
+        <p:spPr>
+          <a:xfrm>
+            <a:off x="2025811" y="1710883"/>
+            <a:ext cx="6934682" cy="4304335"/>
+          </a:xfrm>
+          <a:prstGeom prst="rect">
+            <a:avLst/>
+          </a:prstGeom>
+        </p:spPr>
+      </p:pic>
+    </p:spTree>
+    <p:extLst>
+      <p:ext uri="{BB962C8B-B14F-4D97-AF65-F5344CB8AC3E}">
+        <p14:creationId xmlns:p14="http://schemas.microsoft.com/office/powerpoint/2010/main" val="3290670207"/>
+      </p:ext>
+    </p:extLst>
+  </p:cSld>
+  <p:clrMapOvr>
+    <a:masterClrMapping/>
+  </p:clrMapOvr>
+</p:sld>
+</file>
+
+<file path=ppt/slides/slide21.xml><?xml version="1.0" encoding="utf-8"?>
+<p:sld xmlns:a="http://schemas.openxmlformats.org/drawingml/2006/main" xmlns:r="http://schemas.openxmlformats.org/officeDocument/2006/relationships" xmlns:p="http://schemas.openxmlformats.org/presentationml/2006/main">
+  <p:cSld>
+    <p:spTree>
+      <p:nvGrpSpPr>
+        <p:cNvPr id="1" name=""/>
+        <p:cNvGrpSpPr/>
+        <p:nvPr/>
+      </p:nvGrpSpPr>
+      <p:grpSpPr>
+        <a:xfrm>
+          <a:off x="0" y="0"/>
+          <a:ext cx="0" cy="0"/>
+          <a:chOff x="0" y="0"/>
+          <a:chExt cx="0" cy="0"/>
+        </a:xfrm>
+      </p:grpSpPr>
+      <p:sp>
+        <p:nvSpPr>
+          <p:cNvPr id="2" name="Content Placeholder 1">
+            <a:extLst>
+              <a:ext uri="{FF2B5EF4-FFF2-40B4-BE49-F238E27FC236}">
+                <a16:creationId xmlns:a16="http://schemas.microsoft.com/office/drawing/2014/main" id="{23218BDF-5026-714D-6CF6-19FD63BD6BBA}"/>
+              </a:ext>
+            </a:extLst>
+          </p:cNvPr>
+          <p:cNvSpPr>
+            <a:spLocks noGrp="1"/>
+          </p:cNvSpPr>
+          <p:nvPr>
+            <p:ph sz="half" idx="1"/>
+          </p:nvPr>
+        </p:nvSpPr>
+        <p:spPr>
+          <a:xfrm>
+            <a:off x="885822" y="1200150"/>
+            <a:ext cx="10931038" cy="4703017"/>
+          </a:xfrm>
+        </p:spPr>
+        <p:txBody>
+          <a:bodyPr lIns="0" tIns="0" rIns="0" bIns="0" anchor="t"/>
+          <a:lstStyle/>
+          <a:p>
+            <a:pPr marL="342900" indent="-342900">
+              <a:buFont typeface="Arial"/>
+              <a:buChar char="•"/>
+            </a:pPr>
+            <a:r>
+              <a:rPr lang="en-GB" err="1">
+                <a:cs typeface="Arial"/>
+              </a:rPr>
+              <a:t>Klíčový</a:t>
+            </a:r>
+            <a:r>
+              <a:rPr lang="en-GB">
+                <a:cs typeface="Arial"/>
+              </a:rPr>
+              <a:t> </a:t>
+            </a:r>
+            <a:r>
+              <a:rPr lang="en-GB" err="1">
+                <a:cs typeface="Arial"/>
+              </a:rPr>
+              <a:t>produkt</a:t>
+            </a:r>
+            <a:r>
+              <a:rPr lang="en-GB">
+                <a:cs typeface="Arial"/>
+              </a:rPr>
+              <a:t> </a:t>
+            </a:r>
+            <a:r>
+              <a:rPr lang="en-GB" err="1">
+                <a:cs typeface="Arial"/>
+              </a:rPr>
+              <a:t>mlékárenského</a:t>
+            </a:r>
+            <a:r>
+              <a:rPr lang="en-GB">
+                <a:cs typeface="Arial"/>
+              </a:rPr>
+              <a:t> </a:t>
+            </a:r>
+            <a:r>
+              <a:rPr lang="en-GB" err="1">
+                <a:cs typeface="Arial"/>
+              </a:rPr>
+              <a:t>průmyslu</a:t>
+            </a:r>
+            <a:r>
+              <a:rPr lang="en-GB">
+                <a:cs typeface="Arial"/>
+              </a:rPr>
+              <a:t> </a:t>
+            </a:r>
+          </a:p>
+          <a:p>
+            <a:pPr marL="342900" indent="-342900">
+              <a:buFont typeface="Arial"/>
+              <a:buChar char="•"/>
+            </a:pPr>
+            <a:r>
+              <a:rPr lang="en-GB" err="1">
+                <a:ea typeface="+mn-lt"/>
+                <a:cs typeface="+mn-lt"/>
+              </a:rPr>
+              <a:t>Růst</a:t>
+            </a:r>
+            <a:r>
+              <a:rPr lang="en-GB">
+                <a:ea typeface="+mn-lt"/>
+                <a:cs typeface="+mn-lt"/>
+              </a:rPr>
+              <a:t> </a:t>
+            </a:r>
+            <a:r>
+              <a:rPr lang="en-GB" err="1">
+                <a:ea typeface="+mn-lt"/>
+                <a:cs typeface="+mn-lt"/>
+              </a:rPr>
+              <a:t>nominálních</a:t>
+            </a:r>
+            <a:r>
+              <a:rPr lang="en-GB">
+                <a:ea typeface="+mn-lt"/>
+                <a:cs typeface="+mn-lt"/>
+              </a:rPr>
+              <a:t> </a:t>
+            </a:r>
+            <a:r>
+              <a:rPr lang="en-GB" err="1">
+                <a:ea typeface="+mn-lt"/>
+                <a:cs typeface="+mn-lt"/>
+              </a:rPr>
+              <a:t>cen</a:t>
+            </a:r>
+            <a:r>
+              <a:rPr lang="en-GB">
+                <a:ea typeface="+mn-lt"/>
+                <a:cs typeface="+mn-lt"/>
+              </a:rPr>
+              <a:t> po </a:t>
+            </a:r>
+            <a:r>
+              <a:rPr lang="en-GB" err="1">
+                <a:ea typeface="+mn-lt"/>
+                <a:cs typeface="+mn-lt"/>
+              </a:rPr>
+              <a:t>roce</a:t>
+            </a:r>
+            <a:r>
+              <a:rPr lang="en-GB">
+                <a:ea typeface="+mn-lt"/>
+                <a:cs typeface="+mn-lt"/>
+              </a:rPr>
+              <a:t> 2024 </a:t>
+            </a:r>
+            <a:r>
+              <a:rPr lang="en-GB">
+                <a:solidFill>
+                  <a:srgbClr val="000000"/>
+                </a:solidFill>
+                <a:ea typeface="+mn-lt"/>
+                <a:cs typeface="+mn-lt"/>
+              </a:rPr>
+              <a:t>→ </a:t>
+            </a:r>
+            <a:r>
+              <a:rPr lang="en-GB" err="1">
+                <a:solidFill>
+                  <a:srgbClr val="000000"/>
+                </a:solidFill>
+                <a:ea typeface="+mn-lt"/>
+                <a:cs typeface="+mn-lt"/>
+              </a:rPr>
+              <a:t>očištění</a:t>
+            </a:r>
+            <a:r>
+              <a:rPr lang="en-GB">
+                <a:solidFill>
+                  <a:srgbClr val="000000"/>
+                </a:solidFill>
+                <a:ea typeface="+mn-lt"/>
+                <a:cs typeface="+mn-lt"/>
+              </a:rPr>
+              <a:t> </a:t>
+            </a:r>
+            <a:r>
+              <a:rPr lang="en-GB" err="1">
+                <a:solidFill>
+                  <a:srgbClr val="000000"/>
+                </a:solidFill>
+                <a:ea typeface="+mn-lt"/>
+                <a:cs typeface="+mn-lt"/>
+              </a:rPr>
+              <a:t>cen</a:t>
+            </a:r>
+            <a:r>
+              <a:rPr lang="en-GB">
+                <a:solidFill>
+                  <a:srgbClr val="000000"/>
+                </a:solidFill>
+                <a:ea typeface="+mn-lt"/>
+                <a:cs typeface="+mn-lt"/>
+              </a:rPr>
+              <a:t> o </a:t>
+            </a:r>
+            <a:r>
+              <a:rPr lang="en-GB" err="1">
+                <a:solidFill>
+                  <a:srgbClr val="000000"/>
+                </a:solidFill>
+                <a:ea typeface="+mn-lt"/>
+                <a:cs typeface="+mn-lt"/>
+              </a:rPr>
+              <a:t>inflaci</a:t>
+            </a:r>
+            <a:endParaRPr lang="en-GB">
+              <a:solidFill>
+                <a:srgbClr val="000000"/>
+              </a:solidFill>
+              <a:ea typeface="+mn-lt"/>
+              <a:cs typeface="+mn-lt"/>
+            </a:endParaRPr>
+          </a:p>
+          <a:p>
+            <a:pPr marL="342900" indent="-342900">
+              <a:buFont typeface="Arial"/>
+              <a:buChar char="•"/>
+            </a:pPr>
+            <a:r>
+              <a:rPr lang="en-GB" err="1">
+                <a:solidFill>
+                  <a:srgbClr val="000000"/>
+                </a:solidFill>
+                <a:ea typeface="+mn-lt"/>
+                <a:cs typeface="+mn-lt"/>
+              </a:rPr>
+              <a:t>Trh</a:t>
+            </a:r>
+            <a:r>
+              <a:rPr lang="en-GB">
+                <a:solidFill>
+                  <a:srgbClr val="000000"/>
+                </a:solidFill>
+                <a:ea typeface="+mn-lt"/>
+                <a:cs typeface="+mn-lt"/>
+              </a:rPr>
+              <a:t> s </a:t>
+            </a:r>
+            <a:r>
+              <a:rPr lang="en-GB" err="1">
+                <a:solidFill>
+                  <a:srgbClr val="000000"/>
+                </a:solidFill>
+                <a:ea typeface="+mn-lt"/>
+                <a:cs typeface="+mn-lt"/>
+              </a:rPr>
+              <a:t>jogurty</a:t>
+            </a:r>
+            <a:r>
+              <a:rPr lang="en-GB">
+                <a:solidFill>
+                  <a:srgbClr val="000000"/>
+                </a:solidFill>
+                <a:ea typeface="+mn-lt"/>
+                <a:cs typeface="+mn-lt"/>
+              </a:rPr>
+              <a:t> v EU = </a:t>
+            </a:r>
+            <a:r>
+              <a:rPr lang="en-GB" err="1">
+                <a:solidFill>
+                  <a:srgbClr val="000000"/>
+                </a:solidFill>
+                <a:ea typeface="+mn-lt"/>
+                <a:cs typeface="+mn-lt"/>
+              </a:rPr>
+              <a:t>vysoká</a:t>
+            </a:r>
+            <a:r>
+              <a:rPr lang="en-GB">
+                <a:solidFill>
+                  <a:srgbClr val="000000"/>
+                </a:solidFill>
+                <a:ea typeface="+mn-lt"/>
+                <a:cs typeface="+mn-lt"/>
+              </a:rPr>
+              <a:t> </a:t>
+            </a:r>
+            <a:r>
+              <a:rPr lang="en-GB" err="1">
+                <a:solidFill>
+                  <a:srgbClr val="000000"/>
+                </a:solidFill>
+                <a:ea typeface="+mn-lt"/>
+                <a:cs typeface="+mn-lt"/>
+              </a:rPr>
+              <a:t>integrace</a:t>
+            </a:r>
+            <a:endParaRPr lang="en-GB">
+              <a:solidFill>
+                <a:srgbClr val="000000"/>
+              </a:solidFill>
+              <a:ea typeface="+mn-lt"/>
+              <a:cs typeface="+mn-lt"/>
+            </a:endParaRPr>
+          </a:p>
+          <a:p>
+            <a:pPr marL="342900" indent="-342900">
+              <a:buFont typeface="Arial"/>
+              <a:buChar char="•"/>
+            </a:pPr>
+            <a:r>
+              <a:rPr lang="en-GB" err="1">
+                <a:solidFill>
+                  <a:srgbClr val="000000"/>
+                </a:solidFill>
+                <a:ea typeface="+mn-lt"/>
+                <a:cs typeface="+mn-lt"/>
+              </a:rPr>
+              <a:t>Cenové</a:t>
+            </a:r>
+            <a:r>
+              <a:rPr lang="en-GB">
+                <a:solidFill>
+                  <a:srgbClr val="000000"/>
+                </a:solidFill>
+                <a:ea typeface="+mn-lt"/>
+                <a:cs typeface="+mn-lt"/>
+              </a:rPr>
+              <a:t> </a:t>
+            </a:r>
+            <a:r>
+              <a:rPr lang="en-GB" err="1">
+                <a:solidFill>
+                  <a:srgbClr val="000000"/>
+                </a:solidFill>
+                <a:ea typeface="+mn-lt"/>
+                <a:cs typeface="+mn-lt"/>
+              </a:rPr>
+              <a:t>šoky</a:t>
+            </a:r>
+            <a:r>
+              <a:rPr lang="en-GB">
+                <a:solidFill>
+                  <a:srgbClr val="000000"/>
+                </a:solidFill>
+                <a:ea typeface="+mn-lt"/>
+                <a:cs typeface="+mn-lt"/>
+              </a:rPr>
+              <a:t> se </a:t>
+            </a:r>
+            <a:r>
+              <a:rPr lang="en-GB" err="1">
+                <a:solidFill>
+                  <a:srgbClr val="000000"/>
+                </a:solidFill>
+                <a:ea typeface="+mn-lt"/>
+                <a:cs typeface="+mn-lt"/>
+              </a:rPr>
+              <a:t>neprojevují</a:t>
+            </a:r>
+            <a:r>
+              <a:rPr lang="en-GB">
+                <a:solidFill>
+                  <a:srgbClr val="000000"/>
+                </a:solidFill>
+                <a:ea typeface="+mn-lt"/>
+                <a:cs typeface="+mn-lt"/>
+              </a:rPr>
+              <a:t> </a:t>
+            </a:r>
+            <a:r>
+              <a:rPr lang="en-GB" err="1">
+                <a:solidFill>
+                  <a:srgbClr val="000000"/>
+                </a:solidFill>
+                <a:ea typeface="+mn-lt"/>
+                <a:cs typeface="+mn-lt"/>
+              </a:rPr>
+              <a:t>stejně</a:t>
+            </a:r>
+            <a:r>
+              <a:rPr lang="en-GB">
+                <a:solidFill>
+                  <a:srgbClr val="000000"/>
+                </a:solidFill>
+                <a:ea typeface="+mn-lt"/>
+                <a:cs typeface="+mn-lt"/>
+              </a:rPr>
+              <a:t> </a:t>
+            </a:r>
+            <a:r>
+              <a:rPr lang="en-GB" err="1">
+                <a:solidFill>
+                  <a:srgbClr val="000000"/>
+                </a:solidFill>
+                <a:ea typeface="+mn-lt"/>
+                <a:cs typeface="+mn-lt"/>
+              </a:rPr>
+              <a:t>intenzivně</a:t>
+            </a:r>
+            <a:endParaRPr lang="en-GB">
+              <a:solidFill>
+                <a:srgbClr val="000000"/>
+              </a:solidFill>
+              <a:ea typeface="+mn-lt"/>
+              <a:cs typeface="+mn-lt"/>
+            </a:endParaRPr>
+          </a:p>
+          <a:p>
+            <a:pPr marL="1028700" lvl="1" indent="-342900">
+              <a:buClr>
+                <a:srgbClr val="AA006E"/>
+              </a:buClr>
+              <a:buFont typeface="Courier New"/>
+              <a:buChar char="o"/>
+            </a:pPr>
+            <a:endParaRPr lang="en-GB">
+              <a:solidFill>
+                <a:srgbClr val="000000"/>
+              </a:solidFill>
+              <a:ea typeface="+mn-lt"/>
+              <a:cs typeface="+mn-lt"/>
+            </a:endParaRPr>
+          </a:p>
+          <a:p>
+            <a:pPr lvl="1" indent="0">
+              <a:buClr>
+                <a:srgbClr val="AA006E"/>
+              </a:buClr>
+              <a:buNone/>
+            </a:pPr>
+            <a:endParaRPr lang="en-GB">
+              <a:solidFill>
+                <a:srgbClr val="000000"/>
+              </a:solidFill>
+              <a:ea typeface="+mn-lt"/>
+              <a:cs typeface="+mn-lt"/>
+            </a:endParaRPr>
+          </a:p>
+        </p:txBody>
+      </p:sp>
+      <p:sp>
+        <p:nvSpPr>
+          <p:cNvPr id="3" name="Text Placeholder 2">
+            <a:extLst>
+              <a:ext uri="{FF2B5EF4-FFF2-40B4-BE49-F238E27FC236}">
+                <a16:creationId xmlns:a16="http://schemas.microsoft.com/office/drawing/2014/main" id="{B3EF70C9-2109-F8FC-1808-23705237D2DE}"/>
+              </a:ext>
+            </a:extLst>
+          </p:cNvPr>
+          <p:cNvSpPr>
+            <a:spLocks noGrp="1"/>
+          </p:cNvSpPr>
+          <p:nvPr>
+            <p:ph type="body" sz="quarter" idx="14"/>
+          </p:nvPr>
+        </p:nvSpPr>
+        <p:spPr/>
+        <p:txBody>
+          <a:bodyPr lIns="0" tIns="0" rIns="0" bIns="0" anchor="t"/>
+          <a:lstStyle/>
+          <a:p>
+            <a:r>
+              <a:rPr lang="en-GB" err="1">
+                <a:cs typeface="Arial"/>
+              </a:rPr>
+              <a:t>Závěr</a:t>
+            </a:r>
+            <a:endParaRPr lang="en-GB" err="1"/>
+          </a:p>
+        </p:txBody>
+      </p:sp>
+    </p:spTree>
+    <p:extLst>
+      <p:ext uri="{BB962C8B-B14F-4D97-AF65-F5344CB8AC3E}">
+        <p14:creationId xmlns:p14="http://schemas.microsoft.com/office/powerpoint/2010/main" val="1460814851"/>
+      </p:ext>
+    </p:extLst>
+  </p:cSld>
+  <p:clrMapOvr>
+    <a:masterClrMapping/>
+  </p:clrMapOvr>
+</p:sld>
+</file>
+
+<file path=ppt/slides/slide22.xml><?xml version="1.0" encoding="utf-8"?>
+<p:sld xmlns:a="http://schemas.openxmlformats.org/drawingml/2006/main" xmlns:r="http://schemas.openxmlformats.org/officeDocument/2006/relationships" xmlns:p="http://schemas.openxmlformats.org/presentationml/2006/main">
+  <p:cSld>
+    <p:spTree>
+      <p:nvGrpSpPr>
+        <p:cNvPr id="1" name=""/>
+        <p:cNvGrpSpPr/>
+        <p:nvPr/>
+      </p:nvGrpSpPr>
+      <p:grpSpPr>
+        <a:xfrm>
+          <a:off x="0" y="0"/>
+          <a:ext cx="0" cy="0"/>
+          <a:chOff x="0" y="0"/>
+          <a:chExt cx="0" cy="0"/>
+        </a:xfrm>
+      </p:grpSpPr>
+      <p:sp>
+        <p:nvSpPr>
+          <p:cNvPr id="2" name="Content Placeholder 1">
+            <a:extLst>
+              <a:ext uri="{FF2B5EF4-FFF2-40B4-BE49-F238E27FC236}">
+                <a16:creationId xmlns:a16="http://schemas.microsoft.com/office/drawing/2014/main" id="{11A9CE4D-C18E-06AD-E229-B1206F874B8F}"/>
+              </a:ext>
+            </a:extLst>
+          </p:cNvPr>
+          <p:cNvSpPr>
+            <a:spLocks noGrp="1"/>
+          </p:cNvSpPr>
+          <p:nvPr>
+            <p:ph sz="half" idx="1"/>
+          </p:nvPr>
+        </p:nvSpPr>
+        <p:spPr>
+          <a:xfrm>
+            <a:off x="885822" y="1200150"/>
+            <a:ext cx="10681338" cy="4703017"/>
+          </a:xfrm>
+        </p:spPr>
+        <p:txBody>
+          <a:bodyPr/>
+          <a:lstStyle/>
+          <a:p>
+            <a:pPr marL="342900" indent="-342900">
+              <a:buFont typeface="Arial" panose="020B0604020202020204" pitchFamily="34" charset="0"/>
+              <a:buChar char="•"/>
+            </a:pPr>
+            <a:r>
+              <a:rPr lang="cs-CZ" sz="1400"/>
+              <a:t>CLAL. (2023). </a:t>
+            </a:r>
+            <a:r>
+              <a:rPr lang="cs-CZ" sz="1400" err="1"/>
+              <a:t>Annual</a:t>
+            </a:r>
+            <a:r>
+              <a:rPr lang="cs-CZ" sz="1400"/>
+              <a:t> </a:t>
+            </a:r>
+            <a:r>
+              <a:rPr lang="cs-CZ" sz="1400" err="1"/>
+              <a:t>production</a:t>
+            </a:r>
+            <a:r>
+              <a:rPr lang="cs-CZ" sz="1400"/>
+              <a:t> </a:t>
+            </a:r>
+            <a:r>
+              <a:rPr lang="cs-CZ" sz="1400" err="1"/>
+              <a:t>of</a:t>
+            </a:r>
+            <a:r>
+              <a:rPr lang="cs-CZ" sz="1400"/>
+              <a:t> </a:t>
+            </a:r>
+            <a:r>
+              <a:rPr lang="cs-CZ" sz="1400" err="1"/>
+              <a:t>yogurt</a:t>
+            </a:r>
+            <a:r>
+              <a:rPr lang="cs-CZ" sz="1400"/>
+              <a:t> in </a:t>
+            </a:r>
+            <a:r>
+              <a:rPr lang="cs-CZ" sz="1400" err="1"/>
+              <a:t>the</a:t>
+            </a:r>
+            <a:r>
+              <a:rPr lang="cs-CZ" sz="1400"/>
+              <a:t> </a:t>
+            </a:r>
+            <a:r>
+              <a:rPr lang="cs-CZ" sz="1400" err="1"/>
+              <a:t>European</a:t>
+            </a:r>
+            <a:r>
+              <a:rPr lang="cs-CZ" sz="1400"/>
+              <a:t> Union (EU-27) </a:t>
+            </a:r>
+            <a:r>
+              <a:rPr lang="cs-CZ" sz="1400" err="1"/>
+              <a:t>from</a:t>
+            </a:r>
+            <a:r>
+              <a:rPr lang="cs-CZ" sz="1400"/>
+              <a:t> 2016 to 2022. In Statista. </a:t>
+            </a:r>
+            <a:r>
+              <a:rPr lang="cs-CZ" sz="1400">
+                <a:hlinkClick r:id="rId2"/>
+              </a:rPr>
+              <a:t>https://www.statista.com/statistics/1190879/yogurt-production-in-europe/</a:t>
+            </a:r>
+            <a:endParaRPr lang="cs-CZ" sz="1400"/>
+          </a:p>
+          <a:p>
+            <a:pPr marL="342900" indent="-342900">
+              <a:buFont typeface="Arial" panose="020B0604020202020204" pitchFamily="34" charset="0"/>
+              <a:buChar char="•"/>
+            </a:pPr>
+            <a:r>
+              <a:rPr lang="cs-CZ" sz="1400" err="1"/>
+              <a:t>Enterprise</a:t>
+            </a:r>
+            <a:r>
+              <a:rPr lang="cs-CZ" sz="1400"/>
+              <a:t> </a:t>
+            </a:r>
+            <a:r>
+              <a:rPr lang="cs-CZ" sz="1400" err="1"/>
+              <a:t>Greece</a:t>
+            </a:r>
+            <a:r>
+              <a:rPr lang="cs-CZ" sz="1400"/>
+              <a:t>. (2021). </a:t>
+            </a:r>
+            <a:r>
+              <a:rPr lang="cs-CZ" sz="1400" err="1"/>
+              <a:t>Healthy</a:t>
+            </a:r>
+            <a:r>
+              <a:rPr lang="cs-CZ" sz="1400"/>
+              <a:t> food </a:t>
+            </a:r>
+            <a:r>
+              <a:rPr lang="cs-CZ" sz="1400" err="1"/>
+              <a:t>trends</a:t>
+            </a:r>
+            <a:r>
+              <a:rPr lang="cs-CZ" sz="1400"/>
+              <a:t> </a:t>
+            </a:r>
+            <a:r>
+              <a:rPr lang="cs-CZ" sz="1400" err="1"/>
+              <a:t>help</a:t>
+            </a:r>
+            <a:r>
+              <a:rPr lang="cs-CZ" sz="1400"/>
+              <a:t> drive </a:t>
+            </a:r>
+            <a:r>
+              <a:rPr lang="cs-CZ" sz="1400" err="1"/>
+              <a:t>record</a:t>
+            </a:r>
+            <a:r>
+              <a:rPr lang="cs-CZ" sz="1400"/>
+              <a:t> </a:t>
+            </a:r>
+            <a:r>
+              <a:rPr lang="cs-CZ" sz="1400" err="1"/>
+              <a:t>Greek</a:t>
+            </a:r>
+            <a:r>
+              <a:rPr lang="cs-CZ" sz="1400"/>
+              <a:t> </a:t>
+            </a:r>
+            <a:r>
+              <a:rPr lang="cs-CZ" sz="1400" err="1"/>
+              <a:t>feta</a:t>
+            </a:r>
+            <a:r>
+              <a:rPr lang="cs-CZ" sz="1400"/>
+              <a:t>, </a:t>
+            </a:r>
+            <a:r>
+              <a:rPr lang="cs-CZ" sz="1400" err="1"/>
+              <a:t>yogurt</a:t>
+            </a:r>
+            <a:r>
+              <a:rPr lang="cs-CZ" sz="1400"/>
+              <a:t> </a:t>
+            </a:r>
+            <a:r>
+              <a:rPr lang="cs-CZ" sz="1400" err="1"/>
+              <a:t>exports</a:t>
+            </a:r>
+            <a:r>
+              <a:rPr lang="cs-CZ" sz="1400"/>
+              <a:t>. </a:t>
+            </a:r>
+            <a:r>
+              <a:rPr lang="cs-CZ" sz="1400">
+                <a:hlinkClick r:id="rId3"/>
+              </a:rPr>
+              <a:t>https://newsletters.enterprisegreece.gov.gr/newsletter-articles/healthy-food-trends-help-drive-record-greek-feta-yogurt-exports/</a:t>
+            </a:r>
+            <a:endParaRPr lang="cs-CZ" sz="1400"/>
+          </a:p>
+          <a:p>
+            <a:pPr marL="342900" indent="-342900">
+              <a:buFont typeface="Arial" panose="020B0604020202020204" pitchFamily="34" charset="0"/>
+              <a:buChar char="•"/>
+            </a:pPr>
+            <a:r>
+              <a:rPr lang="cs-CZ" sz="1400"/>
+              <a:t>FAO (2024). </a:t>
+            </a:r>
+            <a:r>
+              <a:rPr lang="cs-CZ" sz="1400" err="1"/>
+              <a:t>Gateway</a:t>
+            </a:r>
+            <a:r>
+              <a:rPr lang="cs-CZ" sz="1400"/>
+              <a:t> to </a:t>
+            </a:r>
+            <a:r>
+              <a:rPr lang="cs-CZ" sz="1400" err="1"/>
+              <a:t>dairy</a:t>
+            </a:r>
+            <a:r>
+              <a:rPr lang="cs-CZ" sz="1400"/>
+              <a:t> </a:t>
+            </a:r>
+            <a:r>
+              <a:rPr lang="cs-CZ" sz="1400" err="1"/>
+              <a:t>production</a:t>
+            </a:r>
+            <a:r>
+              <a:rPr lang="cs-CZ" sz="1400"/>
+              <a:t> and </a:t>
+            </a:r>
+            <a:r>
+              <a:rPr lang="cs-CZ" sz="1400" err="1"/>
+              <a:t>products</a:t>
+            </a:r>
+            <a:r>
+              <a:rPr lang="cs-CZ" sz="1400"/>
+              <a:t>. Food and </a:t>
+            </a:r>
+            <a:r>
+              <a:rPr lang="cs-CZ" sz="1400" err="1"/>
+              <a:t>Agriculture</a:t>
+            </a:r>
+            <a:r>
+              <a:rPr lang="cs-CZ" sz="1400"/>
+              <a:t> </a:t>
+            </a:r>
+            <a:r>
+              <a:rPr lang="cs-CZ" sz="1400" err="1"/>
+              <a:t>Organization</a:t>
+            </a:r>
+            <a:r>
+              <a:rPr lang="cs-CZ" sz="1400"/>
+              <a:t> </a:t>
+            </a:r>
+            <a:r>
+              <a:rPr lang="cs-CZ" sz="1400" err="1"/>
+              <a:t>of</a:t>
+            </a:r>
+            <a:r>
+              <a:rPr lang="cs-CZ" sz="1400"/>
+              <a:t> </a:t>
+            </a:r>
+            <a:r>
+              <a:rPr lang="cs-CZ" sz="1400" err="1"/>
+              <a:t>the</a:t>
+            </a:r>
+            <a:r>
+              <a:rPr lang="cs-CZ" sz="1400"/>
+              <a:t> United </a:t>
+            </a:r>
+            <a:r>
+              <a:rPr lang="cs-CZ" sz="1400" err="1"/>
+              <a:t>Nations</a:t>
+            </a:r>
+            <a:r>
+              <a:rPr lang="cs-CZ" sz="1400"/>
+              <a:t>. </a:t>
+            </a:r>
+            <a:r>
+              <a:rPr lang="cs-CZ" sz="1400">
+                <a:hlinkClick r:id="rId4"/>
+              </a:rPr>
+              <a:t>https://www.fao.org/dairy-production-products/production/milk-production/en</a:t>
+            </a:r>
+            <a:endParaRPr lang="cs-CZ" sz="1400"/>
+          </a:p>
+          <a:p>
+            <a:pPr marL="342900" indent="-342900">
+              <a:buFont typeface="Arial" panose="020B0604020202020204" pitchFamily="34" charset="0"/>
+              <a:buChar char="•"/>
+            </a:pPr>
+            <a:endParaRPr lang="cs-CZ" sz="1400"/>
+          </a:p>
+          <a:p>
+            <a:br>
+              <a:rPr lang="cs-CZ"/>
+            </a:br>
+            <a:endParaRPr lang="en-US"/>
+          </a:p>
+        </p:txBody>
+      </p:sp>
+      <p:sp>
+        <p:nvSpPr>
+          <p:cNvPr id="3" name="Text Placeholder 2">
+            <a:extLst>
+              <a:ext uri="{FF2B5EF4-FFF2-40B4-BE49-F238E27FC236}">
+                <a16:creationId xmlns:a16="http://schemas.microsoft.com/office/drawing/2014/main" id="{67B607FE-04CD-5A93-691C-2EFD2CE257E3}"/>
+              </a:ext>
+            </a:extLst>
+          </p:cNvPr>
+          <p:cNvSpPr>
+            <a:spLocks noGrp="1"/>
+          </p:cNvSpPr>
+          <p:nvPr>
+            <p:ph type="body" sz="quarter" idx="14"/>
+          </p:nvPr>
+        </p:nvSpPr>
+        <p:spPr/>
+        <p:txBody>
+          <a:bodyPr/>
+          <a:lstStyle/>
+          <a:p>
+            <a:r>
+              <a:rPr lang="en-US" err="1"/>
+              <a:t>Zdroje</a:t>
+            </a:r>
+            <a:endParaRPr lang="en-US"/>
+          </a:p>
+        </p:txBody>
+      </p:sp>
+    </p:spTree>
+    <p:extLst>
+      <p:ext uri="{BB962C8B-B14F-4D97-AF65-F5344CB8AC3E}">
+        <p14:creationId xmlns:p14="http://schemas.microsoft.com/office/powerpoint/2010/main" val="2231974394"/>
       </p:ext>
     </p:extLst>
   </p:cSld>
@@ -13786,418 +15059,6 @@
       </p:grpSpPr>
       <p:sp>
         <p:nvSpPr>
-          <p:cNvPr id="2" name="Content Placeholder 1">
-            <a:extLst>
-              <a:ext uri="{FF2B5EF4-FFF2-40B4-BE49-F238E27FC236}">
-                <a16:creationId xmlns:a16="http://schemas.microsoft.com/office/drawing/2014/main" id="{AD36D2AB-4233-60BE-3951-E40B63524AFF}"/>
-              </a:ext>
-            </a:extLst>
-          </p:cNvPr>
-          <p:cNvSpPr>
-            <a:spLocks noGrp="1"/>
-          </p:cNvSpPr>
-          <p:nvPr>
-            <p:ph sz="half" idx="1"/>
-          </p:nvPr>
-        </p:nvSpPr>
-        <p:spPr/>
-        <p:txBody>
-          <a:bodyPr lIns="0" tIns="0" rIns="0" bIns="0" anchor="t"/>
-          <a:lstStyle/>
-          <a:p>
-            <a:pPr marL="285750" indent="-285750">
-              <a:buFont typeface="Arial"/>
-              <a:buChar char="•"/>
-            </a:pPr>
-            <a:r>
-              <a:rPr lang="en-US" err="1">
-                <a:ea typeface="+mn-lt"/>
-                <a:cs typeface="+mn-lt"/>
-              </a:rPr>
-              <a:t>Všechny</a:t>
-            </a:r>
-            <a:r>
-              <a:rPr lang="en-US">
-                <a:ea typeface="+mn-lt"/>
-                <a:cs typeface="+mn-lt"/>
-              </a:rPr>
-              <a:t> </a:t>
-            </a:r>
-            <a:r>
-              <a:rPr lang="en-US" err="1">
-                <a:ea typeface="+mn-lt"/>
-                <a:cs typeface="+mn-lt"/>
-              </a:rPr>
-              <a:t>tři</a:t>
-            </a:r>
-            <a:r>
-              <a:rPr lang="en-US">
-                <a:ea typeface="+mn-lt"/>
-                <a:cs typeface="+mn-lt"/>
-              </a:rPr>
-              <a:t> </a:t>
-            </a:r>
-            <a:r>
-              <a:rPr lang="en-US" err="1">
-                <a:ea typeface="+mn-lt"/>
-                <a:cs typeface="+mn-lt"/>
-              </a:rPr>
-              <a:t>cenové</a:t>
-            </a:r>
-            <a:r>
-              <a:rPr lang="en-US">
-                <a:ea typeface="+mn-lt"/>
-                <a:cs typeface="+mn-lt"/>
-              </a:rPr>
-              <a:t> </a:t>
-            </a:r>
-            <a:r>
-              <a:rPr lang="en-US" err="1">
-                <a:ea typeface="+mn-lt"/>
-                <a:cs typeface="+mn-lt"/>
-              </a:rPr>
-              <a:t>řady</a:t>
-            </a:r>
-            <a:r>
-              <a:rPr lang="en-US">
-                <a:ea typeface="+mn-lt"/>
-                <a:cs typeface="+mn-lt"/>
-              </a:rPr>
-              <a:t> </a:t>
-            </a:r>
-            <a:r>
-              <a:rPr lang="en-US" err="1">
-                <a:ea typeface="+mn-lt"/>
-                <a:cs typeface="+mn-lt"/>
-              </a:rPr>
-              <a:t>vykazují</a:t>
-            </a:r>
-            <a:r>
-              <a:rPr lang="en-US">
-                <a:ea typeface="+mn-lt"/>
-                <a:cs typeface="+mn-lt"/>
-              </a:rPr>
-              <a:t> </a:t>
-            </a:r>
-            <a:r>
-              <a:rPr lang="en-US" err="1">
-                <a:ea typeface="+mn-lt"/>
-                <a:cs typeface="+mn-lt"/>
-              </a:rPr>
-              <a:t>dlouhodobě</a:t>
-            </a:r>
-            <a:r>
-              <a:rPr lang="en-US">
-                <a:ea typeface="+mn-lt"/>
-                <a:cs typeface="+mn-lt"/>
-              </a:rPr>
-              <a:t> </a:t>
-            </a:r>
-            <a:r>
-              <a:rPr lang="en-US" b="1" err="1">
-                <a:ea typeface="+mn-lt"/>
-                <a:cs typeface="+mn-lt"/>
-              </a:rPr>
-              <a:t>rostoucí</a:t>
-            </a:r>
-            <a:r>
-              <a:rPr lang="en-US" b="1">
-                <a:ea typeface="+mn-lt"/>
-                <a:cs typeface="+mn-lt"/>
-              </a:rPr>
-              <a:t> trend</a:t>
-            </a:r>
-            <a:r>
-              <a:rPr lang="en-US">
-                <a:ea typeface="+mn-lt"/>
-                <a:cs typeface="+mn-lt"/>
-              </a:rPr>
-              <a:t>.</a:t>
-            </a:r>
-            <a:endParaRPr lang="en-US"/>
-          </a:p>
-          <a:p>
-            <a:pPr marL="285750" indent="-285750">
-              <a:buFont typeface="Arial"/>
-              <a:buChar char="•"/>
-            </a:pPr>
-            <a:r>
-              <a:rPr lang="en-US">
-                <a:ea typeface="+mn-lt"/>
-                <a:cs typeface="+mn-lt"/>
-              </a:rPr>
-              <a:t>Největší </a:t>
-            </a:r>
-            <a:r>
-              <a:rPr lang="en-US" err="1">
-                <a:ea typeface="+mn-lt"/>
-                <a:cs typeface="+mn-lt"/>
-              </a:rPr>
-              <a:t>dynamiku</a:t>
-            </a:r>
-            <a:r>
-              <a:rPr lang="en-US">
-                <a:ea typeface="+mn-lt"/>
-                <a:cs typeface="+mn-lt"/>
-              </a:rPr>
-              <a:t> a </a:t>
-            </a:r>
-            <a:r>
-              <a:rPr lang="en-US" err="1">
-                <a:ea typeface="+mn-lt"/>
-                <a:cs typeface="+mn-lt"/>
-              </a:rPr>
-              <a:t>volatilitu</a:t>
-            </a:r>
-            <a:r>
-              <a:rPr lang="en-US">
-                <a:ea typeface="+mn-lt"/>
-                <a:cs typeface="+mn-lt"/>
-              </a:rPr>
-              <a:t> </a:t>
-            </a:r>
-            <a:r>
-              <a:rPr lang="en-US" err="1">
-                <a:ea typeface="+mn-lt"/>
-                <a:cs typeface="+mn-lt"/>
-              </a:rPr>
-              <a:t>měla</a:t>
-            </a:r>
-            <a:r>
-              <a:rPr lang="en-US">
-                <a:ea typeface="+mn-lt"/>
-                <a:cs typeface="+mn-lt"/>
-              </a:rPr>
-              <a:t> </a:t>
-            </a:r>
-            <a:r>
-              <a:rPr lang="en-US" b="1">
-                <a:ea typeface="+mn-lt"/>
-                <a:cs typeface="+mn-lt"/>
-              </a:rPr>
-              <a:t>CZV </a:t>
-            </a:r>
-            <a:r>
-              <a:rPr lang="en-US" b="1" err="1">
-                <a:ea typeface="+mn-lt"/>
-                <a:cs typeface="+mn-lt"/>
-              </a:rPr>
-              <a:t>mléka</a:t>
-            </a:r>
-            <a:r>
-              <a:rPr lang="en-US">
-                <a:ea typeface="+mn-lt"/>
-                <a:cs typeface="+mn-lt"/>
-              </a:rPr>
-              <a:t>.</a:t>
-            </a:r>
-            <a:endParaRPr lang="en-US"/>
-          </a:p>
-          <a:p>
-            <a:pPr marL="285750" indent="-285750">
-              <a:buFont typeface="Arial"/>
-              <a:buChar char="•"/>
-            </a:pPr>
-            <a:r>
-              <a:rPr lang="en-US">
-                <a:ea typeface="+mn-lt"/>
-                <a:cs typeface="+mn-lt"/>
-              </a:rPr>
-              <a:t>Do </a:t>
-            </a:r>
-            <a:r>
-              <a:rPr lang="en-US" err="1">
-                <a:ea typeface="+mn-lt"/>
-                <a:cs typeface="+mn-lt"/>
-              </a:rPr>
-              <a:t>roku</a:t>
-            </a:r>
-            <a:r>
-              <a:rPr lang="en-US">
-                <a:ea typeface="+mn-lt"/>
-                <a:cs typeface="+mn-lt"/>
-              </a:rPr>
-              <a:t> 2021 </a:t>
-            </a:r>
-            <a:r>
-              <a:rPr lang="en-US" err="1">
-                <a:ea typeface="+mn-lt"/>
-                <a:cs typeface="+mn-lt"/>
-              </a:rPr>
-              <a:t>byl</a:t>
-            </a:r>
-            <a:r>
-              <a:rPr lang="en-US">
-                <a:ea typeface="+mn-lt"/>
-                <a:cs typeface="+mn-lt"/>
-              </a:rPr>
-              <a:t> </a:t>
-            </a:r>
-            <a:r>
-              <a:rPr lang="en-US" err="1">
-                <a:ea typeface="+mn-lt"/>
-                <a:cs typeface="+mn-lt"/>
-              </a:rPr>
-              <a:t>vývoj</a:t>
-            </a:r>
-            <a:r>
-              <a:rPr lang="en-US">
-                <a:ea typeface="+mn-lt"/>
-                <a:cs typeface="+mn-lt"/>
-              </a:rPr>
-              <a:t> CPV a SC </a:t>
-            </a:r>
-            <a:r>
-              <a:rPr lang="en-US" err="1">
-                <a:ea typeface="+mn-lt"/>
-                <a:cs typeface="+mn-lt"/>
-              </a:rPr>
-              <a:t>spíše</a:t>
-            </a:r>
-            <a:r>
-              <a:rPr lang="en-US">
-                <a:ea typeface="+mn-lt"/>
-                <a:cs typeface="+mn-lt"/>
-              </a:rPr>
-              <a:t> </a:t>
-            </a:r>
-            <a:r>
-              <a:rPr lang="en-US" err="1">
-                <a:ea typeface="+mn-lt"/>
-                <a:cs typeface="+mn-lt"/>
-              </a:rPr>
-              <a:t>mírný</a:t>
-            </a:r>
-            <a:r>
-              <a:rPr lang="en-US">
-                <a:ea typeface="+mn-lt"/>
-                <a:cs typeface="+mn-lt"/>
-              </a:rPr>
-              <a:t>.</a:t>
-            </a:r>
-            <a:endParaRPr lang="en-US"/>
-          </a:p>
-          <a:p>
-            <a:pPr marL="285750" indent="-285750">
-              <a:buFont typeface="Arial"/>
-              <a:buChar char="•"/>
-            </a:pPr>
-            <a:r>
-              <a:rPr lang="en-US">
-                <a:ea typeface="+mn-lt"/>
-                <a:cs typeface="+mn-lt"/>
-              </a:rPr>
-              <a:t>Po </a:t>
-            </a:r>
-            <a:r>
-              <a:rPr lang="en-US" err="1">
-                <a:ea typeface="+mn-lt"/>
-                <a:cs typeface="+mn-lt"/>
-              </a:rPr>
-              <a:t>roce</a:t>
-            </a:r>
-            <a:r>
-              <a:rPr lang="en-US">
-                <a:ea typeface="+mn-lt"/>
-                <a:cs typeface="+mn-lt"/>
-              </a:rPr>
-              <a:t> 2021 </a:t>
-            </a:r>
-            <a:r>
-              <a:rPr lang="en-US" err="1">
-                <a:ea typeface="+mn-lt"/>
-                <a:cs typeface="+mn-lt"/>
-              </a:rPr>
-              <a:t>došlo</a:t>
-            </a:r>
-            <a:r>
-              <a:rPr lang="en-US">
-                <a:ea typeface="+mn-lt"/>
-                <a:cs typeface="+mn-lt"/>
-              </a:rPr>
-              <a:t> k </a:t>
-            </a:r>
-            <a:r>
-              <a:rPr lang="en-US" err="1">
-                <a:ea typeface="+mn-lt"/>
-                <a:cs typeface="+mn-lt"/>
-              </a:rPr>
-              <a:t>výraznějšímu</a:t>
-            </a:r>
-            <a:r>
-              <a:rPr lang="en-US">
-                <a:ea typeface="+mn-lt"/>
-                <a:cs typeface="+mn-lt"/>
-              </a:rPr>
-              <a:t> </a:t>
-            </a:r>
-            <a:r>
-              <a:rPr lang="en-US" err="1">
-                <a:ea typeface="+mn-lt"/>
-                <a:cs typeface="+mn-lt"/>
-              </a:rPr>
-              <a:t>růstu</a:t>
-            </a:r>
-            <a:r>
-              <a:rPr lang="en-US">
-                <a:ea typeface="+mn-lt"/>
-                <a:cs typeface="+mn-lt"/>
-              </a:rPr>
-              <a:t> </a:t>
-            </a:r>
-            <a:r>
-              <a:rPr lang="en-US" err="1">
-                <a:ea typeface="+mn-lt"/>
-                <a:cs typeface="+mn-lt"/>
-              </a:rPr>
-              <a:t>všech</a:t>
-            </a:r>
-            <a:r>
-              <a:rPr lang="en-US">
-                <a:ea typeface="+mn-lt"/>
-                <a:cs typeface="+mn-lt"/>
-              </a:rPr>
-              <a:t> </a:t>
-            </a:r>
-            <a:r>
-              <a:rPr lang="en-US" err="1">
-                <a:ea typeface="+mn-lt"/>
-                <a:cs typeface="+mn-lt"/>
-              </a:rPr>
-              <a:t>cenových</a:t>
-            </a:r>
-            <a:r>
-              <a:rPr lang="en-US">
-                <a:ea typeface="+mn-lt"/>
-                <a:cs typeface="+mn-lt"/>
-              </a:rPr>
-              <a:t> </a:t>
-            </a:r>
-            <a:r>
-              <a:rPr lang="en-US" err="1">
-                <a:ea typeface="+mn-lt"/>
-                <a:cs typeface="+mn-lt"/>
-              </a:rPr>
-              <a:t>úrovní</a:t>
-            </a:r>
-            <a:r>
-              <a:rPr lang="en-US">
-                <a:ea typeface="+mn-lt"/>
-                <a:cs typeface="+mn-lt"/>
-              </a:rPr>
-              <a:t>.</a:t>
-            </a:r>
-            <a:endParaRPr lang="en-US"/>
-          </a:p>
-          <a:p>
-            <a:endParaRPr lang="en-US">
-              <a:cs typeface="Arial"/>
-            </a:endParaRPr>
-          </a:p>
-        </p:txBody>
-      </p:sp>
-      <p:sp>
-        <p:nvSpPr>
           <p:cNvPr id="3" name="Text Placeholder 2">
             <a:extLst>
               <a:ext uri="{FF2B5EF4-FFF2-40B4-BE49-F238E27FC236}">
@@ -14262,6 +15123,546 @@
             <a:extLst>
               <a:ext uri="{FF2B5EF4-FFF2-40B4-BE49-F238E27FC236}">
                 <a16:creationId xmlns:a16="http://schemas.microsoft.com/office/drawing/2014/main" id="{6636B4A4-C77C-32BD-797D-A8CD5CD59881}"/>
+              </a:ext>
+            </a:extLst>
+          </p:cNvPr>
+          <p:cNvPicPr>
+            <a:picLocks noGrp="1" noChangeAspect="1"/>
+          </p:cNvPicPr>
+          <p:nvPr>
+            <p:ph sz="half" idx="15"/>
+          </p:nvPr>
+        </p:nvPicPr>
+        <p:blipFill>
+          <a:blip r:embed="rId2"/>
+          <a:stretch>
+            <a:fillRect/>
+          </a:stretch>
+        </p:blipFill>
+        <p:spPr>
+          <a:xfrm>
+            <a:off x="990598" y="1012896"/>
+            <a:ext cx="10395859" cy="4921628"/>
+          </a:xfrm>
+          <a:prstGeom prst="rect">
+            <a:avLst/>
+          </a:prstGeom>
+        </p:spPr>
+      </p:pic>
+    </p:spTree>
+    <p:extLst>
+      <p:ext uri="{BB962C8B-B14F-4D97-AF65-F5344CB8AC3E}">
+        <p14:creationId xmlns:p14="http://schemas.microsoft.com/office/powerpoint/2010/main" val="2622279334"/>
+      </p:ext>
+    </p:extLst>
+  </p:cSld>
+  <p:clrMapOvr>
+    <a:masterClrMapping/>
+  </p:clrMapOvr>
+</p:sld>
+</file>
+
+<file path=ppt/slides/slide7.xml><?xml version="1.0" encoding="utf-8"?>
+<p:sld xmlns:a="http://schemas.openxmlformats.org/drawingml/2006/main" xmlns:r="http://schemas.openxmlformats.org/officeDocument/2006/relationships" xmlns:p="http://schemas.openxmlformats.org/presentationml/2006/main">
+  <p:cSld>
+    <p:spTree>
+      <p:nvGrpSpPr>
+        <p:cNvPr id="1" name="">
+          <a:extLst>
+            <a:ext uri="{FF2B5EF4-FFF2-40B4-BE49-F238E27FC236}">
+              <a16:creationId xmlns:a16="http://schemas.microsoft.com/office/drawing/2014/main" id="{F6387EFD-374A-3E11-8DC6-363B189D9B28}"/>
+            </a:ext>
+          </a:extLst>
+        </p:cNvPr>
+        <p:cNvGrpSpPr/>
+        <p:nvPr/>
+      </p:nvGrpSpPr>
+      <p:grpSpPr>
+        <a:xfrm>
+          <a:off x="0" y="0"/>
+          <a:ext cx="0" cy="0"/>
+          <a:chOff x="0" y="0"/>
+          <a:chExt cx="0" cy="0"/>
+        </a:xfrm>
+      </p:grpSpPr>
+      <p:sp>
+        <p:nvSpPr>
+          <p:cNvPr id="2" name="Content Placeholder 1">
+            <a:extLst>
+              <a:ext uri="{FF2B5EF4-FFF2-40B4-BE49-F238E27FC236}">
+                <a16:creationId xmlns:a16="http://schemas.microsoft.com/office/drawing/2014/main" id="{A66740B4-A34D-2EA9-84E1-D99609A4D9E2}"/>
+              </a:ext>
+            </a:extLst>
+          </p:cNvPr>
+          <p:cNvSpPr>
+            <a:spLocks noGrp="1"/>
+          </p:cNvSpPr>
+          <p:nvPr>
+            <p:ph sz="half" idx="1"/>
+          </p:nvPr>
+        </p:nvSpPr>
+        <p:spPr/>
+        <p:txBody>
+          <a:bodyPr lIns="0" tIns="0" rIns="0" bIns="0" anchor="t"/>
+          <a:lstStyle/>
+          <a:p>
+            <a:pPr marL="285750" indent="-285750">
+              <a:buFont typeface="Arial"/>
+              <a:buChar char="•"/>
+            </a:pPr>
+            <a:r>
+              <a:rPr lang="en-US" err="1">
+                <a:ea typeface="+mn-lt"/>
+                <a:cs typeface="+mn-lt"/>
+              </a:rPr>
+              <a:t>Všechny</a:t>
+            </a:r>
+            <a:r>
+              <a:rPr lang="en-US">
+                <a:ea typeface="+mn-lt"/>
+                <a:cs typeface="+mn-lt"/>
+              </a:rPr>
+              <a:t> </a:t>
+            </a:r>
+            <a:r>
+              <a:rPr lang="en-US" err="1">
+                <a:ea typeface="+mn-lt"/>
+                <a:cs typeface="+mn-lt"/>
+              </a:rPr>
+              <a:t>tři</a:t>
+            </a:r>
+            <a:r>
+              <a:rPr lang="en-US">
+                <a:ea typeface="+mn-lt"/>
+                <a:cs typeface="+mn-lt"/>
+              </a:rPr>
+              <a:t> </a:t>
+            </a:r>
+            <a:r>
+              <a:rPr lang="en-US" err="1">
+                <a:ea typeface="+mn-lt"/>
+                <a:cs typeface="+mn-lt"/>
+              </a:rPr>
+              <a:t>cenové</a:t>
+            </a:r>
+            <a:r>
+              <a:rPr lang="en-US">
+                <a:ea typeface="+mn-lt"/>
+                <a:cs typeface="+mn-lt"/>
+              </a:rPr>
+              <a:t> </a:t>
+            </a:r>
+            <a:r>
+              <a:rPr lang="en-US" err="1">
+                <a:ea typeface="+mn-lt"/>
+                <a:cs typeface="+mn-lt"/>
+              </a:rPr>
+              <a:t>řady</a:t>
+            </a:r>
+            <a:r>
+              <a:rPr lang="en-US">
+                <a:ea typeface="+mn-lt"/>
+                <a:cs typeface="+mn-lt"/>
+              </a:rPr>
+              <a:t> </a:t>
+            </a:r>
+            <a:r>
+              <a:rPr lang="en-US" err="1">
+                <a:ea typeface="+mn-lt"/>
+                <a:cs typeface="+mn-lt"/>
+              </a:rPr>
+              <a:t>vykazují</a:t>
+            </a:r>
+            <a:r>
+              <a:rPr lang="en-US">
+                <a:ea typeface="+mn-lt"/>
+                <a:cs typeface="+mn-lt"/>
+              </a:rPr>
+              <a:t> </a:t>
+            </a:r>
+            <a:r>
+              <a:rPr lang="en-US" err="1">
+                <a:ea typeface="+mn-lt"/>
+                <a:cs typeface="+mn-lt"/>
+              </a:rPr>
+              <a:t>dlouhodobě</a:t>
+            </a:r>
+            <a:r>
+              <a:rPr lang="en-US">
+                <a:ea typeface="+mn-lt"/>
+                <a:cs typeface="+mn-lt"/>
+              </a:rPr>
+              <a:t> </a:t>
+            </a:r>
+            <a:r>
+              <a:rPr lang="en-US" b="1" err="1">
+                <a:ea typeface="+mn-lt"/>
+                <a:cs typeface="+mn-lt"/>
+              </a:rPr>
+              <a:t>rostoucí</a:t>
+            </a:r>
+            <a:r>
+              <a:rPr lang="en-US" b="1">
+                <a:ea typeface="+mn-lt"/>
+                <a:cs typeface="+mn-lt"/>
+              </a:rPr>
+              <a:t> trend</a:t>
+            </a:r>
+            <a:r>
+              <a:rPr lang="en-US">
+                <a:ea typeface="+mn-lt"/>
+                <a:cs typeface="+mn-lt"/>
+              </a:rPr>
+              <a:t>.</a:t>
+            </a:r>
+            <a:endParaRPr lang="en-US"/>
+          </a:p>
+          <a:p>
+            <a:pPr marL="285750" indent="-285750">
+              <a:buFont typeface="Arial"/>
+              <a:buChar char="•"/>
+            </a:pPr>
+            <a:r>
+              <a:rPr lang="en-US">
+                <a:ea typeface="+mn-lt"/>
+                <a:cs typeface="+mn-lt"/>
+              </a:rPr>
+              <a:t>Největší </a:t>
+            </a:r>
+            <a:r>
+              <a:rPr lang="en-US" err="1">
+                <a:ea typeface="+mn-lt"/>
+                <a:cs typeface="+mn-lt"/>
+              </a:rPr>
+              <a:t>dynamiku</a:t>
+            </a:r>
+            <a:r>
+              <a:rPr lang="en-US">
+                <a:ea typeface="+mn-lt"/>
+                <a:cs typeface="+mn-lt"/>
+              </a:rPr>
+              <a:t> a </a:t>
+            </a:r>
+            <a:r>
+              <a:rPr lang="en-US" err="1">
+                <a:ea typeface="+mn-lt"/>
+                <a:cs typeface="+mn-lt"/>
+              </a:rPr>
+              <a:t>volatilitu</a:t>
+            </a:r>
+            <a:r>
+              <a:rPr lang="en-US">
+                <a:ea typeface="+mn-lt"/>
+                <a:cs typeface="+mn-lt"/>
+              </a:rPr>
+              <a:t> </a:t>
+            </a:r>
+            <a:r>
+              <a:rPr lang="en-US" err="1">
+                <a:ea typeface="+mn-lt"/>
+                <a:cs typeface="+mn-lt"/>
+              </a:rPr>
+              <a:t>měla</a:t>
+            </a:r>
+            <a:r>
+              <a:rPr lang="en-US">
+                <a:ea typeface="+mn-lt"/>
+                <a:cs typeface="+mn-lt"/>
+              </a:rPr>
+              <a:t> </a:t>
+            </a:r>
+            <a:r>
+              <a:rPr lang="en-US" b="1">
+                <a:ea typeface="+mn-lt"/>
+                <a:cs typeface="+mn-lt"/>
+              </a:rPr>
+              <a:t>CZV </a:t>
+            </a:r>
+            <a:r>
+              <a:rPr lang="en-US" b="1" err="1">
+                <a:ea typeface="+mn-lt"/>
+                <a:cs typeface="+mn-lt"/>
+              </a:rPr>
+              <a:t>mléka</a:t>
+            </a:r>
+            <a:r>
+              <a:rPr lang="en-US">
+                <a:ea typeface="+mn-lt"/>
+                <a:cs typeface="+mn-lt"/>
+              </a:rPr>
+              <a:t>.</a:t>
+            </a:r>
+            <a:endParaRPr lang="en-US"/>
+          </a:p>
+          <a:p>
+            <a:pPr marL="285750" indent="-285750">
+              <a:buFont typeface="Arial"/>
+              <a:buChar char="•"/>
+            </a:pPr>
+            <a:r>
+              <a:rPr lang="en-US">
+                <a:ea typeface="+mn-lt"/>
+                <a:cs typeface="+mn-lt"/>
+              </a:rPr>
+              <a:t>Do </a:t>
+            </a:r>
+            <a:r>
+              <a:rPr lang="en-US" err="1">
+                <a:ea typeface="+mn-lt"/>
+                <a:cs typeface="+mn-lt"/>
+              </a:rPr>
+              <a:t>roku</a:t>
+            </a:r>
+            <a:r>
+              <a:rPr lang="en-US">
+                <a:ea typeface="+mn-lt"/>
+                <a:cs typeface="+mn-lt"/>
+              </a:rPr>
+              <a:t> 2021 </a:t>
+            </a:r>
+            <a:r>
+              <a:rPr lang="en-US" err="1">
+                <a:ea typeface="+mn-lt"/>
+                <a:cs typeface="+mn-lt"/>
+              </a:rPr>
+              <a:t>byl</a:t>
+            </a:r>
+            <a:r>
+              <a:rPr lang="en-US">
+                <a:ea typeface="+mn-lt"/>
+                <a:cs typeface="+mn-lt"/>
+              </a:rPr>
+              <a:t> </a:t>
+            </a:r>
+            <a:r>
+              <a:rPr lang="en-US" err="1">
+                <a:ea typeface="+mn-lt"/>
+                <a:cs typeface="+mn-lt"/>
+              </a:rPr>
+              <a:t>vývoj</a:t>
+            </a:r>
+            <a:r>
+              <a:rPr lang="en-US">
+                <a:ea typeface="+mn-lt"/>
+                <a:cs typeface="+mn-lt"/>
+              </a:rPr>
+              <a:t> CPV a SC </a:t>
+            </a:r>
+            <a:r>
+              <a:rPr lang="en-US" err="1">
+                <a:ea typeface="+mn-lt"/>
+                <a:cs typeface="+mn-lt"/>
+              </a:rPr>
+              <a:t>spíše</a:t>
+            </a:r>
+            <a:r>
+              <a:rPr lang="en-US">
+                <a:ea typeface="+mn-lt"/>
+                <a:cs typeface="+mn-lt"/>
+              </a:rPr>
+              <a:t> </a:t>
+            </a:r>
+            <a:r>
+              <a:rPr lang="en-US" err="1">
+                <a:ea typeface="+mn-lt"/>
+                <a:cs typeface="+mn-lt"/>
+              </a:rPr>
+              <a:t>mírný</a:t>
+            </a:r>
+            <a:r>
+              <a:rPr lang="en-US">
+                <a:ea typeface="+mn-lt"/>
+                <a:cs typeface="+mn-lt"/>
+              </a:rPr>
+              <a:t>.</a:t>
+            </a:r>
+            <a:endParaRPr lang="en-US"/>
+          </a:p>
+          <a:p>
+            <a:pPr marL="285750" indent="-285750">
+              <a:buFont typeface="Arial"/>
+              <a:buChar char="•"/>
+            </a:pPr>
+            <a:r>
+              <a:rPr lang="en-US">
+                <a:ea typeface="+mn-lt"/>
+                <a:cs typeface="+mn-lt"/>
+              </a:rPr>
+              <a:t>Po </a:t>
+            </a:r>
+            <a:r>
+              <a:rPr lang="en-US" err="1">
+                <a:ea typeface="+mn-lt"/>
+                <a:cs typeface="+mn-lt"/>
+              </a:rPr>
+              <a:t>roce</a:t>
+            </a:r>
+            <a:r>
+              <a:rPr lang="en-US">
+                <a:ea typeface="+mn-lt"/>
+                <a:cs typeface="+mn-lt"/>
+              </a:rPr>
+              <a:t> 2021 </a:t>
+            </a:r>
+            <a:r>
+              <a:rPr lang="en-US" err="1">
+                <a:ea typeface="+mn-lt"/>
+                <a:cs typeface="+mn-lt"/>
+              </a:rPr>
+              <a:t>došlo</a:t>
+            </a:r>
+            <a:r>
+              <a:rPr lang="en-US">
+                <a:ea typeface="+mn-lt"/>
+                <a:cs typeface="+mn-lt"/>
+              </a:rPr>
+              <a:t> k </a:t>
+            </a:r>
+            <a:r>
+              <a:rPr lang="en-US" err="1">
+                <a:ea typeface="+mn-lt"/>
+                <a:cs typeface="+mn-lt"/>
+              </a:rPr>
+              <a:t>výraznějšímu</a:t>
+            </a:r>
+            <a:r>
+              <a:rPr lang="en-US">
+                <a:ea typeface="+mn-lt"/>
+                <a:cs typeface="+mn-lt"/>
+              </a:rPr>
+              <a:t> </a:t>
+            </a:r>
+            <a:r>
+              <a:rPr lang="en-US" err="1">
+                <a:ea typeface="+mn-lt"/>
+                <a:cs typeface="+mn-lt"/>
+              </a:rPr>
+              <a:t>růstu</a:t>
+            </a:r>
+            <a:r>
+              <a:rPr lang="en-US">
+                <a:ea typeface="+mn-lt"/>
+                <a:cs typeface="+mn-lt"/>
+              </a:rPr>
+              <a:t> </a:t>
+            </a:r>
+            <a:r>
+              <a:rPr lang="en-US" err="1">
+                <a:ea typeface="+mn-lt"/>
+                <a:cs typeface="+mn-lt"/>
+              </a:rPr>
+              <a:t>všech</a:t>
+            </a:r>
+            <a:r>
+              <a:rPr lang="en-US">
+                <a:ea typeface="+mn-lt"/>
+                <a:cs typeface="+mn-lt"/>
+              </a:rPr>
+              <a:t> </a:t>
+            </a:r>
+            <a:r>
+              <a:rPr lang="en-US" err="1">
+                <a:ea typeface="+mn-lt"/>
+                <a:cs typeface="+mn-lt"/>
+              </a:rPr>
+              <a:t>cenových</a:t>
+            </a:r>
+            <a:r>
+              <a:rPr lang="en-US">
+                <a:ea typeface="+mn-lt"/>
+                <a:cs typeface="+mn-lt"/>
+              </a:rPr>
+              <a:t> </a:t>
+            </a:r>
+            <a:r>
+              <a:rPr lang="en-US" err="1">
+                <a:ea typeface="+mn-lt"/>
+                <a:cs typeface="+mn-lt"/>
+              </a:rPr>
+              <a:t>úrovní</a:t>
+            </a:r>
+            <a:r>
+              <a:rPr lang="en-US">
+                <a:ea typeface="+mn-lt"/>
+                <a:cs typeface="+mn-lt"/>
+              </a:rPr>
+              <a:t>.</a:t>
+            </a:r>
+            <a:endParaRPr lang="en-US"/>
+          </a:p>
+          <a:p>
+            <a:endParaRPr lang="en-US">
+              <a:cs typeface="Arial"/>
+            </a:endParaRPr>
+          </a:p>
+        </p:txBody>
+      </p:sp>
+      <p:sp>
+        <p:nvSpPr>
+          <p:cNvPr id="3" name="Text Placeholder 2">
+            <a:extLst>
+              <a:ext uri="{FF2B5EF4-FFF2-40B4-BE49-F238E27FC236}">
+                <a16:creationId xmlns:a16="http://schemas.microsoft.com/office/drawing/2014/main" id="{5FBC5009-F7F5-DDAC-99B4-545CE841E958}"/>
+              </a:ext>
+            </a:extLst>
+          </p:cNvPr>
+          <p:cNvSpPr>
+            <a:spLocks noGrp="1"/>
+          </p:cNvSpPr>
+          <p:nvPr>
+            <p:ph type="body" sz="quarter" idx="14"/>
+          </p:nvPr>
+        </p:nvSpPr>
+        <p:spPr/>
+        <p:txBody>
+          <a:bodyPr lIns="0" tIns="0" rIns="0" bIns="0" anchor="t"/>
+          <a:lstStyle/>
+          <a:p>
+            <a:r>
+              <a:rPr lang="en-US" b="0">
+                <a:ea typeface="+mn-lt"/>
+                <a:cs typeface="+mn-lt"/>
+              </a:rPr>
+              <a:t>3) </a:t>
+            </a:r>
+            <a:r>
+              <a:rPr lang="en-US" err="1">
+                <a:ea typeface="+mn-lt"/>
+                <a:cs typeface="+mn-lt"/>
+              </a:rPr>
+              <a:t>Nominální</a:t>
+            </a:r>
+            <a:r>
+              <a:rPr lang="en-US">
+                <a:ea typeface="+mn-lt"/>
+                <a:cs typeface="+mn-lt"/>
+              </a:rPr>
+              <a:t> </a:t>
+            </a:r>
+            <a:r>
+              <a:rPr lang="en-US" err="1">
+                <a:ea typeface="+mn-lt"/>
+                <a:cs typeface="+mn-lt"/>
+              </a:rPr>
+              <a:t>vývoj</a:t>
+            </a:r>
+            <a:r>
+              <a:rPr lang="en-US">
+                <a:ea typeface="+mn-lt"/>
+                <a:cs typeface="+mn-lt"/>
+              </a:rPr>
+              <a:t> CZV, CPV a SC</a:t>
+            </a:r>
+            <a:endParaRPr lang="en-US"/>
+          </a:p>
+        </p:txBody>
+      </p:sp>
+      <p:pic>
+        <p:nvPicPr>
+          <p:cNvPr id="5" name="Content Placeholder 4">
+            <a:extLst>
+              <a:ext uri="{FF2B5EF4-FFF2-40B4-BE49-F238E27FC236}">
+                <a16:creationId xmlns:a16="http://schemas.microsoft.com/office/drawing/2014/main" id="{B3ABBF3A-EE67-64AA-A1FE-3FEA88BE4FB1}"/>
               </a:ext>
             </a:extLst>
           </p:cNvPr>
@@ -14291,7 +15692,7 @@
     </p:spTree>
     <p:extLst>
       <p:ext uri="{BB962C8B-B14F-4D97-AF65-F5344CB8AC3E}">
-        <p14:creationId xmlns:p14="http://schemas.microsoft.com/office/powerpoint/2010/main" val="2622279334"/>
+        <p14:creationId xmlns:p14="http://schemas.microsoft.com/office/powerpoint/2010/main" val="2249382118"/>
       </p:ext>
     </p:extLst>
   </p:cSld>
@@ -14301,7 +15702,7 @@
 </p:sld>
 </file>
 
-<file path=ppt/slides/slide7.xml><?xml version="1.0" encoding="utf-8"?>
+<file path=ppt/slides/slide8.xml><?xml version="1.0" encoding="utf-8"?>
 <p:sld xmlns:a="http://schemas.openxmlformats.org/drawingml/2006/main" xmlns:r="http://schemas.openxmlformats.org/officeDocument/2006/relationships" xmlns:p="http://schemas.openxmlformats.org/presentationml/2006/main">
   <p:cSld>
     <p:spTree>
@@ -15036,7 +16437,7 @@
 </p:sld>
 </file>
 
-<file path=ppt/slides/slide8.xml><?xml version="1.0" encoding="utf-8"?>
+<file path=ppt/slides/slide9.xml><?xml version="1.0" encoding="utf-8"?>
 <p:sld xmlns:a="http://schemas.openxmlformats.org/drawingml/2006/main" xmlns:r="http://schemas.openxmlformats.org/officeDocument/2006/relationships" xmlns:p="http://schemas.openxmlformats.org/presentationml/2006/main">
   <p:cSld>
     <p:spTree>
@@ -15466,891 +16867,6 @@
     <p:extLst>
       <p:ext uri="{BB962C8B-B14F-4D97-AF65-F5344CB8AC3E}">
         <p14:creationId xmlns:p14="http://schemas.microsoft.com/office/powerpoint/2010/main" val="3970691005"/>
-      </p:ext>
-    </p:extLst>
-  </p:cSld>
-  <p:clrMapOvr>
-    <a:masterClrMapping/>
-  </p:clrMapOvr>
-</p:sld>
-</file>
-
-<file path=ppt/slides/slide9.xml><?xml version="1.0" encoding="utf-8"?>
-<p:sld xmlns:a="http://schemas.openxmlformats.org/drawingml/2006/main" xmlns:r="http://schemas.openxmlformats.org/officeDocument/2006/relationships" xmlns:p="http://schemas.openxmlformats.org/presentationml/2006/main">
-  <p:cSld>
-    <p:spTree>
-      <p:nvGrpSpPr>
-        <p:cNvPr id="1" name=""/>
-        <p:cNvGrpSpPr/>
-        <p:nvPr/>
-      </p:nvGrpSpPr>
-      <p:grpSpPr>
-        <a:xfrm>
-          <a:off x="0" y="0"/>
-          <a:ext cx="0" cy="0"/>
-          <a:chOff x="0" y="0"/>
-          <a:chExt cx="0" cy="0"/>
-        </a:xfrm>
-      </p:grpSpPr>
-      <p:sp>
-        <p:nvSpPr>
-          <p:cNvPr id="2" name="Content Placeholder 1">
-            <a:extLst>
-              <a:ext uri="{FF2B5EF4-FFF2-40B4-BE49-F238E27FC236}">
-                <a16:creationId xmlns:a16="http://schemas.microsoft.com/office/drawing/2014/main" id="{73BE7F54-419C-A154-D569-31C6B1ADB812}"/>
-              </a:ext>
-            </a:extLst>
-          </p:cNvPr>
-          <p:cNvSpPr>
-            <a:spLocks noGrp="1"/>
-          </p:cNvSpPr>
-          <p:nvPr>
-            <p:ph sz="half" idx="1"/>
-          </p:nvPr>
-        </p:nvSpPr>
-        <p:spPr>
-          <a:xfrm>
-            <a:off x="885822" y="1200150"/>
-            <a:ext cx="5362577" cy="5237292"/>
-          </a:xfrm>
-        </p:spPr>
-        <p:txBody>
-          <a:bodyPr lIns="0" tIns="0" rIns="0" bIns="0" anchor="t"/>
-          <a:lstStyle/>
-          <a:p>
-            <a:pPr marL="285750" indent="-285750">
-              <a:buFont typeface="Arial"/>
-              <a:buChar char="•"/>
-            </a:pPr>
-            <a:r>
-              <a:rPr lang="en-US" err="1">
-                <a:ea typeface="+mn-lt"/>
-                <a:cs typeface="+mn-lt"/>
-              </a:rPr>
-              <a:t>Cenové</a:t>
-            </a:r>
-            <a:r>
-              <a:rPr lang="en-US">
-                <a:ea typeface="+mn-lt"/>
-                <a:cs typeface="+mn-lt"/>
-              </a:rPr>
-              <a:t> </a:t>
-            </a:r>
-            <a:r>
-              <a:rPr lang="en-US" err="1">
-                <a:ea typeface="+mn-lt"/>
-                <a:cs typeface="+mn-lt"/>
-              </a:rPr>
-              <a:t>řady</a:t>
-            </a:r>
-            <a:r>
-              <a:rPr lang="en-US">
-                <a:ea typeface="+mn-lt"/>
-                <a:cs typeface="+mn-lt"/>
-              </a:rPr>
-              <a:t> </a:t>
-            </a:r>
-            <a:r>
-              <a:rPr lang="en-US" err="1">
-                <a:ea typeface="+mn-lt"/>
-                <a:cs typeface="+mn-lt"/>
-              </a:rPr>
-              <a:t>byly</a:t>
-            </a:r>
-            <a:r>
-              <a:rPr lang="en-US">
-                <a:ea typeface="+mn-lt"/>
-                <a:cs typeface="+mn-lt"/>
-              </a:rPr>
-              <a:t> </a:t>
-            </a:r>
-            <a:r>
-              <a:rPr lang="en-US" err="1">
-                <a:ea typeface="+mn-lt"/>
-                <a:cs typeface="+mn-lt"/>
-              </a:rPr>
-              <a:t>očištěny</a:t>
-            </a:r>
-            <a:r>
-              <a:rPr lang="en-US">
-                <a:ea typeface="+mn-lt"/>
-                <a:cs typeface="+mn-lt"/>
-              </a:rPr>
-              <a:t> o </a:t>
-            </a:r>
-            <a:r>
-              <a:rPr lang="en-US" err="1">
-                <a:ea typeface="+mn-lt"/>
-                <a:cs typeface="+mn-lt"/>
-              </a:rPr>
-              <a:t>inflaci</a:t>
-            </a:r>
-            <a:r>
-              <a:rPr lang="en-US">
-                <a:ea typeface="+mn-lt"/>
-                <a:cs typeface="+mn-lt"/>
-              </a:rPr>
-              <a:t> </a:t>
-            </a:r>
-            <a:r>
-              <a:rPr lang="en-US" err="1">
-                <a:ea typeface="+mn-lt"/>
-                <a:cs typeface="+mn-lt"/>
-              </a:rPr>
-              <a:t>pomocí</a:t>
-            </a:r>
-            <a:r>
-              <a:rPr lang="en-US">
-                <a:ea typeface="+mn-lt"/>
-                <a:cs typeface="+mn-lt"/>
-              </a:rPr>
-              <a:t> </a:t>
-            </a:r>
-            <a:r>
-              <a:rPr lang="en-US" err="1">
-                <a:ea typeface="+mn-lt"/>
-                <a:cs typeface="+mn-lt"/>
-              </a:rPr>
-              <a:t>měsíční</a:t>
-            </a:r>
-            <a:r>
-              <a:rPr lang="en-US">
-                <a:ea typeface="+mn-lt"/>
-                <a:cs typeface="+mn-lt"/>
-              </a:rPr>
-              <a:t> </a:t>
-            </a:r>
-            <a:r>
-              <a:rPr lang="en-US" err="1">
-                <a:ea typeface="+mn-lt"/>
-                <a:cs typeface="+mn-lt"/>
-              </a:rPr>
-              <a:t>míry</a:t>
-            </a:r>
-            <a:r>
-              <a:rPr lang="en-US">
-                <a:ea typeface="+mn-lt"/>
-                <a:cs typeface="+mn-lt"/>
-              </a:rPr>
-              <a:t> </a:t>
-            </a:r>
-            <a:r>
-              <a:rPr lang="en-US" err="1">
-                <a:ea typeface="+mn-lt"/>
-                <a:cs typeface="+mn-lt"/>
-              </a:rPr>
-              <a:t>inflace</a:t>
-            </a:r>
-            <a:r>
-              <a:rPr lang="en-US">
-                <a:ea typeface="+mn-lt"/>
-                <a:cs typeface="+mn-lt"/>
-              </a:rPr>
-              <a:t>.</a:t>
-            </a:r>
-            <a:endParaRPr lang="en-US"/>
-          </a:p>
-          <a:p>
-            <a:pPr marL="285750" indent="-285750">
-              <a:buFont typeface="Arial"/>
-              <a:buChar char="•"/>
-            </a:pPr>
-            <a:r>
-              <a:rPr lang="en-US">
-                <a:ea typeface="+mn-lt"/>
-                <a:cs typeface="+mn-lt"/>
-              </a:rPr>
-              <a:t>V </a:t>
-            </a:r>
-            <a:r>
-              <a:rPr lang="en-US" err="1">
-                <a:ea typeface="+mn-lt"/>
-                <a:cs typeface="+mn-lt"/>
-              </a:rPr>
-              <a:t>reálném</a:t>
-            </a:r>
-            <a:r>
-              <a:rPr lang="en-US">
-                <a:ea typeface="+mn-lt"/>
-                <a:cs typeface="+mn-lt"/>
-              </a:rPr>
-              <a:t> </a:t>
-            </a:r>
-            <a:r>
-              <a:rPr lang="en-US" err="1">
-                <a:ea typeface="+mn-lt"/>
-                <a:cs typeface="+mn-lt"/>
-              </a:rPr>
-              <a:t>vyjádření</a:t>
-            </a:r>
-            <a:r>
-              <a:rPr lang="en-US">
-                <a:ea typeface="+mn-lt"/>
-                <a:cs typeface="+mn-lt"/>
-              </a:rPr>
-              <a:t> je </a:t>
-            </a:r>
-            <a:r>
-              <a:rPr lang="en-US" err="1">
-                <a:ea typeface="+mn-lt"/>
-                <a:cs typeface="+mn-lt"/>
-              </a:rPr>
-              <a:t>růst</a:t>
-            </a:r>
-            <a:r>
-              <a:rPr lang="en-US">
-                <a:ea typeface="+mn-lt"/>
-                <a:cs typeface="+mn-lt"/>
-              </a:rPr>
-              <a:t> </a:t>
-            </a:r>
-            <a:r>
-              <a:rPr lang="en-US" err="1">
-                <a:ea typeface="+mn-lt"/>
-                <a:cs typeface="+mn-lt"/>
-              </a:rPr>
-              <a:t>cen</a:t>
-            </a:r>
-            <a:r>
-              <a:rPr lang="en-US">
-                <a:ea typeface="+mn-lt"/>
-                <a:cs typeface="+mn-lt"/>
-              </a:rPr>
-              <a:t> po </a:t>
-            </a:r>
-            <a:r>
-              <a:rPr lang="en-US" err="1">
-                <a:ea typeface="+mn-lt"/>
-                <a:cs typeface="+mn-lt"/>
-              </a:rPr>
-              <a:t>roce</a:t>
-            </a:r>
-            <a:r>
-              <a:rPr lang="en-US">
-                <a:ea typeface="+mn-lt"/>
-                <a:cs typeface="+mn-lt"/>
-              </a:rPr>
-              <a:t> 2021 </a:t>
-            </a:r>
-            <a:r>
-              <a:rPr lang="en-US" err="1">
-                <a:ea typeface="+mn-lt"/>
-                <a:cs typeface="+mn-lt"/>
-              </a:rPr>
-              <a:t>méně</a:t>
-            </a:r>
-            <a:r>
-              <a:rPr lang="en-US">
-                <a:ea typeface="+mn-lt"/>
-                <a:cs typeface="+mn-lt"/>
-              </a:rPr>
-              <a:t> </a:t>
-            </a:r>
-            <a:r>
-              <a:rPr lang="en-US" err="1">
-                <a:ea typeface="+mn-lt"/>
-                <a:cs typeface="+mn-lt"/>
-              </a:rPr>
-              <a:t>výrazný</a:t>
-            </a:r>
-            <a:r>
-              <a:rPr lang="en-US">
-                <a:ea typeface="+mn-lt"/>
-                <a:cs typeface="+mn-lt"/>
-              </a:rPr>
-              <a:t>.</a:t>
-            </a:r>
-            <a:endParaRPr lang="en-US"/>
-          </a:p>
-          <a:p>
-            <a:pPr marL="285750" indent="-285750">
-              <a:buFont typeface="Arial"/>
-              <a:buChar char="•"/>
-            </a:pPr>
-            <a:r>
-              <a:rPr lang="en-US">
-                <a:ea typeface="+mn-lt"/>
-                <a:cs typeface="+mn-lt"/>
-              </a:rPr>
-              <a:t>U </a:t>
-            </a:r>
-            <a:r>
-              <a:rPr lang="en-US" b="1">
-                <a:ea typeface="+mn-lt"/>
-                <a:cs typeface="+mn-lt"/>
-              </a:rPr>
-              <a:t>SC</a:t>
-            </a:r>
-            <a:r>
-              <a:rPr lang="en-US">
-                <a:ea typeface="+mn-lt"/>
-                <a:cs typeface="+mn-lt"/>
-              </a:rPr>
-              <a:t> se </a:t>
-            </a:r>
-            <a:r>
-              <a:rPr lang="en-US" err="1">
-                <a:ea typeface="+mn-lt"/>
-                <a:cs typeface="+mn-lt"/>
-              </a:rPr>
-              <a:t>nominální</a:t>
-            </a:r>
-            <a:r>
-              <a:rPr lang="en-US">
-                <a:ea typeface="+mn-lt"/>
-                <a:cs typeface="+mn-lt"/>
-              </a:rPr>
-              <a:t> </a:t>
-            </a:r>
-            <a:r>
-              <a:rPr lang="en-US" err="1">
-                <a:ea typeface="+mn-lt"/>
-                <a:cs typeface="+mn-lt"/>
-              </a:rPr>
-              <a:t>zdražení</a:t>
-            </a:r>
-            <a:r>
-              <a:rPr lang="en-US">
-                <a:ea typeface="+mn-lt"/>
-                <a:cs typeface="+mn-lt"/>
-              </a:rPr>
-              <a:t> po </a:t>
-            </a:r>
-            <a:r>
-              <a:rPr lang="en-US" err="1">
-                <a:ea typeface="+mn-lt"/>
-                <a:cs typeface="+mn-lt"/>
-              </a:rPr>
-              <a:t>očištění</a:t>
-            </a:r>
-            <a:r>
-              <a:rPr lang="en-US">
-                <a:ea typeface="+mn-lt"/>
-                <a:cs typeface="+mn-lt"/>
-              </a:rPr>
-              <a:t> </a:t>
-            </a:r>
-            <a:r>
-              <a:rPr lang="en-US" err="1">
-                <a:ea typeface="+mn-lt"/>
-                <a:cs typeface="+mn-lt"/>
-              </a:rPr>
-              <a:t>mění</a:t>
-            </a:r>
-            <a:r>
-              <a:rPr lang="en-US">
-                <a:ea typeface="+mn-lt"/>
-                <a:cs typeface="+mn-lt"/>
-              </a:rPr>
-              <a:t> </a:t>
-            </a:r>
-            <a:r>
-              <a:rPr lang="en-US" err="1">
-                <a:ea typeface="+mn-lt"/>
-                <a:cs typeface="+mn-lt"/>
-              </a:rPr>
-              <a:t>spíše</a:t>
-            </a:r>
-            <a:r>
-              <a:rPr lang="en-US">
-                <a:ea typeface="+mn-lt"/>
-                <a:cs typeface="+mn-lt"/>
-              </a:rPr>
-              <a:t> </a:t>
-            </a:r>
-            <a:r>
-              <a:rPr lang="en-US" err="1">
-                <a:ea typeface="+mn-lt"/>
-                <a:cs typeface="+mn-lt"/>
-              </a:rPr>
-              <a:t>ve</a:t>
-            </a:r>
-            <a:r>
-              <a:rPr lang="en-US">
-                <a:ea typeface="+mn-lt"/>
-                <a:cs typeface="+mn-lt"/>
-              </a:rPr>
-              <a:t> </a:t>
-            </a:r>
-            <a:r>
-              <a:rPr lang="en-US" err="1">
-                <a:ea typeface="+mn-lt"/>
-                <a:cs typeface="+mn-lt"/>
-              </a:rPr>
-              <a:t>stagnaci</a:t>
-            </a:r>
-            <a:r>
-              <a:rPr lang="en-US">
-                <a:ea typeface="+mn-lt"/>
-                <a:cs typeface="+mn-lt"/>
-              </a:rPr>
-              <a:t> </a:t>
-            </a:r>
-            <a:r>
-              <a:rPr lang="en-US" err="1">
-                <a:ea typeface="+mn-lt"/>
-                <a:cs typeface="+mn-lt"/>
-              </a:rPr>
-              <a:t>až</a:t>
-            </a:r>
-            <a:r>
-              <a:rPr lang="en-US">
-                <a:ea typeface="+mn-lt"/>
-                <a:cs typeface="+mn-lt"/>
-              </a:rPr>
-              <a:t> </a:t>
-            </a:r>
-            <a:r>
-              <a:rPr lang="en-US" err="1">
-                <a:ea typeface="+mn-lt"/>
-                <a:cs typeface="+mn-lt"/>
-              </a:rPr>
-              <a:t>mírný</a:t>
-            </a:r>
-            <a:r>
-              <a:rPr lang="en-US">
-                <a:ea typeface="+mn-lt"/>
-                <a:cs typeface="+mn-lt"/>
-              </a:rPr>
-              <a:t> </a:t>
-            </a:r>
-            <a:r>
-              <a:rPr lang="en-US" err="1">
-                <a:ea typeface="+mn-lt"/>
-                <a:cs typeface="+mn-lt"/>
-              </a:rPr>
-              <a:t>pokles</a:t>
-            </a:r>
-            <a:r>
-              <a:rPr lang="en-US">
-                <a:ea typeface="+mn-lt"/>
-                <a:cs typeface="+mn-lt"/>
-              </a:rPr>
-              <a:t>.</a:t>
-            </a:r>
-            <a:endParaRPr lang="en-US"/>
-          </a:p>
-          <a:p>
-            <a:pPr marL="285750" indent="-285750">
-              <a:buFont typeface="Arial"/>
-              <a:buChar char="•"/>
-            </a:pPr>
-            <a:r>
-              <a:rPr lang="en-US">
-                <a:ea typeface="+mn-lt"/>
-                <a:cs typeface="+mn-lt"/>
-              </a:rPr>
-              <a:t>U </a:t>
-            </a:r>
-            <a:r>
-              <a:rPr lang="en-US" b="1">
-                <a:ea typeface="+mn-lt"/>
-                <a:cs typeface="+mn-lt"/>
-              </a:rPr>
-              <a:t>CPV</a:t>
-            </a:r>
-            <a:r>
-              <a:rPr lang="en-US">
-                <a:ea typeface="+mn-lt"/>
-                <a:cs typeface="+mn-lt"/>
-              </a:rPr>
-              <a:t> se </a:t>
-            </a:r>
-            <a:r>
-              <a:rPr lang="en-US" err="1">
-                <a:ea typeface="+mn-lt"/>
-                <a:cs typeface="+mn-lt"/>
-              </a:rPr>
-              <a:t>ukazuje</a:t>
-            </a:r>
-            <a:r>
-              <a:rPr lang="en-US">
-                <a:ea typeface="+mn-lt"/>
-                <a:cs typeface="+mn-lt"/>
-              </a:rPr>
-              <a:t> </a:t>
-            </a:r>
-            <a:r>
-              <a:rPr lang="en-US" err="1">
-                <a:ea typeface="+mn-lt"/>
-                <a:cs typeface="+mn-lt"/>
-              </a:rPr>
-              <a:t>stabilnější</a:t>
-            </a:r>
-            <a:r>
-              <a:rPr lang="en-US">
-                <a:ea typeface="+mn-lt"/>
-                <a:cs typeface="+mn-lt"/>
-              </a:rPr>
-              <a:t> </a:t>
-            </a:r>
-            <a:r>
-              <a:rPr lang="en-US" err="1">
-                <a:ea typeface="+mn-lt"/>
-                <a:cs typeface="+mn-lt"/>
-              </a:rPr>
-              <a:t>reálný</a:t>
-            </a:r>
-            <a:r>
-              <a:rPr lang="en-US">
-                <a:ea typeface="+mn-lt"/>
-                <a:cs typeface="+mn-lt"/>
-              </a:rPr>
-              <a:t> </a:t>
-            </a:r>
-            <a:r>
-              <a:rPr lang="en-US" err="1">
-                <a:ea typeface="+mn-lt"/>
-                <a:cs typeface="+mn-lt"/>
-              </a:rPr>
-              <a:t>vývoj</a:t>
-            </a:r>
-            <a:r>
-              <a:rPr lang="en-US">
-                <a:ea typeface="+mn-lt"/>
-                <a:cs typeface="+mn-lt"/>
-              </a:rPr>
-              <a:t>.</a:t>
-            </a:r>
-            <a:endParaRPr lang="en-US"/>
-          </a:p>
-          <a:p>
-            <a:pPr marL="285750" indent="-285750">
-              <a:buFont typeface="Arial"/>
-              <a:buChar char="•"/>
-            </a:pPr>
-            <a:r>
-              <a:rPr lang="en-US">
-                <a:ea typeface="+mn-lt"/>
-                <a:cs typeface="+mn-lt"/>
-              </a:rPr>
-              <a:t>U </a:t>
-            </a:r>
-            <a:r>
-              <a:rPr lang="en-US" b="1">
-                <a:ea typeface="+mn-lt"/>
-                <a:cs typeface="+mn-lt"/>
-              </a:rPr>
-              <a:t>CZV</a:t>
-            </a:r>
-            <a:r>
-              <a:rPr lang="en-US">
-                <a:ea typeface="+mn-lt"/>
-                <a:cs typeface="+mn-lt"/>
-              </a:rPr>
-              <a:t> </a:t>
-            </a:r>
-            <a:r>
-              <a:rPr lang="en-US" err="1">
-                <a:ea typeface="+mn-lt"/>
-                <a:cs typeface="+mn-lt"/>
-              </a:rPr>
-              <a:t>přetrvává</a:t>
-            </a:r>
-            <a:r>
-              <a:rPr lang="en-US">
-                <a:ea typeface="+mn-lt"/>
-                <a:cs typeface="+mn-lt"/>
-              </a:rPr>
-              <a:t> </a:t>
-            </a:r>
-            <a:r>
-              <a:rPr lang="en-US" err="1">
-                <a:ea typeface="+mn-lt"/>
-                <a:cs typeface="+mn-lt"/>
-              </a:rPr>
-              <a:t>vyšší</a:t>
-            </a:r>
-            <a:r>
-              <a:rPr lang="en-US">
-                <a:ea typeface="+mn-lt"/>
-                <a:cs typeface="+mn-lt"/>
-              </a:rPr>
-              <a:t> </a:t>
-            </a:r>
-            <a:r>
-              <a:rPr lang="en-US" err="1">
-                <a:ea typeface="+mn-lt"/>
-                <a:cs typeface="+mn-lt"/>
-              </a:rPr>
-              <a:t>volatilita</a:t>
-            </a:r>
-            <a:r>
-              <a:rPr lang="en-US">
-                <a:ea typeface="+mn-lt"/>
-                <a:cs typeface="+mn-lt"/>
-              </a:rPr>
-              <a:t>, ale </a:t>
-            </a:r>
-            <a:r>
-              <a:rPr lang="en-US" err="1">
-                <a:ea typeface="+mn-lt"/>
-                <a:cs typeface="+mn-lt"/>
-              </a:rPr>
-              <a:t>část</a:t>
-            </a:r>
-            <a:r>
-              <a:rPr lang="en-US">
-                <a:ea typeface="+mn-lt"/>
-                <a:cs typeface="+mn-lt"/>
-              </a:rPr>
-              <a:t> </a:t>
-            </a:r>
-            <a:r>
-              <a:rPr lang="en-US" err="1">
-                <a:ea typeface="+mn-lt"/>
-                <a:cs typeface="+mn-lt"/>
-              </a:rPr>
-              <a:t>růstu</a:t>
-            </a:r>
-            <a:r>
-              <a:rPr lang="en-US">
-                <a:ea typeface="+mn-lt"/>
-                <a:cs typeface="+mn-lt"/>
-              </a:rPr>
-              <a:t> </a:t>
-            </a:r>
-            <a:r>
-              <a:rPr lang="en-US" err="1">
-                <a:ea typeface="+mn-lt"/>
-                <a:cs typeface="+mn-lt"/>
-              </a:rPr>
-              <a:t>byla</a:t>
-            </a:r>
-            <a:r>
-              <a:rPr lang="en-US">
-                <a:ea typeface="+mn-lt"/>
-                <a:cs typeface="+mn-lt"/>
-              </a:rPr>
-              <a:t> </a:t>
-            </a:r>
-            <a:r>
-              <a:rPr lang="en-US" err="1">
-                <a:ea typeface="+mn-lt"/>
-                <a:cs typeface="+mn-lt"/>
-              </a:rPr>
-              <a:t>způsobena</a:t>
-            </a:r>
-            <a:r>
-              <a:rPr lang="en-US">
-                <a:ea typeface="+mn-lt"/>
-                <a:cs typeface="+mn-lt"/>
-              </a:rPr>
-              <a:t> </a:t>
-            </a:r>
-            <a:r>
-              <a:rPr lang="en-US" err="1">
-                <a:ea typeface="+mn-lt"/>
-                <a:cs typeface="+mn-lt"/>
-              </a:rPr>
-              <a:t>obecnou</a:t>
-            </a:r>
-            <a:r>
-              <a:rPr lang="en-US">
-                <a:ea typeface="+mn-lt"/>
-                <a:cs typeface="+mn-lt"/>
-              </a:rPr>
-              <a:t> </a:t>
-            </a:r>
-            <a:r>
-              <a:rPr lang="en-US" err="1">
-                <a:ea typeface="+mn-lt"/>
-                <a:cs typeface="+mn-lt"/>
-              </a:rPr>
-              <a:t>inflací</a:t>
-            </a:r>
-            <a:r>
-              <a:rPr lang="en-US">
-                <a:ea typeface="+mn-lt"/>
-                <a:cs typeface="+mn-lt"/>
-              </a:rPr>
-              <a:t>.</a:t>
-            </a:r>
-            <a:endParaRPr lang="en-US"/>
-          </a:p>
-          <a:p>
-            <a:endParaRPr lang="en-US">
-              <a:cs typeface="Arial"/>
-            </a:endParaRPr>
-          </a:p>
-        </p:txBody>
-      </p:sp>
-      <p:sp>
-        <p:nvSpPr>
-          <p:cNvPr id="3" name="Text Placeholder 2">
-            <a:extLst>
-              <a:ext uri="{FF2B5EF4-FFF2-40B4-BE49-F238E27FC236}">
-                <a16:creationId xmlns:a16="http://schemas.microsoft.com/office/drawing/2014/main" id="{CB489C35-9018-D4C6-F16F-7426926DFB3C}"/>
-              </a:ext>
-            </a:extLst>
-          </p:cNvPr>
-          <p:cNvSpPr>
-            <a:spLocks noGrp="1"/>
-          </p:cNvSpPr>
-          <p:nvPr>
-            <p:ph type="body" sz="quarter" idx="14"/>
-          </p:nvPr>
-        </p:nvSpPr>
-        <p:spPr/>
-        <p:txBody>
-          <a:bodyPr lIns="0" tIns="0" rIns="0" bIns="0" anchor="t"/>
-          <a:lstStyle/>
-          <a:p>
-            <a:r>
-              <a:rPr lang="en-US">
-                <a:ea typeface="+mn-lt"/>
-                <a:cs typeface="+mn-lt"/>
-              </a:rPr>
-              <a:t>3) Po </a:t>
-            </a:r>
-            <a:r>
-              <a:rPr lang="en-US" err="1">
-                <a:ea typeface="+mn-lt"/>
-                <a:cs typeface="+mn-lt"/>
-              </a:rPr>
-              <a:t>očištění</a:t>
-            </a:r>
-            <a:r>
-              <a:rPr lang="en-US">
-                <a:ea typeface="+mn-lt"/>
-                <a:cs typeface="+mn-lt"/>
-              </a:rPr>
-              <a:t> o </a:t>
-            </a:r>
-            <a:r>
-              <a:rPr lang="en-US" err="1">
-                <a:ea typeface="+mn-lt"/>
-                <a:cs typeface="+mn-lt"/>
-              </a:rPr>
-              <a:t>inflaci</a:t>
-            </a:r>
-            <a:r>
-              <a:rPr lang="en-US">
-                <a:ea typeface="+mn-lt"/>
-                <a:cs typeface="+mn-lt"/>
-              </a:rPr>
-              <a:t> je </a:t>
-            </a:r>
-            <a:r>
-              <a:rPr lang="en-US" err="1">
-                <a:ea typeface="+mn-lt"/>
-                <a:cs typeface="+mn-lt"/>
-              </a:rPr>
-              <a:t>růst</a:t>
-            </a:r>
-            <a:r>
-              <a:rPr lang="en-US">
-                <a:ea typeface="+mn-lt"/>
-                <a:cs typeface="+mn-lt"/>
-              </a:rPr>
-              <a:t> </a:t>
-            </a:r>
-            <a:r>
-              <a:rPr lang="en-US" err="1">
-                <a:ea typeface="+mn-lt"/>
-                <a:cs typeface="+mn-lt"/>
-              </a:rPr>
-              <a:t>cen</a:t>
-            </a:r>
-            <a:r>
-              <a:rPr lang="en-US">
-                <a:ea typeface="+mn-lt"/>
-                <a:cs typeface="+mn-lt"/>
-              </a:rPr>
-              <a:t> </a:t>
-            </a:r>
-            <a:r>
-              <a:rPr lang="en-US" err="1">
-                <a:ea typeface="+mn-lt"/>
-                <a:cs typeface="+mn-lt"/>
-              </a:rPr>
-              <a:t>výrazně</a:t>
-            </a:r>
-            <a:r>
-              <a:rPr lang="en-US">
-                <a:ea typeface="+mn-lt"/>
-                <a:cs typeface="+mn-lt"/>
-              </a:rPr>
-              <a:t> </a:t>
-            </a:r>
-            <a:r>
-              <a:rPr lang="en-US" err="1">
-                <a:ea typeface="+mn-lt"/>
-                <a:cs typeface="+mn-lt"/>
-              </a:rPr>
-              <a:t>mírnější</a:t>
-            </a:r>
-            <a:endParaRPr lang="en-US" err="1"/>
-          </a:p>
-        </p:txBody>
-      </p:sp>
-      <p:pic>
-        <p:nvPicPr>
-          <p:cNvPr id="5" name="Content Placeholder 4">
-            <a:extLst>
-              <a:ext uri="{FF2B5EF4-FFF2-40B4-BE49-F238E27FC236}">
-                <a16:creationId xmlns:a16="http://schemas.microsoft.com/office/drawing/2014/main" id="{B639FEA3-4C79-C570-1557-30E75909B85C}"/>
-              </a:ext>
-            </a:extLst>
-          </p:cNvPr>
-          <p:cNvPicPr>
-            <a:picLocks noGrp="1" noChangeAspect="1"/>
-          </p:cNvPicPr>
-          <p:nvPr>
-            <p:ph sz="half" idx="15"/>
-          </p:nvPr>
-        </p:nvPicPr>
-        <p:blipFill>
-          <a:blip r:embed="rId2"/>
-          <a:stretch>
-            <a:fillRect/>
-          </a:stretch>
-        </p:blipFill>
-        <p:spPr>
-          <a:xfrm>
-            <a:off x="6351847" y="3347034"/>
-            <a:ext cx="5362577" cy="2396235"/>
-          </a:xfrm>
-          <a:prstGeom prst="rect">
-            <a:avLst/>
-          </a:prstGeom>
-        </p:spPr>
-      </p:pic>
-      <p:pic>
-        <p:nvPicPr>
-          <p:cNvPr id="7" name="Content Placeholder 4">
-            <a:extLst>
-              <a:ext uri="{FF2B5EF4-FFF2-40B4-BE49-F238E27FC236}">
-                <a16:creationId xmlns:a16="http://schemas.microsoft.com/office/drawing/2014/main" id="{B8BACDE5-A0A2-D819-2E51-444B19158FF4}"/>
-              </a:ext>
-            </a:extLst>
-          </p:cNvPr>
-          <p:cNvPicPr>
-            <a:picLocks noChangeAspect="1"/>
-          </p:cNvPicPr>
-          <p:nvPr/>
-        </p:nvPicPr>
-        <p:blipFill>
-          <a:blip r:embed="rId3"/>
-          <a:srcRect l="70" t="-263" b="9473"/>
-          <a:stretch>
-            <a:fillRect/>
-          </a:stretch>
-        </p:blipFill>
-        <p:spPr>
-          <a:xfrm>
-            <a:off x="6355584" y="1040963"/>
-            <a:ext cx="5358840" cy="2304950"/>
-          </a:xfrm>
-          <a:prstGeom prst="rect">
-            <a:avLst/>
-          </a:prstGeom>
-        </p:spPr>
-      </p:pic>
-    </p:spTree>
-    <p:extLst>
-      <p:ext uri="{BB962C8B-B14F-4D97-AF65-F5344CB8AC3E}">
-        <p14:creationId xmlns:p14="http://schemas.microsoft.com/office/powerpoint/2010/main" val="772860038"/>
       </p:ext>
     </p:extLst>
   </p:cSld>
